--- a/AI_Infusion_Delivery_Assessment.pptx
+++ b/AI_Infusion_Delivery_Assessment.pptx
@@ -7609,17 +7609,19 @@
         </p:nvSpPr>
         <p:spPr>
           <a:xfrm>
-            <a:off x="457200" y="1920240"/>
-            <a:ext cx="11247120" cy="3977639"/>
-          </a:xfrm>
-          <a:prstGeom prst="rect">
-            <a:avLst/>
-          </a:prstGeom>
-          <a:solidFill>
-            <a:srgbClr val="1E1E2E"/>
-          </a:solidFill>
-          <a:ln>
-            <a:noFill/>
+            <a:off x="365760" y="1920240"/>
+            <a:ext cx="3108960" cy="1234440"/>
+          </a:xfrm>
+          <a:prstGeom prst="rect">
+            <a:avLst/>
+          </a:prstGeom>
+          <a:solidFill>
+            <a:srgbClr val="E8F0FE"/>
+          </a:solidFill>
+          <a:ln w="15240">
+            <a:solidFill>
+              <a:srgbClr val="0F3460"/>
+            </a:solidFill>
           </a:ln>
         </p:spPr>
         <p:style>
@@ -7637,32 +7639,113 @@
           </a:fontRef>
         </p:style>
         <p:txBody>
-          <a:bodyPr rtlCol="0" anchor="ctr"/>
-          <a:lstStyle/>
-          <a:p>
-            <a:pPr algn="ctr"/>
-          </a:p>
-        </p:txBody>
-      </p:sp>
-      <p:sp>
-        <p:nvSpPr>
-          <p:cNvPr id="6" name="Rectangle 5"/>
+          <a:bodyPr rtlCol="0" anchor="ctr" wrap="square" tIns="502920"/>
+          <a:lstStyle/>
+          <a:p>
+            <a:pPr algn="ctr"/>
+            <a:r>
+              <a:rPr sz="1200" b="0">
+                <a:solidFill>
+                  <a:srgbClr val="0F3460"/>
+                </a:solidFill>
+              </a:rPr>
+              <a:t>Profile
+Analyse column stats
+(min, max, nulls,
+cardinality)</a:t>
+            </a:r>
+          </a:p>
+        </p:txBody>
+      </p:sp>
+      <p:sp>
+        <p:nvSpPr>
+          <p:cNvPr id="6" name="TextBox 5"/>
+          <p:cNvSpPr txBox="1"/>
+          <p:nvPr/>
+        </p:nvSpPr>
+        <p:spPr>
+          <a:xfrm>
+            <a:off x="475488" y="1984248"/>
+            <a:ext cx="365760" cy="347472"/>
+          </a:xfrm>
+          <a:prstGeom prst="rect">
+            <a:avLst/>
+          </a:prstGeom>
+          <a:noFill/>
+        </p:spPr>
+        <p:txBody>
+          <a:bodyPr wrap="square">
+            <a:spAutoFit/>
+          </a:bodyPr>
+          <a:lstStyle/>
+          <a:p>
+            <a:pPr algn="l"/>
+            <a:r>
+              <a:rPr sz="1400" b="1" i="0">
+                <a:solidFill>
+                  <a:srgbClr val="0F3460"/>
+                </a:solidFill>
+              </a:rPr>
+              <a:t>①</a:t>
+            </a:r>
+          </a:p>
+        </p:txBody>
+      </p:sp>
+      <p:sp>
+        <p:nvSpPr>
+          <p:cNvPr id="7" name="TextBox 6"/>
+          <p:cNvSpPr txBox="1"/>
+          <p:nvPr/>
+        </p:nvSpPr>
+        <p:spPr>
+          <a:xfrm>
+            <a:off x="3584448" y="2249424"/>
+            <a:ext cx="411480" cy="457200"/>
+          </a:xfrm>
+          <a:prstGeom prst="rect">
+            <a:avLst/>
+          </a:prstGeom>
+          <a:noFill/>
+        </p:spPr>
+        <p:txBody>
+          <a:bodyPr wrap="square">
+            <a:spAutoFit/>
+          </a:bodyPr>
+          <a:lstStyle/>
+          <a:p>
+            <a:pPr algn="ctr"/>
+            <a:r>
+              <a:rPr sz="1800" b="1" i="0">
+                <a:solidFill>
+                  <a:srgbClr val="CCCCCC"/>
+                </a:solidFill>
+              </a:rPr>
+              <a:t>→</a:t>
+            </a:r>
+          </a:p>
+        </p:txBody>
+      </p:sp>
+      <p:sp>
+        <p:nvSpPr>
+          <p:cNvPr id="8" name="Rectangle 7"/>
           <p:cNvSpPr/>
           <p:nvPr/>
         </p:nvSpPr>
         <p:spPr>
           <a:xfrm>
-            <a:off x="457200" y="1920240"/>
-            <a:ext cx="50800" cy="3977639"/>
-          </a:xfrm>
-          <a:prstGeom prst="rect">
-            <a:avLst/>
-          </a:prstGeom>
-          <a:solidFill>
-            <a:srgbClr val="E94560"/>
-          </a:solidFill>
-          <a:ln>
-            <a:noFill/>
+            <a:off x="4114800" y="1920240"/>
+            <a:ext cx="3108960" cy="1234440"/>
+          </a:xfrm>
+          <a:prstGeom prst="rect">
+            <a:avLst/>
+          </a:prstGeom>
+          <a:solidFill>
+            <a:srgbClr val="E8F0FE"/>
+          </a:solidFill>
+          <a:ln w="15240">
+            <a:solidFill>
+              <a:srgbClr val="0F3460"/>
+            </a:solidFill>
           </a:ln>
         </p:spPr>
         <p:style>
@@ -7680,6 +7763,555 @@
           </a:fontRef>
         </p:style>
         <p:txBody>
+          <a:bodyPr rtlCol="0" anchor="ctr" wrap="square" tIns="502920"/>
+          <a:lstStyle/>
+          <a:p>
+            <a:pPr algn="ctr"/>
+            <a:r>
+              <a:rPr sz="1200" b="0">
+                <a:solidFill>
+                  <a:srgbClr val="0F3460"/>
+                </a:solidFill>
+              </a:rPr>
+              <a:t>Build Prompt
+Convert stats into
+structured LLM prompt
++ domain context</a:t>
+            </a:r>
+          </a:p>
+        </p:txBody>
+      </p:sp>
+      <p:sp>
+        <p:nvSpPr>
+          <p:cNvPr id="9" name="TextBox 8"/>
+          <p:cNvSpPr txBox="1"/>
+          <p:nvPr/>
+        </p:nvSpPr>
+        <p:spPr>
+          <a:xfrm>
+            <a:off x="4224528" y="1984248"/>
+            <a:ext cx="365760" cy="347472"/>
+          </a:xfrm>
+          <a:prstGeom prst="rect">
+            <a:avLst/>
+          </a:prstGeom>
+          <a:noFill/>
+        </p:spPr>
+        <p:txBody>
+          <a:bodyPr wrap="square">
+            <a:spAutoFit/>
+          </a:bodyPr>
+          <a:lstStyle/>
+          <a:p>
+            <a:pPr algn="l"/>
+            <a:r>
+              <a:rPr sz="1400" b="1" i="0">
+                <a:solidFill>
+                  <a:srgbClr val="0F3460"/>
+                </a:solidFill>
+              </a:rPr>
+              <a:t>②</a:t>
+            </a:r>
+          </a:p>
+        </p:txBody>
+      </p:sp>
+      <p:sp>
+        <p:nvSpPr>
+          <p:cNvPr id="10" name="TextBox 9"/>
+          <p:cNvSpPr txBox="1"/>
+          <p:nvPr/>
+        </p:nvSpPr>
+        <p:spPr>
+          <a:xfrm>
+            <a:off x="7333488" y="2249424"/>
+            <a:ext cx="411480" cy="457200"/>
+          </a:xfrm>
+          <a:prstGeom prst="rect">
+            <a:avLst/>
+          </a:prstGeom>
+          <a:noFill/>
+        </p:spPr>
+        <p:txBody>
+          <a:bodyPr wrap="square">
+            <a:spAutoFit/>
+          </a:bodyPr>
+          <a:lstStyle/>
+          <a:p>
+            <a:pPr algn="ctr"/>
+            <a:r>
+              <a:rPr sz="1800" b="1" i="0">
+                <a:solidFill>
+                  <a:srgbClr val="CCCCCC"/>
+                </a:solidFill>
+              </a:rPr>
+              <a:t>→</a:t>
+            </a:r>
+          </a:p>
+        </p:txBody>
+      </p:sp>
+      <p:sp>
+        <p:nvSpPr>
+          <p:cNvPr id="11" name="Rectangle 10"/>
+          <p:cNvSpPr/>
+          <p:nvPr/>
+        </p:nvSpPr>
+        <p:spPr>
+          <a:xfrm>
+            <a:off x="7863840" y="1920240"/>
+            <a:ext cx="3108960" cy="1234440"/>
+          </a:xfrm>
+          <a:prstGeom prst="rect">
+            <a:avLst/>
+          </a:prstGeom>
+          <a:solidFill>
+            <a:srgbClr val="E4F6F1"/>
+          </a:solidFill>
+          <a:ln w="15240">
+            <a:solidFill>
+              <a:srgbClr val="0B8A6A"/>
+            </a:solidFill>
+          </a:ln>
+        </p:spPr>
+        <p:style>
+          <a:lnRef idx="1">
+            <a:schemeClr val="accent1"/>
+          </a:lnRef>
+          <a:fillRef idx="3">
+            <a:schemeClr val="accent1"/>
+          </a:fillRef>
+          <a:effectRef idx="2">
+            <a:schemeClr val="accent1"/>
+          </a:effectRef>
+          <a:fontRef idx="minor">
+            <a:schemeClr val="lt1"/>
+          </a:fontRef>
+        </p:style>
+        <p:txBody>
+          <a:bodyPr rtlCol="0" anchor="ctr" wrap="square" tIns="502920"/>
+          <a:lstStyle/>
+          <a:p>
+            <a:pPr algn="ctr"/>
+            <a:r>
+              <a:rPr sz="1200" b="0">
+                <a:solidFill>
+                  <a:srgbClr val="0B8A6A"/>
+                </a:solidFill>
+              </a:rPr>
+              <a:t>LLM Generates
+Claude / Azure OpenAI
+returns candidate rules
+in structured JSON</a:t>
+            </a:r>
+          </a:p>
+        </p:txBody>
+      </p:sp>
+      <p:sp>
+        <p:nvSpPr>
+          <p:cNvPr id="12" name="TextBox 11"/>
+          <p:cNvSpPr txBox="1"/>
+          <p:nvPr/>
+        </p:nvSpPr>
+        <p:spPr>
+          <a:xfrm>
+            <a:off x="7973568" y="1984248"/>
+            <a:ext cx="365760" cy="347472"/>
+          </a:xfrm>
+          <a:prstGeom prst="rect">
+            <a:avLst/>
+          </a:prstGeom>
+          <a:noFill/>
+        </p:spPr>
+        <p:txBody>
+          <a:bodyPr wrap="square">
+            <a:spAutoFit/>
+          </a:bodyPr>
+          <a:lstStyle/>
+          <a:p>
+            <a:pPr algn="l"/>
+            <a:r>
+              <a:rPr sz="1400" b="1" i="0">
+                <a:solidFill>
+                  <a:srgbClr val="0B8A6A"/>
+                </a:solidFill>
+              </a:rPr>
+              <a:t>③</a:t>
+            </a:r>
+          </a:p>
+        </p:txBody>
+      </p:sp>
+      <p:sp>
+        <p:nvSpPr>
+          <p:cNvPr id="13" name="TextBox 12"/>
+          <p:cNvSpPr txBox="1"/>
+          <p:nvPr/>
+        </p:nvSpPr>
+        <p:spPr>
+          <a:xfrm>
+            <a:off x="9262872" y="3218688"/>
+            <a:ext cx="320040" cy="384048"/>
+          </a:xfrm>
+          <a:prstGeom prst="rect">
+            <a:avLst/>
+          </a:prstGeom>
+          <a:noFill/>
+        </p:spPr>
+        <p:txBody>
+          <a:bodyPr wrap="square">
+            <a:spAutoFit/>
+          </a:bodyPr>
+          <a:lstStyle/>
+          <a:p>
+            <a:pPr algn="ctr"/>
+            <a:r>
+              <a:rPr sz="1800" b="1" i="0">
+                <a:solidFill>
+                  <a:srgbClr val="CCCCCC"/>
+                </a:solidFill>
+              </a:rPr>
+              <a:t>↓</a:t>
+            </a:r>
+          </a:p>
+        </p:txBody>
+      </p:sp>
+      <p:sp>
+        <p:nvSpPr>
+          <p:cNvPr id="14" name="Rectangle 13"/>
+          <p:cNvSpPr/>
+          <p:nvPr/>
+        </p:nvSpPr>
+        <p:spPr>
+          <a:xfrm>
+            <a:off x="7863840" y="3657600"/>
+            <a:ext cx="3108960" cy="1234440"/>
+          </a:xfrm>
+          <a:prstGeom prst="rect">
+            <a:avLst/>
+          </a:prstGeom>
+          <a:solidFill>
+            <a:srgbClr val="E8F0FE"/>
+          </a:solidFill>
+          <a:ln w="15240">
+            <a:solidFill>
+              <a:srgbClr val="0F3460"/>
+            </a:solidFill>
+          </a:ln>
+        </p:spPr>
+        <p:style>
+          <a:lnRef idx="1">
+            <a:schemeClr val="accent1"/>
+          </a:lnRef>
+          <a:fillRef idx="3">
+            <a:schemeClr val="accent1"/>
+          </a:fillRef>
+          <a:effectRef idx="2">
+            <a:schemeClr val="accent1"/>
+          </a:effectRef>
+          <a:fontRef idx="minor">
+            <a:schemeClr val="lt1"/>
+          </a:fontRef>
+        </p:style>
+        <p:txBody>
+          <a:bodyPr rtlCol="0" anchor="ctr" wrap="square" tIns="502920"/>
+          <a:lstStyle/>
+          <a:p>
+            <a:pPr algn="ctr"/>
+            <a:r>
+              <a:rPr sz="1200" b="0">
+                <a:solidFill>
+                  <a:srgbClr val="0F3460"/>
+                </a:solidFill>
+              </a:rPr>
+              <a:t>Validate &amp; Stage
+Parse JSON, validate
+structure, write to
+dq_rules_staging</a:t>
+            </a:r>
+          </a:p>
+        </p:txBody>
+      </p:sp>
+      <p:sp>
+        <p:nvSpPr>
+          <p:cNvPr id="15" name="TextBox 14"/>
+          <p:cNvSpPr txBox="1"/>
+          <p:nvPr/>
+        </p:nvSpPr>
+        <p:spPr>
+          <a:xfrm>
+            <a:off x="7973568" y="3721608"/>
+            <a:ext cx="365760" cy="347472"/>
+          </a:xfrm>
+          <a:prstGeom prst="rect">
+            <a:avLst/>
+          </a:prstGeom>
+          <a:noFill/>
+        </p:spPr>
+        <p:txBody>
+          <a:bodyPr wrap="square">
+            <a:spAutoFit/>
+          </a:bodyPr>
+          <a:lstStyle/>
+          <a:p>
+            <a:pPr algn="l"/>
+            <a:r>
+              <a:rPr sz="1400" b="1" i="0">
+                <a:solidFill>
+                  <a:srgbClr val="0F3460"/>
+                </a:solidFill>
+              </a:rPr>
+              <a:t>④</a:t>
+            </a:r>
+          </a:p>
+        </p:txBody>
+      </p:sp>
+      <p:sp>
+        <p:nvSpPr>
+          <p:cNvPr id="16" name="TextBox 15"/>
+          <p:cNvSpPr txBox="1"/>
+          <p:nvPr/>
+        </p:nvSpPr>
+        <p:spPr>
+          <a:xfrm>
+            <a:off x="7333488" y="3986784"/>
+            <a:ext cx="411480" cy="457200"/>
+          </a:xfrm>
+          <a:prstGeom prst="rect">
+            <a:avLst/>
+          </a:prstGeom>
+          <a:noFill/>
+        </p:spPr>
+        <p:txBody>
+          <a:bodyPr wrap="square">
+            <a:spAutoFit/>
+          </a:bodyPr>
+          <a:lstStyle/>
+          <a:p>
+            <a:pPr algn="ctr"/>
+            <a:r>
+              <a:rPr sz="1800" b="1" i="0">
+                <a:solidFill>
+                  <a:srgbClr val="CCCCCC"/>
+                </a:solidFill>
+              </a:rPr>
+              <a:t>←</a:t>
+            </a:r>
+          </a:p>
+        </p:txBody>
+      </p:sp>
+      <p:sp>
+        <p:nvSpPr>
+          <p:cNvPr id="17" name="Rectangle 16"/>
+          <p:cNvSpPr/>
+          <p:nvPr/>
+        </p:nvSpPr>
+        <p:spPr>
+          <a:xfrm>
+            <a:off x="4114800" y="3657600"/>
+            <a:ext cx="3108960" cy="1234440"/>
+          </a:xfrm>
+          <a:prstGeom prst="rect">
+            <a:avLst/>
+          </a:prstGeom>
+          <a:solidFill>
+            <a:srgbClr val="FFF3E0"/>
+          </a:solidFill>
+          <a:ln w="15240">
+            <a:solidFill>
+              <a:srgbClr val="E65C00"/>
+            </a:solidFill>
+          </a:ln>
+        </p:spPr>
+        <p:style>
+          <a:lnRef idx="1">
+            <a:schemeClr val="accent1"/>
+          </a:lnRef>
+          <a:fillRef idx="3">
+            <a:schemeClr val="accent1"/>
+          </a:fillRef>
+          <a:effectRef idx="2">
+            <a:schemeClr val="accent1"/>
+          </a:effectRef>
+          <a:fontRef idx="minor">
+            <a:schemeClr val="lt1"/>
+          </a:fontRef>
+        </p:style>
+        <p:txBody>
+          <a:bodyPr rtlCol="0" anchor="ctr" wrap="square" tIns="502920"/>
+          <a:lstStyle/>
+          <a:p>
+            <a:pPr algn="ctr"/>
+            <a:r>
+              <a:rPr sz="1200" b="0">
+                <a:solidFill>
+                  <a:srgbClr val="E65C00"/>
+                </a:solidFill>
+              </a:rPr>
+              <a:t>Human Review
+Engineer approves
+or rejects each rule</a:t>
+            </a:r>
+          </a:p>
+        </p:txBody>
+      </p:sp>
+      <p:sp>
+        <p:nvSpPr>
+          <p:cNvPr id="18" name="TextBox 17"/>
+          <p:cNvSpPr txBox="1"/>
+          <p:nvPr/>
+        </p:nvSpPr>
+        <p:spPr>
+          <a:xfrm>
+            <a:off x="4224528" y="3721608"/>
+            <a:ext cx="365760" cy="347472"/>
+          </a:xfrm>
+          <a:prstGeom prst="rect">
+            <a:avLst/>
+          </a:prstGeom>
+          <a:noFill/>
+        </p:spPr>
+        <p:txBody>
+          <a:bodyPr wrap="square">
+            <a:spAutoFit/>
+          </a:bodyPr>
+          <a:lstStyle/>
+          <a:p>
+            <a:pPr algn="l"/>
+            <a:r>
+              <a:rPr sz="1400" b="1" i="0">
+                <a:solidFill>
+                  <a:srgbClr val="E65C00"/>
+                </a:solidFill>
+              </a:rPr>
+              <a:t>⑤</a:t>
+            </a:r>
+          </a:p>
+        </p:txBody>
+      </p:sp>
+      <p:sp>
+        <p:nvSpPr>
+          <p:cNvPr id="19" name="TextBox 18"/>
+          <p:cNvSpPr txBox="1"/>
+          <p:nvPr/>
+        </p:nvSpPr>
+        <p:spPr>
+          <a:xfrm>
+            <a:off x="3584448" y="3986784"/>
+            <a:ext cx="411480" cy="457200"/>
+          </a:xfrm>
+          <a:prstGeom prst="rect">
+            <a:avLst/>
+          </a:prstGeom>
+          <a:noFill/>
+        </p:spPr>
+        <p:txBody>
+          <a:bodyPr wrap="square">
+            <a:spAutoFit/>
+          </a:bodyPr>
+          <a:lstStyle/>
+          <a:p>
+            <a:pPr algn="ctr"/>
+            <a:r>
+              <a:rPr sz="1800" b="1" i="0">
+                <a:solidFill>
+                  <a:srgbClr val="CCCCCC"/>
+                </a:solidFill>
+              </a:rPr>
+              <a:t>←</a:t>
+            </a:r>
+          </a:p>
+        </p:txBody>
+      </p:sp>
+      <p:sp>
+        <p:nvSpPr>
+          <p:cNvPr id="20" name="Rectangle 19"/>
+          <p:cNvSpPr/>
+          <p:nvPr/>
+        </p:nvSpPr>
+        <p:spPr>
+          <a:xfrm>
+            <a:off x="365760" y="3657600"/>
+            <a:ext cx="3108960" cy="1234440"/>
+          </a:xfrm>
+          <a:prstGeom prst="rect">
+            <a:avLst/>
+          </a:prstGeom>
+          <a:solidFill>
+            <a:srgbClr val="E6F4EA"/>
+          </a:solidFill>
+          <a:ln w="15240">
+            <a:solidFill>
+              <a:srgbClr val="1E7E34"/>
+            </a:solidFill>
+          </a:ln>
+        </p:spPr>
+        <p:style>
+          <a:lnRef idx="1">
+            <a:schemeClr val="accent1"/>
+          </a:lnRef>
+          <a:fillRef idx="3">
+            <a:schemeClr val="accent1"/>
+          </a:fillRef>
+          <a:effectRef idx="2">
+            <a:schemeClr val="accent1"/>
+          </a:effectRef>
+          <a:fontRef idx="minor">
+            <a:schemeClr val="lt1"/>
+          </a:fontRef>
+        </p:style>
+        <p:txBody>
+          <a:bodyPr rtlCol="0" anchor="ctr" wrap="square" tIns="502920"/>
+          <a:lstStyle/>
+          <a:p>
+            <a:pPr algn="ctr"/>
+            <a:r>
+              <a:rPr sz="1200" b="0">
+                <a:solidFill>
+                  <a:srgbClr val="1E7E34"/>
+                </a:solidFill>
+              </a:rPr>
+              <a:t>dq_rules_registry
+Promoted &amp; active
+in all future batch
++ streaming runs</a:t>
+            </a:r>
+          </a:p>
+        </p:txBody>
+      </p:sp>
+      <p:sp>
+        <p:nvSpPr>
+          <p:cNvPr id="21" name="Rectangle 20"/>
+          <p:cNvSpPr/>
+          <p:nvPr/>
+        </p:nvSpPr>
+        <p:spPr>
+          <a:xfrm>
+            <a:off x="365760" y="5074920"/>
+            <a:ext cx="11430000" cy="420624"/>
+          </a:xfrm>
+          <a:prstGeom prst="rect">
+            <a:avLst/>
+          </a:prstGeom>
+          <a:solidFill>
+            <a:srgbClr val="F7F9FC"/>
+          </a:solidFill>
+          <a:ln>
+            <a:noFill/>
+          </a:ln>
+        </p:spPr>
+        <p:style>
+          <a:lnRef idx="1">
+            <a:schemeClr val="accent1"/>
+          </a:lnRef>
+          <a:fillRef idx="3">
+            <a:schemeClr val="accent1"/>
+          </a:fillRef>
+          <a:effectRef idx="2">
+            <a:schemeClr val="accent1"/>
+          </a:effectRef>
+          <a:fontRef idx="minor">
+            <a:schemeClr val="lt1"/>
+          </a:fontRef>
+        </p:style>
+        <p:txBody>
           <a:bodyPr rtlCol="0" anchor="ctr"/>
           <a:lstStyle/>
           <a:p>
@@ -7689,225 +8321,34 @@
       </p:sp>
       <p:sp>
         <p:nvSpPr>
-          <p:cNvPr id="7" name="TextBox 6"/>
-          <p:cNvSpPr txBox="1"/>
-          <p:nvPr/>
-        </p:nvSpPr>
-        <p:spPr>
-          <a:xfrm>
-            <a:off x="566928" y="2011680"/>
-            <a:ext cx="11082528" cy="3794759"/>
-          </a:xfrm>
-          <a:prstGeom prst="rect">
-            <a:avLst/>
-          </a:prstGeom>
-          <a:noFill/>
-        </p:spPr>
-        <p:txBody>
-          <a:bodyPr wrap="none">
-            <a:spAutoFit/>
-          </a:bodyPr>
-          <a:lstStyle/>
-          <a:p>
-            <a:pPr algn="l"/>
-            <a:r>
-              <a:rPr sz="1100">
-                <a:solidFill>
-                  <a:srgbClr val="CDD6F4"/>
-                </a:solidFill>
-                <a:latin typeface="Courier New"/>
-              </a:rPr>
-              <a:t>Step 1: Profile      Step 2: Prompt           Step 3: Generate</a:t>
-            </a:r>
-          </a:p>
-          <a:p>
-            <a:pPr algn="l"/>
-            <a:r>
-              <a:rPr sz="1100">
-                <a:solidFill>
-                  <a:srgbClr val="CDD6F4"/>
-                </a:solidFill>
-                <a:latin typeface="Courier New"/>
-              </a:rPr>
-              <a:t>────────────         ──────────────           ────────────────</a:t>
-            </a:r>
-          </a:p>
-          <a:p>
-            <a:pPr algn="l"/>
-            <a:r>
-              <a:rPr sz="1100">
-                <a:solidFill>
-                  <a:srgbClr val="CDD6F4"/>
-                </a:solidFill>
-                <a:latin typeface="Courier New"/>
-              </a:rPr>
-              <a:t>Analyse column  ──►  Build structured    ──►  LLM returns</a:t>
-            </a:r>
-          </a:p>
-          <a:p>
-            <a:pPr algn="l"/>
-            <a:r>
-              <a:rPr sz="1100">
-                <a:solidFill>
-                  <a:srgbClr val="CDD6F4"/>
-                </a:solidFill>
-                <a:latin typeface="Courier New"/>
-              </a:rPr>
-              <a:t>stats: min, max,     prompt with profile      candidate rules</a:t>
-            </a:r>
-          </a:p>
-          <a:p>
-            <a:pPr algn="l"/>
-            <a:r>
-              <a:rPr sz="1100">
-                <a:solidFill>
-                  <a:srgbClr val="CDD6F4"/>
-                </a:solidFill>
-                <a:latin typeface="Courier New"/>
-              </a:rPr>
-              <a:t>nulls, cardinality,  + domain context         in JSON format</a:t>
-            </a:r>
-          </a:p>
-          <a:p>
-            <a:pPr algn="l"/>
-            <a:r>
-              <a:rPr sz="1100">
-                <a:solidFill>
-                  <a:srgbClr val="CDD6F4"/>
-                </a:solidFill>
-                <a:latin typeface="Courier New"/>
-              </a:rPr>
-              <a:t>distributions</a:t>
-            </a:r>
-          </a:p>
-          <a:p>
-            <a:pPr algn="l"/>
-            <a:r>
-              <a:rPr sz="1100">
-                <a:solidFill>
-                  <a:srgbClr val="CDD6F4"/>
-                </a:solidFill>
-                <a:latin typeface="Courier New"/>
-              </a:rPr>
-              <a:t>                                                     │</a:t>
-            </a:r>
-          </a:p>
-          <a:p>
-            <a:pPr algn="l"/>
-            <a:r>
-              <a:rPr sz="1100">
-                <a:solidFill>
-                  <a:srgbClr val="CDD6F4"/>
-                </a:solidFill>
-                <a:latin typeface="Courier New"/>
-              </a:rPr>
-              <a:t>Step 4: Validate     Step 5: Human Review            ▼</a:t>
-            </a:r>
-          </a:p>
-          <a:p>
-            <a:pPr algn="l"/>
-            <a:r>
-              <a:rPr sz="1100">
-                <a:solidFill>
-                  <a:srgbClr val="CDD6F4"/>
-                </a:solidFill>
-                <a:latin typeface="Courier New"/>
-              </a:rPr>
-              <a:t>────────────────     ─────────────────        dq_rules_staging</a:t>
-            </a:r>
-          </a:p>
-          <a:p>
-            <a:pPr algn="l"/>
-            <a:r>
-              <a:rPr sz="1100">
-                <a:solidFill>
-                  <a:srgbClr val="CDD6F4"/>
-                </a:solidFill>
-                <a:latin typeface="Courier New"/>
-              </a:rPr>
-              <a:t>Parse + validate ◄── Engineer: approve ◄───── (status=pending)</a:t>
-            </a:r>
-          </a:p>
-          <a:p>
-            <a:pPr algn="l"/>
-            <a:r>
-              <a:rPr sz="1100">
-                <a:solidFill>
-                  <a:srgbClr val="CDD6F4"/>
-                </a:solidFill>
-                <a:latin typeface="Courier New"/>
-              </a:rPr>
-              <a:t>rule structure       or reject</a:t>
-            </a:r>
-          </a:p>
-          <a:p>
-            <a:pPr algn="l"/>
-            <a:r>
-              <a:rPr sz="1100">
-                <a:solidFill>
-                  <a:srgbClr val="CDD6F4"/>
-                </a:solidFill>
-                <a:latin typeface="Courier New"/>
-              </a:rPr>
-              <a:t>     │</a:t>
-            </a:r>
-          </a:p>
-          <a:p>
-            <a:pPr algn="l"/>
-            <a:r>
-              <a:rPr sz="1100">
-                <a:solidFill>
-                  <a:srgbClr val="CDD6F4"/>
-                </a:solidFill>
-                <a:latin typeface="Courier New"/>
-              </a:rPr>
-              <a:t>     ▼</a:t>
-            </a:r>
-          </a:p>
-          <a:p>
-            <a:pPr algn="l"/>
-            <a:r>
-              <a:rPr sz="1100">
-                <a:solidFill>
-                  <a:srgbClr val="CDD6F4"/>
-                </a:solidFill>
-                <a:latin typeface="Courier New"/>
-              </a:rPr>
-              <a:t>dq_rules_registry  ← promoted and active in all future runs</a:t>
-            </a:r>
-          </a:p>
-        </p:txBody>
-      </p:sp>
-      <p:sp>
-        <p:nvSpPr>
-          <p:cNvPr id="8" name="TextBox 7"/>
-          <p:cNvSpPr txBox="1"/>
-          <p:nvPr/>
-        </p:nvSpPr>
-        <p:spPr>
-          <a:xfrm>
-            <a:off x="457200" y="6035040"/>
-            <a:ext cx="11247120" cy="548640"/>
-          </a:xfrm>
-          <a:prstGeom prst="rect">
-            <a:avLst/>
-          </a:prstGeom>
-          <a:noFill/>
-        </p:spPr>
-        <p:txBody>
-          <a:bodyPr wrap="square">
-            <a:spAutoFit/>
-          </a:bodyPr>
-          <a:lstStyle/>
-          <a:p>
-            <a:pPr algn="l"/>
-            <a:r>
-              <a:rPr sz="1500" b="1" i="0">
+          <p:cNvPr id="22" name="TextBox 21"/>
+          <p:cNvSpPr txBox="1"/>
+          <p:nvPr/>
+        </p:nvSpPr>
+        <p:spPr>
+          <a:xfrm>
+            <a:off x="365760" y="5102352"/>
+            <a:ext cx="11430000" cy="365760"/>
+          </a:xfrm>
+          <a:prstGeom prst="rect">
+            <a:avLst/>
+          </a:prstGeom>
+          <a:noFill/>
+        </p:spPr>
+        <p:txBody>
+          <a:bodyPr wrap="square">
+            <a:spAutoFit/>
+          </a:bodyPr>
+          <a:lstStyle/>
+          <a:p>
+            <a:pPr algn="ctr"/>
+            <a:r>
+              <a:rPr sz="1300" b="0" i="0">
                 <a:solidFill>
                   <a:srgbClr val="0F3460"/>
                 </a:solidFill>
               </a:rPr>
-              <a:t>Two complementary rule sources:  Statistical rules (pure maths, no LLM) +  LLM rules (domain reasoning on top)</a:t>
+              <a:t>Two complementary sources:   Statistical rules (no LLM, pure maths)   +   LLM rules (domain reasoning)</a:t>
             </a:r>
           </a:p>
         </p:txBody>
@@ -14345,17 +14786,19 @@
         </p:nvSpPr>
         <p:spPr>
           <a:xfrm>
-            <a:off x="457200" y="1920240"/>
-            <a:ext cx="11247120" cy="3017520"/>
-          </a:xfrm>
-          <a:prstGeom prst="rect">
-            <a:avLst/>
-          </a:prstGeom>
-          <a:solidFill>
-            <a:srgbClr val="1E1E2E"/>
-          </a:solidFill>
-          <a:ln>
-            <a:noFill/>
+            <a:off x="457200" y="1965960"/>
+            <a:ext cx="2560320" cy="658368"/>
+          </a:xfrm>
+          <a:prstGeom prst="rect">
+            <a:avLst/>
+          </a:prstGeom>
+          <a:solidFill>
+            <a:srgbClr val="E4F6F1"/>
+          </a:solidFill>
+          <a:ln w="15240">
+            <a:solidFill>
+              <a:srgbClr val="0B8A6A"/>
+            </a:solidFill>
           </a:ln>
         </p:spPr>
         <p:style>
@@ -14373,32 +14816,77 @@
           </a:fontRef>
         </p:style>
         <p:txBody>
-          <a:bodyPr rtlCol="0" anchor="ctr"/>
-          <a:lstStyle/>
-          <a:p>
-            <a:pPr algn="ctr"/>
-          </a:p>
-        </p:txBody>
-      </p:sp>
-      <p:sp>
-        <p:nvSpPr>
-          <p:cNvPr id="6" name="Rectangle 5"/>
+          <a:bodyPr rtlCol="0" anchor="ctr" wrap="square" tIns="210121"/>
+          <a:lstStyle/>
+          <a:p>
+            <a:pPr algn="ctr"/>
+            <a:r>
+              <a:rPr sz="1250" b="0">
+                <a:solidFill>
+                  <a:srgbClr val="0B8A6A"/>
+                </a:solidFill>
+              </a:rPr>
+              <a:t>AI Suggests
+(statistical + LLM rules)</a:t>
+            </a:r>
+          </a:p>
+        </p:txBody>
+      </p:sp>
+      <p:sp>
+        <p:nvSpPr>
+          <p:cNvPr id="6" name="TextBox 5"/>
+          <p:cNvSpPr txBox="1"/>
+          <p:nvPr/>
+        </p:nvSpPr>
+        <p:spPr>
+          <a:xfrm>
+            <a:off x="3127248" y="2103120"/>
+            <a:ext cx="411480" cy="457200"/>
+          </a:xfrm>
+          <a:prstGeom prst="rect">
+            <a:avLst/>
+          </a:prstGeom>
+          <a:noFill/>
+        </p:spPr>
+        <p:txBody>
+          <a:bodyPr wrap="square">
+            <a:spAutoFit/>
+          </a:bodyPr>
+          <a:lstStyle/>
+          <a:p>
+            <a:pPr algn="ctr"/>
+            <a:r>
+              <a:rPr sz="1800" b="1" i="0">
+                <a:solidFill>
+                  <a:srgbClr val="CCCCCC"/>
+                </a:solidFill>
+              </a:rPr>
+              <a:t>→</a:t>
+            </a:r>
+          </a:p>
+        </p:txBody>
+      </p:sp>
+      <p:sp>
+        <p:nvSpPr>
+          <p:cNvPr id="7" name="Rectangle 6"/>
           <p:cNvSpPr/>
           <p:nvPr/>
         </p:nvSpPr>
         <p:spPr>
           <a:xfrm>
-            <a:off x="457200" y="1920240"/>
-            <a:ext cx="50800" cy="3017520"/>
-          </a:xfrm>
-          <a:prstGeom prst="rect">
-            <a:avLst/>
-          </a:prstGeom>
-          <a:solidFill>
-            <a:srgbClr val="E94560"/>
-          </a:solidFill>
-          <a:ln>
-            <a:noFill/>
+            <a:off x="3657600" y="1965960"/>
+            <a:ext cx="2560320" cy="658368"/>
+          </a:xfrm>
+          <a:prstGeom prst="rect">
+            <a:avLst/>
+          </a:prstGeom>
+          <a:solidFill>
+            <a:srgbClr val="FFF3E0"/>
+          </a:solidFill>
+          <a:ln w="15240">
+            <a:solidFill>
+              <a:srgbClr val="E65C00"/>
+            </a:solidFill>
           </a:ln>
         </p:spPr>
         <p:style>
@@ -14416,164 +14904,18 @@
           </a:fontRef>
         </p:style>
         <p:txBody>
-          <a:bodyPr rtlCol="0" anchor="ctr"/>
-          <a:lstStyle/>
-          <a:p>
-            <a:pPr algn="ctr"/>
-          </a:p>
-        </p:txBody>
-      </p:sp>
-      <p:sp>
-        <p:nvSpPr>
-          <p:cNvPr id="7" name="TextBox 6"/>
-          <p:cNvSpPr txBox="1"/>
-          <p:nvPr/>
-        </p:nvSpPr>
-        <p:spPr>
-          <a:xfrm>
-            <a:off x="566928" y="2011680"/>
-            <a:ext cx="11082528" cy="2834640"/>
-          </a:xfrm>
-          <a:prstGeom prst="rect">
-            <a:avLst/>
-          </a:prstGeom>
-          <a:noFill/>
-        </p:spPr>
-        <p:txBody>
-          <a:bodyPr wrap="none">
-            <a:spAutoFit/>
-          </a:bodyPr>
-          <a:lstStyle/>
-          <a:p>
-            <a:pPr algn="l"/>
-            <a:r>
-              <a:rPr sz="1150">
-                <a:solidFill>
-                  <a:srgbClr val="CDD6F4"/>
-                </a:solidFill>
-                <a:latin typeface="Courier New"/>
-              </a:rPr>
-              <a:t>                  ┌──────────────────┐</a:t>
-            </a:r>
-          </a:p>
-          <a:p>
-            <a:pPr algn="l"/>
-            <a:r>
-              <a:rPr sz="1150">
-                <a:solidFill>
-                  <a:srgbClr val="CDD6F4"/>
-                </a:solidFill>
-                <a:latin typeface="Courier New"/>
-              </a:rPr>
-              <a:t>  AI Suggests ──► │  dq_rules_       │ ──► Engineer reviews</a:t>
-            </a:r>
-          </a:p>
-          <a:p>
-            <a:pPr algn="l"/>
-            <a:r>
-              <a:rPr sz="1150">
-                <a:solidFill>
-                  <a:srgbClr val="CDD6F4"/>
-                </a:solidFill>
-                <a:latin typeface="Courier New"/>
-              </a:rPr>
-              <a:t>  (statistical    │  staging         │     approve / reject</a:t>
-            </a:r>
-          </a:p>
-          <a:p>
-            <a:pPr algn="l"/>
-            <a:r>
-              <a:rPr sz="1150">
-                <a:solidFill>
-                  <a:srgbClr val="CDD6F4"/>
-                </a:solidFill>
-                <a:latin typeface="Courier New"/>
-              </a:rPr>
-              <a:t>   + LLM rules)   │  status=pending  │          │</a:t>
-            </a:r>
-          </a:p>
-          <a:p>
-            <a:pPr algn="l"/>
-            <a:r>
-              <a:rPr sz="1150">
-                <a:solidFill>
-                  <a:srgbClr val="CDD6F4"/>
-                </a:solidFill>
-                <a:latin typeface="Courier New"/>
-              </a:rPr>
-              <a:t>                  └──────────────────┘          │</a:t>
-            </a:r>
-          </a:p>
-          <a:p>
-            <a:pPr algn="l"/>
-            <a:r>
-              <a:rPr sz="1150">
-                <a:solidFill>
-                  <a:srgbClr val="CDD6F4"/>
-                </a:solidFill>
-                <a:latin typeface="Courier New"/>
-              </a:rPr>
-              <a:t>                                                ▼</a:t>
-            </a:r>
-          </a:p>
-          <a:p>
-            <a:pPr algn="l"/>
-            <a:r>
-              <a:rPr sz="1150">
-                <a:solidFill>
-                  <a:srgbClr val="CDD6F4"/>
-                </a:solidFill>
-                <a:latin typeface="Courier New"/>
-              </a:rPr>
-              <a:t>                                       ┌──────────────────┐</a:t>
-            </a:r>
-          </a:p>
-          <a:p>
-            <a:pPr algn="l"/>
-            <a:r>
-              <a:rPr sz="1150">
-                <a:solidFill>
-                  <a:srgbClr val="CDD6F4"/>
-                </a:solidFill>
-                <a:latin typeface="Courier New"/>
-              </a:rPr>
-              <a:t>                                       │  dq_rules_       │</a:t>
-            </a:r>
-          </a:p>
-          <a:p>
-            <a:pPr algn="l"/>
-            <a:r>
-              <a:rPr sz="1150">
-                <a:solidFill>
-                  <a:srgbClr val="CDD6F4"/>
-                </a:solidFill>
-                <a:latin typeface="Courier New"/>
-              </a:rPr>
-              <a:t>                                       │  registry        │  ← single source of truth</a:t>
-            </a:r>
-          </a:p>
-          <a:p>
-            <a:pPr algn="l"/>
-            <a:r>
-              <a:rPr sz="1150">
-                <a:solidFill>
-                  <a:srgbClr val="CDD6F4"/>
-                </a:solidFill>
-                <a:latin typeface="Courier New"/>
-              </a:rPr>
-              <a:t>                                       │  status=approved │    for batch + streaming</a:t>
-            </a:r>
-          </a:p>
-          <a:p>
-            <a:pPr algn="l"/>
-            <a:r>
-              <a:rPr sz="1150">
-                <a:solidFill>
-                  <a:srgbClr val="CDD6F4"/>
-                </a:solidFill>
-                <a:latin typeface="Courier New"/>
-              </a:rPr>
-              <a:t>                                       └──────────────────┘</a:t>
+          <a:bodyPr rtlCol="0" anchor="ctr" wrap="square" tIns="210121"/>
+          <a:lstStyle/>
+          <a:p>
+            <a:pPr algn="ctr"/>
+            <a:r>
+              <a:rPr sz="1250" b="0">
+                <a:solidFill>
+                  <a:srgbClr val="E65C00"/>
+                </a:solidFill>
+              </a:rPr>
+              <a:t>dq_rules_staging
+status = pending</a:t>
             </a:r>
           </a:p>
         </p:txBody>
@@ -14586,27 +14928,379 @@
         </p:nvSpPr>
         <p:spPr>
           <a:xfrm>
-            <a:off x="548640" y="5074920"/>
-            <a:ext cx="10972800" cy="347472"/>
-          </a:xfrm>
-          <a:prstGeom prst="rect">
-            <a:avLst/>
-          </a:prstGeom>
-          <a:noFill/>
-        </p:spPr>
-        <p:txBody>
-          <a:bodyPr wrap="square">
-            <a:spAutoFit/>
-          </a:bodyPr>
-          <a:lstStyle/>
-          <a:p>
-            <a:pPr algn="l"/>
-            <a:r>
-              <a:rPr sz="1500" b="1" i="0">
+            <a:off x="6327648" y="2103120"/>
+            <a:ext cx="411480" cy="457200"/>
+          </a:xfrm>
+          <a:prstGeom prst="rect">
+            <a:avLst/>
+          </a:prstGeom>
+          <a:noFill/>
+        </p:spPr>
+        <p:txBody>
+          <a:bodyPr wrap="square">
+            <a:spAutoFit/>
+          </a:bodyPr>
+          <a:lstStyle/>
+          <a:p>
+            <a:pPr algn="ctr"/>
+            <a:r>
+              <a:rPr sz="1800" b="1" i="0">
+                <a:solidFill>
+                  <a:srgbClr val="CCCCCC"/>
+                </a:solidFill>
+              </a:rPr>
+              <a:t>→</a:t>
+            </a:r>
+          </a:p>
+        </p:txBody>
+      </p:sp>
+      <p:sp>
+        <p:nvSpPr>
+          <p:cNvPr id="9" name="Rectangle 8"/>
+          <p:cNvSpPr/>
+          <p:nvPr/>
+        </p:nvSpPr>
+        <p:spPr>
+          <a:xfrm>
+            <a:off x="6858000" y="1965960"/>
+            <a:ext cx="2560320" cy="658368"/>
+          </a:xfrm>
+          <a:prstGeom prst="rect">
+            <a:avLst/>
+          </a:prstGeom>
+          <a:solidFill>
+            <a:srgbClr val="E8F0FE"/>
+          </a:solidFill>
+          <a:ln w="15240">
+            <a:solidFill>
+              <a:srgbClr val="0F3460"/>
+            </a:solidFill>
+          </a:ln>
+        </p:spPr>
+        <p:style>
+          <a:lnRef idx="1">
+            <a:schemeClr val="accent1"/>
+          </a:lnRef>
+          <a:fillRef idx="3">
+            <a:schemeClr val="accent1"/>
+          </a:fillRef>
+          <a:effectRef idx="2">
+            <a:schemeClr val="accent1"/>
+          </a:effectRef>
+          <a:fontRef idx="minor">
+            <a:schemeClr val="lt1"/>
+          </a:fontRef>
+        </p:style>
+        <p:txBody>
+          <a:bodyPr rtlCol="0" anchor="ctr" wrap="square" tIns="210121"/>
+          <a:lstStyle/>
+          <a:p>
+            <a:pPr algn="ctr"/>
+            <a:r>
+              <a:rPr sz="1250" b="1">
                 <a:solidFill>
                   <a:srgbClr val="0F3460"/>
                 </a:solidFill>
               </a:rPr>
+              <a:t>Engineer Reviews
+approve  /  reject</a:t>
+            </a:r>
+          </a:p>
+        </p:txBody>
+      </p:sp>
+      <p:sp>
+        <p:nvSpPr>
+          <p:cNvPr id="10" name="TextBox 9"/>
+          <p:cNvSpPr txBox="1"/>
+          <p:nvPr/>
+        </p:nvSpPr>
+        <p:spPr>
+          <a:xfrm>
+            <a:off x="7040880" y="2697480"/>
+            <a:ext cx="457200" cy="457200"/>
+          </a:xfrm>
+          <a:prstGeom prst="rect">
+            <a:avLst/>
+          </a:prstGeom>
+          <a:noFill/>
+        </p:spPr>
+        <p:txBody>
+          <a:bodyPr wrap="square">
+            <a:spAutoFit/>
+          </a:bodyPr>
+          <a:lstStyle/>
+          <a:p>
+            <a:pPr algn="ctr"/>
+            <a:r>
+              <a:rPr sz="2400" b="1" i="0">
+                <a:solidFill>
+                  <a:srgbClr val="1E7E34"/>
+                </a:solidFill>
+              </a:rPr>
+              <a:t>↙</a:t>
+            </a:r>
+          </a:p>
+        </p:txBody>
+      </p:sp>
+      <p:sp>
+        <p:nvSpPr>
+          <p:cNvPr id="11" name="TextBox 10"/>
+          <p:cNvSpPr txBox="1"/>
+          <p:nvPr/>
+        </p:nvSpPr>
+        <p:spPr>
+          <a:xfrm>
+            <a:off x="8961120" y="2697480"/>
+            <a:ext cx="457200" cy="457200"/>
+          </a:xfrm>
+          <a:prstGeom prst="rect">
+            <a:avLst/>
+          </a:prstGeom>
+          <a:noFill/>
+        </p:spPr>
+        <p:txBody>
+          <a:bodyPr wrap="square">
+            <a:spAutoFit/>
+          </a:bodyPr>
+          <a:lstStyle/>
+          <a:p>
+            <a:pPr algn="ctr"/>
+            <a:r>
+              <a:rPr sz="2400" b="1" i="0">
+                <a:solidFill>
+                  <a:srgbClr val="E94560"/>
+                </a:solidFill>
+              </a:rPr>
+              <a:t>↘</a:t>
+            </a:r>
+          </a:p>
+        </p:txBody>
+      </p:sp>
+      <p:sp>
+        <p:nvSpPr>
+          <p:cNvPr id="12" name="Rectangle 11"/>
+          <p:cNvSpPr/>
+          <p:nvPr/>
+        </p:nvSpPr>
+        <p:spPr>
+          <a:xfrm>
+            <a:off x="5943600" y="3218688"/>
+            <a:ext cx="2194560" cy="658368"/>
+          </a:xfrm>
+          <a:prstGeom prst="rect">
+            <a:avLst/>
+          </a:prstGeom>
+          <a:solidFill>
+            <a:srgbClr val="E6F4EA"/>
+          </a:solidFill>
+          <a:ln w="15240">
+            <a:solidFill>
+              <a:srgbClr val="1E7E34"/>
+            </a:solidFill>
+          </a:ln>
+        </p:spPr>
+        <p:style>
+          <a:lnRef idx="1">
+            <a:schemeClr val="accent1"/>
+          </a:lnRef>
+          <a:fillRef idx="3">
+            <a:schemeClr val="accent1"/>
+          </a:fillRef>
+          <a:effectRef idx="2">
+            <a:schemeClr val="accent1"/>
+          </a:effectRef>
+          <a:fontRef idx="minor">
+            <a:schemeClr val="lt1"/>
+          </a:fontRef>
+        </p:style>
+        <p:txBody>
+          <a:bodyPr rtlCol="0" anchor="ctr" wrap="square" tIns="210121"/>
+          <a:lstStyle/>
+          <a:p>
+            <a:pPr algn="ctr"/>
+            <a:r>
+              <a:rPr sz="1250" b="1">
+                <a:solidFill>
+                  <a:srgbClr val="1E7E34"/>
+                </a:solidFill>
+              </a:rPr>
+              <a:t>APPROVED
+dq_rules_registry</a:t>
+            </a:r>
+          </a:p>
+        </p:txBody>
+      </p:sp>
+      <p:sp>
+        <p:nvSpPr>
+          <p:cNvPr id="13" name="Rectangle 12"/>
+          <p:cNvSpPr/>
+          <p:nvPr/>
+        </p:nvSpPr>
+        <p:spPr>
+          <a:xfrm>
+            <a:off x="8686800" y="3218688"/>
+            <a:ext cx="2194560" cy="658368"/>
+          </a:xfrm>
+          <a:prstGeom prst="rect">
+            <a:avLst/>
+          </a:prstGeom>
+          <a:solidFill>
+            <a:srgbClr val="FFEDED"/>
+          </a:solidFill>
+          <a:ln w="15240">
+            <a:solidFill>
+              <a:srgbClr val="E94560"/>
+            </a:solidFill>
+          </a:ln>
+        </p:spPr>
+        <p:style>
+          <a:lnRef idx="1">
+            <a:schemeClr val="accent1"/>
+          </a:lnRef>
+          <a:fillRef idx="3">
+            <a:schemeClr val="accent1"/>
+          </a:fillRef>
+          <a:effectRef idx="2">
+            <a:schemeClr val="accent1"/>
+          </a:effectRef>
+          <a:fontRef idx="minor">
+            <a:schemeClr val="lt1"/>
+          </a:fontRef>
+        </p:style>
+        <p:txBody>
+          <a:bodyPr rtlCol="0" anchor="ctr" wrap="square" tIns="210121"/>
+          <a:lstStyle/>
+          <a:p>
+            <a:pPr algn="ctr"/>
+            <a:r>
+              <a:rPr sz="1250" b="0">
+                <a:solidFill>
+                  <a:srgbClr val="E94560"/>
+                </a:solidFill>
+              </a:rPr>
+              <a:t>REJECTED
+Preserved for
+fine-tuning</a:t>
+            </a:r>
+          </a:p>
+        </p:txBody>
+      </p:sp>
+      <p:sp>
+        <p:nvSpPr>
+          <p:cNvPr id="14" name="TextBox 13"/>
+          <p:cNvSpPr txBox="1"/>
+          <p:nvPr/>
+        </p:nvSpPr>
+        <p:spPr>
+          <a:xfrm>
+            <a:off x="6876288" y="3931920"/>
+            <a:ext cx="320040" cy="384048"/>
+          </a:xfrm>
+          <a:prstGeom prst="rect">
+            <a:avLst/>
+          </a:prstGeom>
+          <a:noFill/>
+        </p:spPr>
+        <p:txBody>
+          <a:bodyPr wrap="square">
+            <a:spAutoFit/>
+          </a:bodyPr>
+          <a:lstStyle/>
+          <a:p>
+            <a:pPr algn="ctr"/>
+            <a:r>
+              <a:rPr sz="1800" b="1" i="0">
+                <a:solidFill>
+                  <a:srgbClr val="CCCCCC"/>
+                </a:solidFill>
+              </a:rPr>
+              <a:t>↓</a:t>
+            </a:r>
+          </a:p>
+        </p:txBody>
+      </p:sp>
+      <p:sp>
+        <p:nvSpPr>
+          <p:cNvPr id="15" name="Rectangle 14"/>
+          <p:cNvSpPr/>
+          <p:nvPr/>
+        </p:nvSpPr>
+        <p:spPr>
+          <a:xfrm>
+            <a:off x="5212080" y="4407408"/>
+            <a:ext cx="4114800" cy="530352"/>
+          </a:xfrm>
+          <a:prstGeom prst="rect">
+            <a:avLst/>
+          </a:prstGeom>
+          <a:solidFill>
+            <a:srgbClr val="E8F0FE"/>
+          </a:solidFill>
+          <a:ln w="15240">
+            <a:solidFill>
+              <a:srgbClr val="0F3460"/>
+            </a:solidFill>
+          </a:ln>
+        </p:spPr>
+        <p:style>
+          <a:lnRef idx="1">
+            <a:schemeClr val="accent1"/>
+          </a:lnRef>
+          <a:fillRef idx="3">
+            <a:schemeClr val="accent1"/>
+          </a:fillRef>
+          <a:effectRef idx="2">
+            <a:schemeClr val="accent1"/>
+          </a:effectRef>
+          <a:fontRef idx="minor">
+            <a:schemeClr val="lt1"/>
+          </a:fontRef>
+        </p:style>
+        <p:txBody>
+          <a:bodyPr rtlCol="0" anchor="ctr" wrap="square" tIns="146113"/>
+          <a:lstStyle/>
+          <a:p>
+            <a:pPr algn="ctr"/>
+            <a:r>
+              <a:rPr sz="1250" b="1">
+                <a:solidFill>
+                  <a:srgbClr val="0F3460"/>
+                </a:solidFill>
+              </a:rPr>
+              <a:t>Active in all future batch + streaming runs</a:t>
+            </a:r>
+          </a:p>
+        </p:txBody>
+      </p:sp>
+      <p:sp>
+        <p:nvSpPr>
+          <p:cNvPr id="16" name="TextBox 15"/>
+          <p:cNvSpPr txBox="1"/>
+          <p:nvPr/>
+        </p:nvSpPr>
+        <p:spPr>
+          <a:xfrm>
+            <a:off x="457200" y="2651760"/>
+            <a:ext cx="4389120" cy="347472"/>
+          </a:xfrm>
+          <a:prstGeom prst="rect">
+            <a:avLst/>
+          </a:prstGeom>
+          <a:noFill/>
+        </p:spPr>
+        <p:txBody>
+          <a:bodyPr wrap="square">
+            <a:spAutoFit/>
+          </a:bodyPr>
+          <a:lstStyle/>
+          <a:p>
+            <a:pPr algn="l"/>
+            <a:r>
+              <a:rPr sz="1400" b="1" i="0">
+                <a:solidFill>
+                  <a:srgbClr val="0F3460"/>
+                </a:solidFill>
+              </a:rPr>
               <a:t>Why this matters architecturally:</a:t>
             </a:r>
           </a:p>
@@ -14614,14 +15308,14 @@
       </p:sp>
       <p:sp>
         <p:nvSpPr>
-          <p:cNvPr id="9" name="TextBox 8"/>
-          <p:cNvSpPr txBox="1"/>
-          <p:nvPr/>
-        </p:nvSpPr>
-        <p:spPr>
-          <a:xfrm>
-            <a:off x="640080" y="5440680"/>
-            <a:ext cx="10972800" cy="1234440"/>
+          <p:cNvPr id="17" name="TextBox 16"/>
+          <p:cNvSpPr txBox="1"/>
+          <p:nvPr/>
+        </p:nvSpPr>
+        <p:spPr>
+          <a:xfrm>
+            <a:off x="457200" y="3063240"/>
+            <a:ext cx="4389120" cy="1828800"/>
           </a:xfrm>
           <a:prstGeom prst="rect">
             <a:avLst/>
@@ -14636,61 +15330,61 @@
           <a:p>
             <a:pPr>
               <a:spcBef>
-                <a:spcPts val="600"/>
+                <a:spcPts val="1000"/>
               </a:spcBef>
             </a:pPr>
             <a:r>
-              <a:rPr sz="1500">
+              <a:rPr sz="1350">
                 <a:solidFill>
                   <a:srgbClr val="333333"/>
                 </a:solidFill>
               </a:rPr>
-              <a:t>•  Full audit trail: rule_id · suggested_at · reviewed_at · reviewed_by · llm_backend</a:t>
+              <a:t>•  Full audit trail: rule_id · suggested_at · reviewed_by · llm_backend</a:t>
             </a:r>
           </a:p>
           <a:p>
             <a:pPr>
               <a:spcBef>
-                <a:spcPts val="600"/>
+                <a:spcPts val="1000"/>
               </a:spcBef>
             </a:pPr>
             <a:r>
-              <a:rPr sz="1500">
+              <a:rPr sz="1350">
                 <a:solidFill>
                   <a:srgbClr val="333333"/>
                 </a:solidFill>
               </a:rPr>
-              <a:t>•  Rejected rules preserved with reason — future fine-tuning data</a:t>
+              <a:t>•  Rejected rules preserved — future fine-tuning data</a:t>
             </a:r>
           </a:p>
           <a:p>
             <a:pPr>
               <a:spcBef>
-                <a:spcPts val="600"/>
+                <a:spcPts val="1000"/>
               </a:spcBef>
             </a:pPr>
             <a:r>
-              <a:rPr sz="1500">
+              <a:rPr sz="1350">
                 <a:solidFill>
                   <a:srgbClr val="333333"/>
                 </a:solidFill>
               </a:rPr>
-              <a:t>•  Promotion pattern is identical to a feature-flag promotion workflow</a:t>
+              <a:t>•  Identical pattern to feature-flag promotion workflow</a:t>
             </a:r>
           </a:p>
           <a:p>
             <a:pPr>
               <a:spcBef>
-                <a:spcPts val="600"/>
+                <a:spcPts val="1000"/>
               </a:spcBef>
             </a:pPr>
             <a:r>
-              <a:rPr sz="1500">
+              <a:rPr sz="1350">
                 <a:solidFill>
                   <a:srgbClr val="333333"/>
                 </a:solidFill>
               </a:rPr>
-              <a:t>•  Zero risk of a hallucinated rule silently entering production</a:t>
+              <a:t>•  Zero risk of hallucinated rule entering production</a:t>
             </a:r>
           </a:p>
         </p:txBody>
@@ -15013,17 +15707,19 @@
         </p:nvSpPr>
         <p:spPr>
           <a:xfrm>
-            <a:off x="365760" y="1508760"/>
-            <a:ext cx="11430000" cy="5212080"/>
-          </a:xfrm>
-          <a:prstGeom prst="rect">
-            <a:avLst/>
-          </a:prstGeom>
-          <a:solidFill>
-            <a:srgbClr val="1E1E2E"/>
-          </a:solidFill>
-          <a:ln>
-            <a:noFill/>
+            <a:off x="320040" y="1508760"/>
+            <a:ext cx="11521440" cy="5120640"/>
+          </a:xfrm>
+          <a:prstGeom prst="rect">
+            <a:avLst/>
+          </a:prstGeom>
+          <a:solidFill>
+            <a:srgbClr val="F0F4FA"/>
+          </a:solidFill>
+          <a:ln w="19050">
+            <a:solidFill>
+              <a:srgbClr val="0F3460"/>
+            </a:solidFill>
           </a:ln>
         </p:spPr>
         <p:style>
@@ -15050,23 +15746,59 @@
       </p:sp>
       <p:sp>
         <p:nvSpPr>
-          <p:cNvPr id="5" name="Rectangle 4"/>
+          <p:cNvPr id="5" name="TextBox 4"/>
+          <p:cNvSpPr txBox="1"/>
+          <p:nvPr/>
+        </p:nvSpPr>
+        <p:spPr>
+          <a:xfrm>
+            <a:off x="411480" y="1536192"/>
+            <a:ext cx="11338560" cy="292608"/>
+          </a:xfrm>
+          <a:prstGeom prst="rect">
+            <a:avLst/>
+          </a:prstGeom>
+          <a:noFill/>
+        </p:spPr>
+        <p:txBody>
+          <a:bodyPr wrap="square">
+            <a:spAutoFit/>
+          </a:bodyPr>
+          <a:lstStyle/>
+          <a:p>
+            <a:pPr algn="ctr"/>
+            <a:r>
+              <a:rPr sz="950" b="1" i="0">
+                <a:solidFill>
+                  <a:srgbClr val="0F3460"/>
+                </a:solidFill>
+              </a:rPr>
+              <a:t>DATABRICKS UNITY CATALOG  —  dqx_poc_cluster_7405619883480512 / retail_dqx_poc</a:t>
+            </a:r>
+          </a:p>
+        </p:txBody>
+      </p:sp>
+      <p:sp>
+        <p:nvSpPr>
+          <p:cNvPr id="6" name="Rectangle 5"/>
           <p:cNvSpPr/>
           <p:nvPr/>
         </p:nvSpPr>
         <p:spPr>
           <a:xfrm>
-            <a:off x="365760" y="1508760"/>
-            <a:ext cx="50800" cy="5212080"/>
-          </a:xfrm>
-          <a:prstGeom prst="rect">
-            <a:avLst/>
-          </a:prstGeom>
-          <a:solidFill>
-            <a:srgbClr val="E94560"/>
-          </a:solidFill>
-          <a:ln>
-            <a:noFill/>
+            <a:off x="457200" y="1901952"/>
+            <a:ext cx="2011680" cy="548640"/>
+          </a:xfrm>
+          <a:prstGeom prst="rect">
+            <a:avLst/>
+          </a:prstGeom>
+          <a:solidFill>
+            <a:srgbClr val="FFF3E0"/>
+          </a:solidFill>
+          <a:ln w="15240">
+            <a:solidFill>
+              <a:srgbClr val="E65C00"/>
+            </a:solidFill>
           </a:ln>
         </p:spPr>
         <p:style>
@@ -15084,344 +15816,815 @@
           </a:fontRef>
         </p:style>
         <p:txBody>
-          <a:bodyPr rtlCol="0" anchor="ctr"/>
-          <a:lstStyle/>
-          <a:p>
-            <a:pPr algn="ctr"/>
-          </a:p>
-        </p:txBody>
-      </p:sp>
-      <p:sp>
-        <p:nvSpPr>
-          <p:cNvPr id="6" name="TextBox 5"/>
-          <p:cNvSpPr txBox="1"/>
-          <p:nvPr/>
-        </p:nvSpPr>
-        <p:spPr>
-          <a:xfrm>
-            <a:off x="475488" y="1600200"/>
-            <a:ext cx="11265408" cy="5029200"/>
-          </a:xfrm>
-          <a:prstGeom prst="rect">
-            <a:avLst/>
-          </a:prstGeom>
-          <a:noFill/>
-        </p:spPr>
-        <p:txBody>
-          <a:bodyPr wrap="none">
-            <a:spAutoFit/>
-          </a:bodyPr>
-          <a:lstStyle/>
-          <a:p>
-            <a:pPr algn="l"/>
-            <a:r>
-              <a:rPr sz="950">
-                <a:solidFill>
-                  <a:srgbClr val="CDD6F4"/>
-                </a:solidFill>
-                <a:latin typeface="Courier New"/>
-              </a:rPr>
-              <a:t>┌─────────────────────────────────────────────────────────────────────────┐</a:t>
-            </a:r>
-          </a:p>
-          <a:p>
-            <a:pPr algn="l"/>
-            <a:r>
-              <a:rPr sz="950">
-                <a:solidFill>
-                  <a:srgbClr val="CDD6F4"/>
-                </a:solidFill>
-                <a:latin typeface="Courier New"/>
-              </a:rPr>
-              <a:t>│                  DATABRICKS UNITY CATALOG                                │</a:t>
-            </a:r>
-          </a:p>
-          <a:p>
-            <a:pPr algn="l"/>
-            <a:r>
-              <a:rPr sz="950">
-                <a:solidFill>
-                  <a:srgbClr val="CDD6F4"/>
-                </a:solidFill>
-                <a:latin typeface="Courier New"/>
-              </a:rPr>
-              <a:t>│    Catalog: dqx_poc_cluster_7405619883480512  /  DB: retail_dqx_poc     │</a:t>
-            </a:r>
-          </a:p>
-          <a:p>
-            <a:pPr algn="l"/>
-            <a:r>
-              <a:rPr sz="950">
-                <a:solidFill>
-                  <a:srgbClr val="CDD6F4"/>
-                </a:solidFill>
-                <a:latin typeface="Courier New"/>
-              </a:rPr>
-              <a:t>│                                                                           │</a:t>
-            </a:r>
-          </a:p>
-          <a:p>
-            <a:pPr algn="l"/>
-            <a:r>
-              <a:rPr sz="950">
-                <a:solidFill>
-                  <a:srgbClr val="CDD6F4"/>
-                </a:solidFill>
-                <a:latin typeface="Courier New"/>
-              </a:rPr>
-              <a:t>│  ┌──────────────┐  ┌──────────────────────────────────────────────┐     │</a:t>
-            </a:r>
-          </a:p>
-          <a:p>
-            <a:pPr algn="l"/>
-            <a:r>
-              <a:rPr sz="950">
-                <a:solidFill>
-                  <a:srgbClr val="CDD6F4"/>
-                </a:solidFill>
-                <a:latin typeface="Courier New"/>
-              </a:rPr>
-              <a:t>│  │ Config Layer │  │             PROCESSING LAYER                  │     │</a:t>
-            </a:r>
-          </a:p>
-          <a:p>
-            <a:pPr algn="l"/>
-            <a:r>
-              <a:rPr sz="950">
-                <a:solidFill>
-                  <a:srgbClr val="CDD6F4"/>
-                </a:solidFill>
-                <a:latin typeface="Courier New"/>
-              </a:rPr>
-              <a:t>│  │ constants.py │─►│  Batch Pipeline        Streaming Pipeline     │     │</a:t>
-            </a:r>
-          </a:p>
-          <a:p>
-            <a:pPr algn="l"/>
-            <a:r>
-              <a:rPr sz="950">
-                <a:solidFill>
-                  <a:srgbClr val="CDD6F4"/>
-                </a:solidFill>
-                <a:latin typeface="Courier New"/>
-              </a:rPr>
-              <a:t>│  │ rules_*.yml  │  │  batch_dqx_            kafka_stream_dqx_     │     │</a:t>
-            </a:r>
-          </a:p>
-          <a:p>
-            <a:pPr algn="l"/>
-            <a:r>
-              <a:rPr sz="950">
-                <a:solidFill>
-                  <a:srgbClr val="CDD6F4"/>
-                </a:solidFill>
-                <a:latin typeface="Courier New"/>
-              </a:rPr>
-              <a:t>│  └──────────────┘  │  validation.py         validation.py         │     │</a:t>
-            </a:r>
-          </a:p>
-          <a:p>
-            <a:pPr algn="l"/>
-            <a:r>
-              <a:rPr sz="950">
-                <a:solidFill>
-                  <a:srgbClr val="CDD6F4"/>
-                </a:solidFill>
-                <a:latin typeface="Courier New"/>
-              </a:rPr>
-              <a:t>│                    │         └──────────┬───────────────┘          │     │</a:t>
-            </a:r>
-          </a:p>
-          <a:p>
-            <a:pPr algn="l"/>
-            <a:r>
-              <a:rPr sz="950">
-                <a:solidFill>
-                  <a:srgbClr val="CDD6F4"/>
-                </a:solidFill>
-                <a:latin typeface="Courier New"/>
-              </a:rPr>
-              <a:t>│  ┌──────────────┐  │                   ▼                           │     │</a:t>
-            </a:r>
-          </a:p>
-          <a:p>
-            <a:pPr algn="l"/>
-            <a:r>
-              <a:rPr sz="950">
-                <a:solidFill>
-                  <a:srgbClr val="CDD6F4"/>
-                </a:solidFill>
-                <a:latin typeface="Courier New"/>
-              </a:rPr>
-              <a:t>│  │   AI Layer   │  │         DQX Rule Engine                       │     │</a:t>
-            </a:r>
-          </a:p>
-          <a:p>
-            <a:pPr algn="l"/>
-            <a:r>
-              <a:rPr sz="950">
-                <a:solidFill>
-                  <a:srgbClr val="CDD6F4"/>
-                </a:solidFill>
-                <a:latin typeface="Courier New"/>
-              </a:rPr>
-              <a:t>│  │  profiler    │─►│    apply_checks_by_metadata()                 │     │</a:t>
-            </a:r>
-          </a:p>
-          <a:p>
-            <a:pPr algn="l"/>
-            <a:r>
-              <a:rPr sz="950">
-                <a:solidFill>
-                  <a:srgbClr val="CDD6F4"/>
-                </a:solidFill>
-                <a:latin typeface="Courier New"/>
-              </a:rPr>
-              <a:t>│  │  llm_backend │  │                   │                           │     │</a:t>
-            </a:r>
-          </a:p>
-          <a:p>
-            <a:pPr algn="l"/>
-            <a:r>
-              <a:rPr sz="950">
-                <a:solidFill>
-                  <a:srgbClr val="CDD6F4"/>
-                </a:solidFill>
-                <a:latin typeface="Courier New"/>
-              </a:rPr>
-              <a:t>│  │  rule_writer │  │       ┌───────────┴───────────┐              │     │</a:t>
-            </a:r>
-          </a:p>
-          <a:p>
-            <a:pPr algn="l"/>
-            <a:r>
-              <a:rPr sz="950">
-                <a:solidFill>
-                  <a:srgbClr val="CDD6F4"/>
-                </a:solidFill>
-                <a:latin typeface="Courier New"/>
-              </a:rPr>
-              <a:t>│  └──────────────┘  │  sales_clean /         sales_quarantine /    │     │</a:t>
-            </a:r>
-          </a:p>
-          <a:p>
-            <a:pPr algn="l"/>
-            <a:r>
-              <a:rPr sz="950">
-                <a:solidFill>
-                  <a:srgbClr val="CDD6F4"/>
-                </a:solidFill>
-                <a:latin typeface="Courier New"/>
-              </a:rPr>
-              <a:t>│                    │  stream_events_clean   stream_events_quarant  │     │</a:t>
-            </a:r>
-          </a:p>
-          <a:p>
-            <a:pPr algn="l"/>
-            <a:r>
-              <a:rPr sz="950">
-                <a:solidFill>
-                  <a:srgbClr val="CDD6F4"/>
-                </a:solidFill>
-                <a:latin typeface="Courier New"/>
-              </a:rPr>
-              <a:t>│  ┌──────────────┐  │                   │                           │     │</a:t>
-            </a:r>
-          </a:p>
-          <a:p>
-            <a:pPr algn="l"/>
-            <a:r>
-              <a:rPr sz="950">
-                <a:solidFill>
-                  <a:srgbClr val="CDD6F4"/>
-                </a:solidFill>
-                <a:latin typeface="Courier New"/>
-              </a:rPr>
-              <a:t>│  │Metrics Layer │◄─│            dq_rule_metrics                    │     │</a:t>
-            </a:r>
-          </a:p>
-          <a:p>
-            <a:pPr algn="l"/>
-            <a:r>
-              <a:rPr sz="950">
-                <a:solidFill>
-                  <a:srgbClr val="CDD6F4"/>
-                </a:solidFill>
-                <a:latin typeface="Courier New"/>
-              </a:rPr>
-              <a:t>│  │ rule_metrics │  │            dq_rules_staging                   │     │</a:t>
-            </a:r>
-          </a:p>
-          <a:p>
-            <a:pPr algn="l"/>
-            <a:r>
-              <a:rPr sz="950">
-                <a:solidFill>
-                  <a:srgbClr val="CDD6F4"/>
-                </a:solidFill>
-                <a:latin typeface="Courier New"/>
-              </a:rPr>
-              <a:t>│  └──────────────┘  │            dq_rules_registry                  │     │</a:t>
-            </a:r>
-          </a:p>
-          <a:p>
-            <a:pPr algn="l"/>
-            <a:r>
-              <a:rPr sz="950">
-                <a:solidFill>
-                  <a:srgbClr val="CDD6F4"/>
-                </a:solidFill>
-                <a:latin typeface="Courier New"/>
-              </a:rPr>
-              <a:t>│                    └──────────────────────────────────────────────┘     │</a:t>
-            </a:r>
-          </a:p>
-          <a:p>
-            <a:pPr algn="l"/>
-            <a:r>
-              <a:rPr sz="950">
-                <a:solidFill>
-                  <a:srgbClr val="CDD6F4"/>
-                </a:solidFill>
-                <a:latin typeface="Courier New"/>
-              </a:rPr>
-              <a:t>└─────────────────────────────────────────────────────────────────────────┘</a:t>
-            </a:r>
-          </a:p>
-          <a:p>
-            <a:pPr algn="l"/>
-            <a:r>
-              <a:rPr sz="950">
-                <a:solidFill>
-                  <a:srgbClr val="CDD6F4"/>
-                </a:solidFill>
-                <a:latin typeface="Courier New"/>
-              </a:rPr>
-              <a:t>        ▲                                                   ▲</a:t>
-            </a:r>
-          </a:p>
-          <a:p>
-            <a:pPr algn="l"/>
-            <a:r>
-              <a:rPr sz="950">
-                <a:solidFill>
-                  <a:srgbClr val="CDD6F4"/>
-                </a:solidFill>
-                <a:latin typeface="Courier New"/>
-              </a:rPr>
-              <a:t>  Azure Event Hubs (Kafka)                          LLM APIs</a:t>
-            </a:r>
-          </a:p>
-          <a:p>
-            <a:pPr algn="l"/>
-            <a:r>
-              <a:rPr sz="950">
-                <a:solidFill>
-                  <a:srgbClr val="CDD6F4"/>
-                </a:solidFill>
-                <a:latin typeface="Courier New"/>
-              </a:rPr>
-              <a:t>                                               (Claude / Azure OpenAI)</a:t>
+          <a:bodyPr rtlCol="0" anchor="ctr" wrap="square" tIns="174307"/>
+          <a:lstStyle/>
+          <a:p>
+            <a:pPr algn="ctr"/>
+            <a:r>
+              <a:rPr sz="1050" b="0">
+                <a:solidFill>
+                  <a:srgbClr val="E65C00"/>
+                </a:solidFill>
+              </a:rPr>
+              <a:t>Azure Event Hubs
+(Kafka protocol)</a:t>
+            </a:r>
+          </a:p>
+        </p:txBody>
+      </p:sp>
+      <p:sp>
+        <p:nvSpPr>
+          <p:cNvPr id="7" name="Rectangle 6"/>
+          <p:cNvSpPr/>
+          <p:nvPr/>
+        </p:nvSpPr>
+        <p:spPr>
+          <a:xfrm>
+            <a:off x="9601200" y="1901952"/>
+            <a:ext cx="2011680" cy="548640"/>
+          </a:xfrm>
+          <a:prstGeom prst="rect">
+            <a:avLst/>
+          </a:prstGeom>
+          <a:solidFill>
+            <a:srgbClr val="FFF3E0"/>
+          </a:solidFill>
+          <a:ln w="15240">
+            <a:solidFill>
+              <a:srgbClr val="E65C00"/>
+            </a:solidFill>
+          </a:ln>
+        </p:spPr>
+        <p:style>
+          <a:lnRef idx="1">
+            <a:schemeClr val="accent1"/>
+          </a:lnRef>
+          <a:fillRef idx="3">
+            <a:schemeClr val="accent1"/>
+          </a:fillRef>
+          <a:effectRef idx="2">
+            <a:schemeClr val="accent1"/>
+          </a:effectRef>
+          <a:fontRef idx="minor">
+            <a:schemeClr val="lt1"/>
+          </a:fontRef>
+        </p:style>
+        <p:txBody>
+          <a:bodyPr rtlCol="0" anchor="ctr" wrap="square" tIns="174307"/>
+          <a:lstStyle/>
+          <a:p>
+            <a:pPr algn="ctr"/>
+            <a:r>
+              <a:rPr sz="1050" b="0">
+                <a:solidFill>
+                  <a:srgbClr val="E65C00"/>
+                </a:solidFill>
+              </a:rPr>
+              <a:t>LLM APIs
+Claude / Azure OpenAI</a:t>
+            </a:r>
+          </a:p>
+        </p:txBody>
+      </p:sp>
+      <p:sp>
+        <p:nvSpPr>
+          <p:cNvPr id="8" name="TextBox 7"/>
+          <p:cNvSpPr txBox="1"/>
+          <p:nvPr/>
+        </p:nvSpPr>
+        <p:spPr>
+          <a:xfrm>
+            <a:off x="1316736" y="2487168"/>
+            <a:ext cx="320040" cy="384048"/>
+          </a:xfrm>
+          <a:prstGeom prst="rect">
+            <a:avLst/>
+          </a:prstGeom>
+          <a:noFill/>
+        </p:spPr>
+        <p:txBody>
+          <a:bodyPr wrap="square">
+            <a:spAutoFit/>
+          </a:bodyPr>
+          <a:lstStyle/>
+          <a:p>
+            <a:pPr algn="ctr"/>
+            <a:r>
+              <a:rPr sz="1800" b="1" i="0">
+                <a:solidFill>
+                  <a:srgbClr val="CCCCCC"/>
+                </a:solidFill>
+              </a:rPr>
+              <a:t>↓</a:t>
+            </a:r>
+          </a:p>
+        </p:txBody>
+      </p:sp>
+      <p:sp>
+        <p:nvSpPr>
+          <p:cNvPr id="9" name="TextBox 8"/>
+          <p:cNvSpPr txBox="1"/>
+          <p:nvPr/>
+        </p:nvSpPr>
+        <p:spPr>
+          <a:xfrm>
+            <a:off x="10460736" y="2487168"/>
+            <a:ext cx="320040" cy="384048"/>
+          </a:xfrm>
+          <a:prstGeom prst="rect">
+            <a:avLst/>
+          </a:prstGeom>
+          <a:noFill/>
+        </p:spPr>
+        <p:txBody>
+          <a:bodyPr wrap="square">
+            <a:spAutoFit/>
+          </a:bodyPr>
+          <a:lstStyle/>
+          <a:p>
+            <a:pPr algn="ctr"/>
+            <a:r>
+              <a:rPr sz="1800" b="1" i="0">
+                <a:solidFill>
+                  <a:srgbClr val="CCCCCC"/>
+                </a:solidFill>
+              </a:rPr>
+              <a:t>↓</a:t>
+            </a:r>
+          </a:p>
+        </p:txBody>
+      </p:sp>
+      <p:sp>
+        <p:nvSpPr>
+          <p:cNvPr id="10" name="Rectangle 9"/>
+          <p:cNvSpPr/>
+          <p:nvPr/>
+        </p:nvSpPr>
+        <p:spPr>
+          <a:xfrm>
+            <a:off x="457200" y="2944368"/>
+            <a:ext cx="1783080" cy="822960"/>
+          </a:xfrm>
+          <a:prstGeom prst="rect">
+            <a:avLst/>
+          </a:prstGeom>
+          <a:solidFill>
+            <a:srgbClr val="E8F0FE"/>
+          </a:solidFill>
+          <a:ln w="15240">
+            <a:solidFill>
+              <a:srgbClr val="0F3460"/>
+            </a:solidFill>
+          </a:ln>
+        </p:spPr>
+        <p:style>
+          <a:lnRef idx="1">
+            <a:schemeClr val="accent1"/>
+          </a:lnRef>
+          <a:fillRef idx="3">
+            <a:schemeClr val="accent1"/>
+          </a:fillRef>
+          <a:effectRef idx="2">
+            <a:schemeClr val="accent1"/>
+          </a:effectRef>
+          <a:fontRef idx="minor">
+            <a:schemeClr val="lt1"/>
+          </a:fontRef>
+        </p:style>
+        <p:txBody>
+          <a:bodyPr rtlCol="0" anchor="ctr" wrap="square" tIns="316230"/>
+          <a:lstStyle/>
+          <a:p>
+            <a:pPr algn="ctr"/>
+            <a:r>
+              <a:rPr sz="1000" b="0">
+                <a:solidFill>
+                  <a:srgbClr val="0F3460"/>
+                </a:solidFill>
+              </a:rPr>
+              <a:t>Config Layer
+constants.py
+rules_*.yml</a:t>
+            </a:r>
+          </a:p>
+        </p:txBody>
+      </p:sp>
+      <p:sp>
+        <p:nvSpPr>
+          <p:cNvPr id="11" name="TextBox 10"/>
+          <p:cNvSpPr txBox="1"/>
+          <p:nvPr/>
+        </p:nvSpPr>
+        <p:spPr>
+          <a:xfrm>
+            <a:off x="2331720" y="3127248"/>
+            <a:ext cx="411480" cy="457200"/>
+          </a:xfrm>
+          <a:prstGeom prst="rect">
+            <a:avLst/>
+          </a:prstGeom>
+          <a:noFill/>
+        </p:spPr>
+        <p:txBody>
+          <a:bodyPr wrap="square">
+            <a:spAutoFit/>
+          </a:bodyPr>
+          <a:lstStyle/>
+          <a:p>
+            <a:pPr algn="ctr"/>
+            <a:r>
+              <a:rPr sz="1800" b="1" i="0">
+                <a:solidFill>
+                  <a:srgbClr val="CCCCCC"/>
+                </a:solidFill>
+              </a:rPr>
+              <a:t>→</a:t>
+            </a:r>
+          </a:p>
+        </p:txBody>
+      </p:sp>
+      <p:sp>
+        <p:nvSpPr>
+          <p:cNvPr id="12" name="Rectangle 11"/>
+          <p:cNvSpPr/>
+          <p:nvPr/>
+        </p:nvSpPr>
+        <p:spPr>
+          <a:xfrm>
+            <a:off x="2834640" y="2944368"/>
+            <a:ext cx="2103120" cy="822960"/>
+          </a:xfrm>
+          <a:prstGeom prst="rect">
+            <a:avLst/>
+          </a:prstGeom>
+          <a:solidFill>
+            <a:srgbClr val="E8F0FE"/>
+          </a:solidFill>
+          <a:ln w="15240">
+            <a:solidFill>
+              <a:srgbClr val="0F3460"/>
+            </a:solidFill>
+          </a:ln>
+        </p:spPr>
+        <p:style>
+          <a:lnRef idx="1">
+            <a:schemeClr val="accent1"/>
+          </a:lnRef>
+          <a:fillRef idx="3">
+            <a:schemeClr val="accent1"/>
+          </a:fillRef>
+          <a:effectRef idx="2">
+            <a:schemeClr val="accent1"/>
+          </a:effectRef>
+          <a:fontRef idx="minor">
+            <a:schemeClr val="lt1"/>
+          </a:fontRef>
+        </p:style>
+        <p:txBody>
+          <a:bodyPr rtlCol="0" anchor="ctr" wrap="square" tIns="316230"/>
+          <a:lstStyle/>
+          <a:p>
+            <a:pPr algn="ctr"/>
+            <a:r>
+              <a:rPr sz="1000" b="0">
+                <a:solidFill>
+                  <a:srgbClr val="0F3460"/>
+                </a:solidFill>
+              </a:rPr>
+              <a:t>Batch Pipeline
+batch_dqx_
+validation.py</a:t>
+            </a:r>
+          </a:p>
+        </p:txBody>
+      </p:sp>
+      <p:sp>
+        <p:nvSpPr>
+          <p:cNvPr id="13" name="Rectangle 12"/>
+          <p:cNvSpPr/>
+          <p:nvPr/>
+        </p:nvSpPr>
+        <p:spPr>
+          <a:xfrm>
+            <a:off x="5120640" y="2944368"/>
+            <a:ext cx="2286000" cy="822960"/>
+          </a:xfrm>
+          <a:prstGeom prst="rect">
+            <a:avLst/>
+          </a:prstGeom>
+          <a:solidFill>
+            <a:srgbClr val="E8F0FE"/>
+          </a:solidFill>
+          <a:ln w="15240">
+            <a:solidFill>
+              <a:srgbClr val="0F3460"/>
+            </a:solidFill>
+          </a:ln>
+        </p:spPr>
+        <p:style>
+          <a:lnRef idx="1">
+            <a:schemeClr val="accent1"/>
+          </a:lnRef>
+          <a:fillRef idx="3">
+            <a:schemeClr val="accent1"/>
+          </a:fillRef>
+          <a:effectRef idx="2">
+            <a:schemeClr val="accent1"/>
+          </a:effectRef>
+          <a:fontRef idx="minor">
+            <a:schemeClr val="lt1"/>
+          </a:fontRef>
+        </p:style>
+        <p:txBody>
+          <a:bodyPr rtlCol="0" anchor="ctr" wrap="square" tIns="316230"/>
+          <a:lstStyle/>
+          <a:p>
+            <a:pPr algn="ctr"/>
+            <a:r>
+              <a:rPr sz="1000" b="0">
+                <a:solidFill>
+                  <a:srgbClr val="0F3460"/>
+                </a:solidFill>
+              </a:rPr>
+              <a:t>Streaming Pipeline
+kafka_stream_dqx_
+validation.py</a:t>
+            </a:r>
+          </a:p>
+        </p:txBody>
+      </p:sp>
+      <p:sp>
+        <p:nvSpPr>
+          <p:cNvPr id="14" name="Rectangle 13"/>
+          <p:cNvSpPr/>
+          <p:nvPr/>
+        </p:nvSpPr>
+        <p:spPr>
+          <a:xfrm>
+            <a:off x="9509760" y="2944368"/>
+            <a:ext cx="1920240" cy="822960"/>
+          </a:xfrm>
+          <a:prstGeom prst="rect">
+            <a:avLst/>
+          </a:prstGeom>
+          <a:solidFill>
+            <a:srgbClr val="E4F6F1"/>
+          </a:solidFill>
+          <a:ln w="15240">
+            <a:solidFill>
+              <a:srgbClr val="0B8A6A"/>
+            </a:solidFill>
+          </a:ln>
+        </p:spPr>
+        <p:style>
+          <a:lnRef idx="1">
+            <a:schemeClr val="accent1"/>
+          </a:lnRef>
+          <a:fillRef idx="3">
+            <a:schemeClr val="accent1"/>
+          </a:fillRef>
+          <a:effectRef idx="2">
+            <a:schemeClr val="accent1"/>
+          </a:effectRef>
+          <a:fontRef idx="minor">
+            <a:schemeClr val="lt1"/>
+          </a:fontRef>
+        </p:style>
+        <p:txBody>
+          <a:bodyPr rtlCol="0" anchor="ctr" wrap="square" tIns="316230"/>
+          <a:lstStyle/>
+          <a:p>
+            <a:pPr algn="ctr"/>
+            <a:r>
+              <a:rPr sz="1000" b="0">
+                <a:solidFill>
+                  <a:srgbClr val="0B8A6A"/>
+                </a:solidFill>
+              </a:rPr>
+              <a:t>AI Layer
+profiler
+llm_backend
+rule_writer</a:t>
+            </a:r>
+          </a:p>
+        </p:txBody>
+      </p:sp>
+      <p:sp>
+        <p:nvSpPr>
+          <p:cNvPr id="15" name="TextBox 14"/>
+          <p:cNvSpPr txBox="1"/>
+          <p:nvPr/>
+        </p:nvSpPr>
+        <p:spPr>
+          <a:xfrm>
+            <a:off x="8001000" y="3127248"/>
+            <a:ext cx="411480" cy="457200"/>
+          </a:xfrm>
+          <a:prstGeom prst="rect">
+            <a:avLst/>
+          </a:prstGeom>
+          <a:noFill/>
+        </p:spPr>
+        <p:txBody>
+          <a:bodyPr wrap="square">
+            <a:spAutoFit/>
+          </a:bodyPr>
+          <a:lstStyle/>
+          <a:p>
+            <a:pPr algn="ctr"/>
+            <a:r>
+              <a:rPr sz="1800" b="1" i="0">
+                <a:solidFill>
+                  <a:srgbClr val="CCCCCC"/>
+                </a:solidFill>
+              </a:rPr>
+              <a:t>←</a:t>
+            </a:r>
+          </a:p>
+        </p:txBody>
+      </p:sp>
+      <p:sp>
+        <p:nvSpPr>
+          <p:cNvPr id="16" name="TextBox 15"/>
+          <p:cNvSpPr txBox="1"/>
+          <p:nvPr/>
+        </p:nvSpPr>
+        <p:spPr>
+          <a:xfrm>
+            <a:off x="3767328" y="3822191"/>
+            <a:ext cx="320040" cy="384048"/>
+          </a:xfrm>
+          <a:prstGeom prst="rect">
+            <a:avLst/>
+          </a:prstGeom>
+          <a:noFill/>
+        </p:spPr>
+        <p:txBody>
+          <a:bodyPr wrap="square">
+            <a:spAutoFit/>
+          </a:bodyPr>
+          <a:lstStyle/>
+          <a:p>
+            <a:pPr algn="ctr"/>
+            <a:r>
+              <a:rPr sz="1800" b="1" i="0">
+                <a:solidFill>
+                  <a:srgbClr val="CCCCCC"/>
+                </a:solidFill>
+              </a:rPr>
+              <a:t>↓</a:t>
+            </a:r>
+          </a:p>
+        </p:txBody>
+      </p:sp>
+      <p:sp>
+        <p:nvSpPr>
+          <p:cNvPr id="17" name="TextBox 16"/>
+          <p:cNvSpPr txBox="1"/>
+          <p:nvPr/>
+        </p:nvSpPr>
+        <p:spPr>
+          <a:xfrm>
+            <a:off x="6144768" y="3822191"/>
+            <a:ext cx="320040" cy="384048"/>
+          </a:xfrm>
+          <a:prstGeom prst="rect">
+            <a:avLst/>
+          </a:prstGeom>
+          <a:noFill/>
+        </p:spPr>
+        <p:txBody>
+          <a:bodyPr wrap="square">
+            <a:spAutoFit/>
+          </a:bodyPr>
+          <a:lstStyle/>
+          <a:p>
+            <a:pPr algn="ctr"/>
+            <a:r>
+              <a:rPr sz="1800" b="1" i="0">
+                <a:solidFill>
+                  <a:srgbClr val="CCCCCC"/>
+                </a:solidFill>
+              </a:rPr>
+              <a:t>↓</a:t>
+            </a:r>
+          </a:p>
+        </p:txBody>
+      </p:sp>
+      <p:sp>
+        <p:nvSpPr>
+          <p:cNvPr id="18" name="Rectangle 17"/>
+          <p:cNvSpPr/>
+          <p:nvPr/>
+        </p:nvSpPr>
+        <p:spPr>
+          <a:xfrm>
+            <a:off x="2560320" y="4279392"/>
+            <a:ext cx="4754880" cy="530352"/>
+          </a:xfrm>
+          <a:prstGeom prst="rect">
+            <a:avLst/>
+          </a:prstGeom>
+          <a:solidFill>
+            <a:srgbClr val="E0E8FF"/>
+          </a:solidFill>
+          <a:ln w="15240">
+            <a:solidFill>
+              <a:srgbClr val="0F3460"/>
+            </a:solidFill>
+          </a:ln>
+        </p:spPr>
+        <p:style>
+          <a:lnRef idx="1">
+            <a:schemeClr val="accent1"/>
+          </a:lnRef>
+          <a:fillRef idx="3">
+            <a:schemeClr val="accent1"/>
+          </a:fillRef>
+          <a:effectRef idx="2">
+            <a:schemeClr val="accent1"/>
+          </a:effectRef>
+          <a:fontRef idx="minor">
+            <a:schemeClr val="lt1"/>
+          </a:fontRef>
+        </p:style>
+        <p:txBody>
+          <a:bodyPr rtlCol="0" anchor="ctr" wrap="square" tIns="150876"/>
+          <a:lstStyle/>
+          <a:p>
+            <a:pPr algn="ctr"/>
+            <a:r>
+              <a:rPr sz="1200" b="1">
+                <a:solidFill>
+                  <a:srgbClr val="0F3460"/>
+                </a:solidFill>
+              </a:rPr>
+              <a:t>DQX Rule Engine  —  apply_checks_by_metadata()</a:t>
+            </a:r>
+          </a:p>
+        </p:txBody>
+      </p:sp>
+      <p:sp>
+        <p:nvSpPr>
+          <p:cNvPr id="19" name="TextBox 18"/>
+          <p:cNvSpPr txBox="1"/>
+          <p:nvPr/>
+        </p:nvSpPr>
+        <p:spPr>
+          <a:xfrm>
+            <a:off x="3767328" y="4864608"/>
+            <a:ext cx="320040" cy="384048"/>
+          </a:xfrm>
+          <a:prstGeom prst="rect">
+            <a:avLst/>
+          </a:prstGeom>
+          <a:noFill/>
+        </p:spPr>
+        <p:txBody>
+          <a:bodyPr wrap="square">
+            <a:spAutoFit/>
+          </a:bodyPr>
+          <a:lstStyle/>
+          <a:p>
+            <a:pPr algn="ctr"/>
+            <a:r>
+              <a:rPr sz="1800" b="1" i="0">
+                <a:solidFill>
+                  <a:srgbClr val="CCCCCC"/>
+                </a:solidFill>
+              </a:rPr>
+              <a:t>↓</a:t>
+            </a:r>
+          </a:p>
+        </p:txBody>
+      </p:sp>
+      <p:sp>
+        <p:nvSpPr>
+          <p:cNvPr id="20" name="TextBox 19"/>
+          <p:cNvSpPr txBox="1"/>
+          <p:nvPr/>
+        </p:nvSpPr>
+        <p:spPr>
+          <a:xfrm>
+            <a:off x="6144768" y="4864608"/>
+            <a:ext cx="320040" cy="384048"/>
+          </a:xfrm>
+          <a:prstGeom prst="rect">
+            <a:avLst/>
+          </a:prstGeom>
+          <a:noFill/>
+        </p:spPr>
+        <p:txBody>
+          <a:bodyPr wrap="square">
+            <a:spAutoFit/>
+          </a:bodyPr>
+          <a:lstStyle/>
+          <a:p>
+            <a:pPr algn="ctr"/>
+            <a:r>
+              <a:rPr sz="1800" b="1" i="0">
+                <a:solidFill>
+                  <a:srgbClr val="CCCCCC"/>
+                </a:solidFill>
+              </a:rPr>
+              <a:t>↓</a:t>
+            </a:r>
+          </a:p>
+        </p:txBody>
+      </p:sp>
+      <p:sp>
+        <p:nvSpPr>
+          <p:cNvPr id="21" name="Rectangle 20"/>
+          <p:cNvSpPr/>
+          <p:nvPr/>
+        </p:nvSpPr>
+        <p:spPr>
+          <a:xfrm>
+            <a:off x="2560320" y="5321808"/>
+            <a:ext cx="2103120" cy="640080"/>
+          </a:xfrm>
+          <a:prstGeom prst="rect">
+            <a:avLst/>
+          </a:prstGeom>
+          <a:solidFill>
+            <a:srgbClr val="E6F4EA"/>
+          </a:solidFill>
+          <a:ln w="15240">
+            <a:solidFill>
+              <a:srgbClr val="1E7E34"/>
+            </a:solidFill>
+          </a:ln>
+        </p:spPr>
+        <p:style>
+          <a:lnRef idx="1">
+            <a:schemeClr val="accent1"/>
+          </a:lnRef>
+          <a:fillRef idx="3">
+            <a:schemeClr val="accent1"/>
+          </a:fillRef>
+          <a:effectRef idx="2">
+            <a:schemeClr val="accent1"/>
+          </a:effectRef>
+          <a:fontRef idx="minor">
+            <a:schemeClr val="lt1"/>
+          </a:fontRef>
+        </p:style>
+        <p:txBody>
+          <a:bodyPr rtlCol="0" anchor="ctr" wrap="square" tIns="224790"/>
+          <a:lstStyle/>
+          <a:p>
+            <a:pPr algn="ctr"/>
+            <a:r>
+              <a:rPr sz="1000" b="0">
+                <a:solidFill>
+                  <a:srgbClr val="1E7E34"/>
+                </a:solidFill>
+              </a:rPr>
+              <a:t>sales_clean
+stream_events_clean</a:t>
+            </a:r>
+          </a:p>
+        </p:txBody>
+      </p:sp>
+      <p:sp>
+        <p:nvSpPr>
+          <p:cNvPr id="22" name="Rectangle 21"/>
+          <p:cNvSpPr/>
+          <p:nvPr/>
+        </p:nvSpPr>
+        <p:spPr>
+          <a:xfrm>
+            <a:off x="5120640" y="5321808"/>
+            <a:ext cx="2194560" cy="640080"/>
+          </a:xfrm>
+          <a:prstGeom prst="rect">
+            <a:avLst/>
+          </a:prstGeom>
+          <a:solidFill>
+            <a:srgbClr val="FFEDED"/>
+          </a:solidFill>
+          <a:ln w="15240">
+            <a:solidFill>
+              <a:srgbClr val="E94560"/>
+            </a:solidFill>
+          </a:ln>
+        </p:spPr>
+        <p:style>
+          <a:lnRef idx="1">
+            <a:schemeClr val="accent1"/>
+          </a:lnRef>
+          <a:fillRef idx="3">
+            <a:schemeClr val="accent1"/>
+          </a:fillRef>
+          <a:effectRef idx="2">
+            <a:schemeClr val="accent1"/>
+          </a:effectRef>
+          <a:fontRef idx="minor">
+            <a:schemeClr val="lt1"/>
+          </a:fontRef>
+        </p:style>
+        <p:txBody>
+          <a:bodyPr rtlCol="0" anchor="ctr" wrap="square" tIns="224790"/>
+          <a:lstStyle/>
+          <a:p>
+            <a:pPr algn="ctr"/>
+            <a:r>
+              <a:rPr sz="1000" b="0">
+                <a:solidFill>
+                  <a:srgbClr val="E94560"/>
+                </a:solidFill>
+              </a:rPr>
+              <a:t>sales_quarantine
+stream_events_quarantine</a:t>
+            </a:r>
+          </a:p>
+        </p:txBody>
+      </p:sp>
+      <p:sp>
+        <p:nvSpPr>
+          <p:cNvPr id="23" name="TextBox 22"/>
+          <p:cNvSpPr txBox="1"/>
+          <p:nvPr/>
+        </p:nvSpPr>
+        <p:spPr>
+          <a:xfrm>
+            <a:off x="7406640" y="5468112"/>
+            <a:ext cx="411480" cy="457200"/>
+          </a:xfrm>
+          <a:prstGeom prst="rect">
+            <a:avLst/>
+          </a:prstGeom>
+          <a:noFill/>
+        </p:spPr>
+        <p:txBody>
+          <a:bodyPr wrap="square">
+            <a:spAutoFit/>
+          </a:bodyPr>
+          <a:lstStyle/>
+          <a:p>
+            <a:pPr algn="ctr"/>
+            <a:r>
+              <a:rPr sz="1800" b="1" i="0">
+                <a:solidFill>
+                  <a:srgbClr val="CCCCCC"/>
+                </a:solidFill>
+              </a:rPr>
+              <a:t>→</a:t>
+            </a:r>
+          </a:p>
+        </p:txBody>
+      </p:sp>
+      <p:sp>
+        <p:nvSpPr>
+          <p:cNvPr id="24" name="Rectangle 23"/>
+          <p:cNvSpPr/>
+          <p:nvPr/>
+        </p:nvSpPr>
+        <p:spPr>
+          <a:xfrm>
+            <a:off x="7909560" y="5321808"/>
+            <a:ext cx="2103120" cy="640080"/>
+          </a:xfrm>
+          <a:prstGeom prst="rect">
+            <a:avLst/>
+          </a:prstGeom>
+          <a:solidFill>
+            <a:srgbClr val="FFF3E0"/>
+          </a:solidFill>
+          <a:ln w="15240">
+            <a:solidFill>
+              <a:srgbClr val="E65C00"/>
+            </a:solidFill>
+          </a:ln>
+        </p:spPr>
+        <p:style>
+          <a:lnRef idx="1">
+            <a:schemeClr val="accent1"/>
+          </a:lnRef>
+          <a:fillRef idx="3">
+            <a:schemeClr val="accent1"/>
+          </a:fillRef>
+          <a:effectRef idx="2">
+            <a:schemeClr val="accent1"/>
+          </a:effectRef>
+          <a:fontRef idx="minor">
+            <a:schemeClr val="lt1"/>
+          </a:fontRef>
+        </p:style>
+        <p:txBody>
+          <a:bodyPr rtlCol="0" anchor="ctr" wrap="square" tIns="224790"/>
+          <a:lstStyle/>
+          <a:p>
+            <a:pPr algn="ctr"/>
+            <a:r>
+              <a:rPr sz="1000" b="0">
+                <a:solidFill>
+                  <a:srgbClr val="0F3460"/>
+                </a:solidFill>
+              </a:rPr>
+              <a:t>dq_rule_metrics
+dq_rules_staging
+dq_rules_registry</a:t>
             </a:r>
           </a:p>
         </p:txBody>
@@ -27554,17 +28757,19 @@
         </p:nvSpPr>
         <p:spPr>
           <a:xfrm>
-            <a:off x="457200" y="1508760"/>
-            <a:ext cx="11247120" cy="4297680"/>
-          </a:xfrm>
-          <a:prstGeom prst="rect">
-            <a:avLst/>
-          </a:prstGeom>
-          <a:solidFill>
-            <a:srgbClr val="1E1E2E"/>
-          </a:solidFill>
-          <a:ln>
-            <a:noFill/>
+            <a:off x="365760" y="1508760"/>
+            <a:ext cx="5212080" cy="4572000"/>
+          </a:xfrm>
+          <a:prstGeom prst="rect">
+            <a:avLst/>
+          </a:prstGeom>
+          <a:solidFill>
+            <a:srgbClr val="E6F4EA"/>
+          </a:solidFill>
+          <a:ln w="19050">
+            <a:solidFill>
+              <a:srgbClr val="1E7E34"/>
+            </a:solidFill>
           </a:ln>
         </p:spPr>
         <p:style>
@@ -27591,20 +28796,54 @@
       </p:sp>
       <p:sp>
         <p:nvSpPr>
-          <p:cNvPr id="5" name="Rectangle 4"/>
+          <p:cNvPr id="5" name="TextBox 4"/>
+          <p:cNvSpPr txBox="1"/>
+          <p:nvPr/>
+        </p:nvSpPr>
+        <p:spPr>
+          <a:xfrm>
+            <a:off x="457200" y="1618488"/>
+            <a:ext cx="5120640" cy="384048"/>
+          </a:xfrm>
+          <a:prstGeom prst="rect">
+            <a:avLst/>
+          </a:prstGeom>
+          <a:noFill/>
+        </p:spPr>
+        <p:txBody>
+          <a:bodyPr wrap="square">
+            <a:spAutoFit/>
+          </a:bodyPr>
+          <a:lstStyle/>
+          <a:p>
+            <a:pPr algn="ctr"/>
+            <a:r>
+              <a:rPr sz="1600" b="1" i="0">
+                <a:solidFill>
+                  <a:srgbClr val="1E7E34"/>
+                </a:solidFill>
+              </a:rPr>
+              <a:t>TODAY — Complete</a:t>
+            </a:r>
+          </a:p>
+        </p:txBody>
+      </p:sp>
+      <p:sp>
+        <p:nvSpPr>
+          <p:cNvPr id="6" name="Rectangle 5"/>
           <p:cNvSpPr/>
           <p:nvPr/>
         </p:nvSpPr>
         <p:spPr>
           <a:xfrm>
-            <a:off x="457200" y="1508760"/>
-            <a:ext cx="50800" cy="4297680"/>
-          </a:xfrm>
-          <a:prstGeom prst="rect">
-            <a:avLst/>
-          </a:prstGeom>
-          <a:solidFill>
-            <a:srgbClr val="E94560"/>
+            <a:off x="548640" y="2011680"/>
+            <a:ext cx="4846320" cy="12700"/>
+          </a:xfrm>
+          <a:prstGeom prst="rect">
+            <a:avLst/>
+          </a:prstGeom>
+          <a:solidFill>
+            <a:srgbClr val="1E7E34"/>
           </a:solidFill>
           <a:ln>
             <a:noFill/>
@@ -27634,203 +28873,429 @@
       </p:sp>
       <p:sp>
         <p:nvSpPr>
-          <p:cNvPr id="6" name="TextBox 5"/>
-          <p:cNvSpPr txBox="1"/>
-          <p:nvPr/>
-        </p:nvSpPr>
-        <p:spPr>
-          <a:xfrm>
-            <a:off x="566928" y="1600200"/>
-            <a:ext cx="11082528" cy="4114800"/>
-          </a:xfrm>
-          <a:prstGeom prst="rect">
-            <a:avLst/>
-          </a:prstGeom>
-          <a:noFill/>
-        </p:spPr>
-        <p:txBody>
-          <a:bodyPr wrap="none">
-            <a:spAutoFit/>
-          </a:bodyPr>
-          <a:lstStyle/>
-          <a:p>
-            <a:pPr algn="l"/>
-            <a:r>
-              <a:rPr sz="1150">
-                <a:solidFill>
-                  <a:srgbClr val="CDD6F4"/>
-                </a:solidFill>
-                <a:latin typeface="Courier New"/>
-              </a:rPr>
-              <a:t>┌──────────────────────────────────────────────────────────────────────┐</a:t>
-            </a:r>
-          </a:p>
-          <a:p>
-            <a:pPr algn="l"/>
-            <a:r>
-              <a:rPr sz="1150">
-                <a:solidFill>
-                  <a:srgbClr val="CDD6F4"/>
-                </a:solidFill>
-                <a:latin typeface="Courier New"/>
-              </a:rPr>
-              <a:t>│                                                                        │</a:t>
-            </a:r>
-          </a:p>
-          <a:p>
-            <a:pPr algn="l"/>
-            <a:r>
-              <a:rPr sz="1150">
-                <a:solidFill>
-                  <a:srgbClr val="CDD6F4"/>
-                </a:solidFill>
-                <a:latin typeface="Courier New"/>
-              </a:rPr>
-              <a:t>│   TODAY (POC — 5 phases complete)  TOMORROW (Production AI Infusion)  │</a:t>
-            </a:r>
-          </a:p>
-          <a:p>
-            <a:pPr algn="l"/>
-            <a:r>
-              <a:rPr sz="1150">
-                <a:solidFill>
-                  <a:srgbClr val="CDD6F4"/>
-                </a:solidFill>
-                <a:latin typeface="Courier New"/>
-              </a:rPr>
-              <a:t>│   ─────────────────────────────    ───────────────────────────────    │</a:t>
-            </a:r>
-          </a:p>
-          <a:p>
-            <a:pPr algn="l"/>
-            <a:r>
-              <a:rPr sz="1150">
-                <a:solidFill>
-                  <a:srgbClr val="CDD6F4"/>
-                </a:solidFill>
-                <a:latin typeface="Courier New"/>
-              </a:rPr>
-              <a:t>│                                                                        │</a:t>
-            </a:r>
-          </a:p>
-          <a:p>
-            <a:pPr algn="l"/>
-            <a:r>
-              <a:rPr sz="1150">
-                <a:solidFill>
-                  <a:srgbClr val="CDD6F4"/>
-                </a:solidFill>
-                <a:latin typeface="Courier New"/>
-              </a:rPr>
-              <a:t>│   ✅ AI generates DQ rules          + AI detects when rules go stale  │</a:t>
-            </a:r>
-          </a:p>
-          <a:p>
-            <a:pPr algn="l"/>
-            <a:r>
-              <a:rPr sz="1150">
-                <a:solidFill>
-                  <a:srgbClr val="CDD6F4"/>
-                </a:solidFill>
-                <a:latin typeface="Courier New"/>
-              </a:rPr>
-              <a:t>│   ✅ Batch + stream validated        + AI classifies alert severity    │</a:t>
-            </a:r>
-          </a:p>
-          <a:p>
-            <a:pPr algn="l"/>
-            <a:r>
-              <a:rPr sz="1150">
-                <a:solidFill>
-                  <a:srgbClr val="CDD6F4"/>
-                </a:solidFill>
-                <a:latin typeface="Courier New"/>
-              </a:rPr>
-              <a:t>│   ✅ Quarantine records analysed     + AI explains root cause in eng   │</a:t>
-            </a:r>
-          </a:p>
-          <a:p>
-            <a:pPr algn="l"/>
-            <a:r>
-              <a:rPr sz="1150">
-                <a:solidFill>
-                  <a:srgbClr val="CDD6F4"/>
-                </a:solidFill>
-                <a:latin typeface="Courier New"/>
-              </a:rPr>
-              <a:t>│   ✅ Rule effectiveness tracked      + AI suggests rule updates        │</a:t>
-            </a:r>
-          </a:p>
-          <a:p>
-            <a:pPr algn="l"/>
-            <a:r>
-              <a:rPr sz="1150">
-                <a:solidFill>
-                  <a:srgbClr val="CDD6F4"/>
-                </a:solidFill>
-                <a:latin typeface="Courier New"/>
-              </a:rPr>
-              <a:t>│   ✅ Human governance layer          + AI scorecard for exec view      │</a:t>
-            </a:r>
-          </a:p>
-          <a:p>
-            <a:pPr algn="l"/>
-            <a:r>
-              <a:rPr sz="1150">
-                <a:solidFill>
-                  <a:srgbClr val="CDD6F4"/>
-                </a:solidFill>
-                <a:latin typeface="Courier New"/>
-              </a:rPr>
-              <a:t>│                                                                        │</a:t>
-            </a:r>
-          </a:p>
-          <a:p>
-            <a:pPr algn="l"/>
-            <a:r>
-              <a:rPr sz="1150">
-                <a:solidFill>
-                  <a:srgbClr val="CDD6F4"/>
-                </a:solidFill>
-                <a:latin typeface="Courier New"/>
-              </a:rPr>
-              <a:t>│   Result: A data quality platform that improves itself,                │</a:t>
-            </a:r>
-          </a:p>
-          <a:p>
-            <a:pPr algn="l"/>
-            <a:r>
-              <a:rPr sz="1150">
-                <a:solidFill>
-                  <a:srgbClr val="CDD6F4"/>
-                </a:solidFill>
-                <a:latin typeface="Courier New"/>
-              </a:rPr>
-              <a:t>│   governed by humans, powered by AI, built on Databricks.             │</a:t>
-            </a:r>
-          </a:p>
-          <a:p>
-            <a:pPr algn="l"/>
-            <a:r>
-              <a:rPr sz="1150">
-                <a:solidFill>
-                  <a:srgbClr val="CDD6F4"/>
-                </a:solidFill>
-                <a:latin typeface="Courier New"/>
-              </a:rPr>
-              <a:t>│                                                                        │</a:t>
-            </a:r>
-          </a:p>
-          <a:p>
-            <a:pPr algn="l"/>
-            <a:r>
-              <a:rPr sz="1150">
-                <a:solidFill>
-                  <a:srgbClr val="CDD6F4"/>
-                </a:solidFill>
-                <a:latin typeface="Courier New"/>
-              </a:rPr>
-              <a:t>└──────────────────────────────────────────────────────────────────────┘</a:t>
+          <p:cNvPr id="7" name="TextBox 6"/>
+          <p:cNvSpPr txBox="1"/>
+          <p:nvPr/>
+        </p:nvSpPr>
+        <p:spPr>
+          <a:xfrm>
+            <a:off x="502920" y="2148840"/>
+            <a:ext cx="5029200" cy="3657600"/>
+          </a:xfrm>
+          <a:prstGeom prst="rect">
+            <a:avLst/>
+          </a:prstGeom>
+          <a:noFill/>
+        </p:spPr>
+        <p:txBody>
+          <a:bodyPr wrap="square">
+            <a:spAutoFit/>
+          </a:bodyPr>
+          <a:lstStyle/>
+          <a:p>
+            <a:pPr>
+              <a:spcBef>
+                <a:spcPts val="1600"/>
+              </a:spcBef>
+            </a:pPr>
+            <a:r>
+              <a:rPr sz="1500">
+                <a:solidFill>
+                  <a:srgbClr val="0D522A"/>
+                </a:solidFill>
+              </a:rPr>
+              <a:t>  ✅  AI generates DQ rules from data</a:t>
+            </a:r>
+          </a:p>
+          <a:p>
+            <a:pPr>
+              <a:spcBef>
+                <a:spcPts val="1600"/>
+              </a:spcBef>
+            </a:pPr>
+            <a:r>
+              <a:rPr sz="1500">
+                <a:solidFill>
+                  <a:srgbClr val="0D522A"/>
+                </a:solidFill>
+              </a:rPr>
+              <a:t>  ✅  Batch + stream data validated</a:t>
+            </a:r>
+          </a:p>
+          <a:p>
+            <a:pPr>
+              <a:spcBef>
+                <a:spcPts val="1600"/>
+              </a:spcBef>
+            </a:pPr>
+            <a:r>
+              <a:rPr sz="1500">
+                <a:solidFill>
+                  <a:srgbClr val="0D522A"/>
+                </a:solidFill>
+              </a:rPr>
+              <a:t>  ✅  Quarantine records analysed</a:t>
+            </a:r>
+          </a:p>
+          <a:p>
+            <a:pPr>
+              <a:spcBef>
+                <a:spcPts val="1600"/>
+              </a:spcBef>
+            </a:pPr>
+            <a:r>
+              <a:rPr sz="1500">
+                <a:solidFill>
+                  <a:srgbClr val="0D522A"/>
+                </a:solidFill>
+              </a:rPr>
+              <a:t>  ✅  Rule effectiveness tracked</a:t>
+            </a:r>
+          </a:p>
+          <a:p>
+            <a:pPr>
+              <a:spcBef>
+                <a:spcPts val="1600"/>
+              </a:spcBef>
+            </a:pPr>
+            <a:r>
+              <a:rPr sz="1500">
+                <a:solidFill>
+                  <a:srgbClr val="0D522A"/>
+                </a:solidFill>
+              </a:rPr>
+              <a:t>  ✅  Human governance layer</a:t>
+            </a:r>
+          </a:p>
+        </p:txBody>
+      </p:sp>
+      <p:sp>
+        <p:nvSpPr>
+          <p:cNvPr id="8" name="Rectangle 7"/>
+          <p:cNvSpPr/>
+          <p:nvPr/>
+        </p:nvSpPr>
+        <p:spPr>
+          <a:xfrm>
+            <a:off x="6583680" y="1508760"/>
+            <a:ext cx="5212080" cy="4572000"/>
+          </a:xfrm>
+          <a:prstGeom prst="rect">
+            <a:avLst/>
+          </a:prstGeom>
+          <a:solidFill>
+            <a:srgbClr val="E8F0FE"/>
+          </a:solidFill>
+          <a:ln w="19050">
+            <a:solidFill>
+              <a:srgbClr val="0F3460"/>
+            </a:solidFill>
+          </a:ln>
+        </p:spPr>
+        <p:style>
+          <a:lnRef idx="1">
+            <a:schemeClr val="accent1"/>
+          </a:lnRef>
+          <a:fillRef idx="3">
+            <a:schemeClr val="accent1"/>
+          </a:fillRef>
+          <a:effectRef idx="2">
+            <a:schemeClr val="accent1"/>
+          </a:effectRef>
+          <a:fontRef idx="minor">
+            <a:schemeClr val="lt1"/>
+          </a:fontRef>
+        </p:style>
+        <p:txBody>
+          <a:bodyPr rtlCol="0" anchor="ctr"/>
+          <a:lstStyle/>
+          <a:p>
+            <a:pPr algn="ctr"/>
+          </a:p>
+        </p:txBody>
+      </p:sp>
+      <p:sp>
+        <p:nvSpPr>
+          <p:cNvPr id="9" name="TextBox 8"/>
+          <p:cNvSpPr txBox="1"/>
+          <p:nvPr/>
+        </p:nvSpPr>
+        <p:spPr>
+          <a:xfrm>
+            <a:off x="6675120" y="1618488"/>
+            <a:ext cx="5120640" cy="384048"/>
+          </a:xfrm>
+          <a:prstGeom prst="rect">
+            <a:avLst/>
+          </a:prstGeom>
+          <a:noFill/>
+        </p:spPr>
+        <p:txBody>
+          <a:bodyPr wrap="square">
+            <a:spAutoFit/>
+          </a:bodyPr>
+          <a:lstStyle/>
+          <a:p>
+            <a:pPr algn="ctr"/>
+            <a:r>
+              <a:rPr sz="1600" b="1" i="0">
+                <a:solidFill>
+                  <a:srgbClr val="0F3460"/>
+                </a:solidFill>
+              </a:rPr>
+              <a:t>TOMORROW — Production AI Infusion</a:t>
+            </a:r>
+          </a:p>
+        </p:txBody>
+      </p:sp>
+      <p:sp>
+        <p:nvSpPr>
+          <p:cNvPr id="10" name="Rectangle 9"/>
+          <p:cNvSpPr/>
+          <p:nvPr/>
+        </p:nvSpPr>
+        <p:spPr>
+          <a:xfrm>
+            <a:off x="6766560" y="2011680"/>
+            <a:ext cx="4846320" cy="12700"/>
+          </a:xfrm>
+          <a:prstGeom prst="rect">
+            <a:avLst/>
+          </a:prstGeom>
+          <a:solidFill>
+            <a:srgbClr val="0F3460"/>
+          </a:solidFill>
+          <a:ln>
+            <a:noFill/>
+          </a:ln>
+        </p:spPr>
+        <p:style>
+          <a:lnRef idx="1">
+            <a:schemeClr val="accent1"/>
+          </a:lnRef>
+          <a:fillRef idx="3">
+            <a:schemeClr val="accent1"/>
+          </a:fillRef>
+          <a:effectRef idx="2">
+            <a:schemeClr val="accent1"/>
+          </a:effectRef>
+          <a:fontRef idx="minor">
+            <a:schemeClr val="lt1"/>
+          </a:fontRef>
+        </p:style>
+        <p:txBody>
+          <a:bodyPr rtlCol="0" anchor="ctr"/>
+          <a:lstStyle/>
+          <a:p>
+            <a:pPr algn="ctr"/>
+          </a:p>
+        </p:txBody>
+      </p:sp>
+      <p:sp>
+        <p:nvSpPr>
+          <p:cNvPr id="11" name="TextBox 10"/>
+          <p:cNvSpPr txBox="1"/>
+          <p:nvPr/>
+        </p:nvSpPr>
+        <p:spPr>
+          <a:xfrm>
+            <a:off x="6720840" y="2148840"/>
+            <a:ext cx="5029200" cy="3657600"/>
+          </a:xfrm>
+          <a:prstGeom prst="rect">
+            <a:avLst/>
+          </a:prstGeom>
+          <a:noFill/>
+        </p:spPr>
+        <p:txBody>
+          <a:bodyPr wrap="square">
+            <a:spAutoFit/>
+          </a:bodyPr>
+          <a:lstStyle/>
+          <a:p>
+            <a:pPr>
+              <a:spcBef>
+                <a:spcPts val="1600"/>
+              </a:spcBef>
+            </a:pPr>
+            <a:r>
+              <a:rPr sz="1500">
+                <a:solidFill>
+                  <a:srgbClr val="0A2244"/>
+                </a:solidFill>
+              </a:rPr>
+              <a:t>  +  AI detects when rules go stale</a:t>
+            </a:r>
+          </a:p>
+          <a:p>
+            <a:pPr>
+              <a:spcBef>
+                <a:spcPts val="1600"/>
+              </a:spcBef>
+            </a:pPr>
+            <a:r>
+              <a:rPr sz="1500">
+                <a:solidFill>
+                  <a:srgbClr val="0A2244"/>
+                </a:solidFill>
+              </a:rPr>
+              <a:t>  +  AI classifies alert severity</a:t>
+            </a:r>
+          </a:p>
+          <a:p>
+            <a:pPr>
+              <a:spcBef>
+                <a:spcPts val="1600"/>
+              </a:spcBef>
+            </a:pPr>
+            <a:r>
+              <a:rPr sz="1500">
+                <a:solidFill>
+                  <a:srgbClr val="0A2244"/>
+                </a:solidFill>
+              </a:rPr>
+              <a:t>  +  AI explains root cause in plain English</a:t>
+            </a:r>
+          </a:p>
+          <a:p>
+            <a:pPr>
+              <a:spcBef>
+                <a:spcPts val="1600"/>
+              </a:spcBef>
+            </a:pPr>
+            <a:r>
+              <a:rPr sz="1500">
+                <a:solidFill>
+                  <a:srgbClr val="0A2244"/>
+                </a:solidFill>
+              </a:rPr>
+              <a:t>  +  AI suggests rule updates on drift</a:t>
+            </a:r>
+          </a:p>
+          <a:p>
+            <a:pPr>
+              <a:spcBef>
+                <a:spcPts val="1600"/>
+              </a:spcBef>
+            </a:pPr>
+            <a:r>
+              <a:rPr sz="1500">
+                <a:solidFill>
+                  <a:srgbClr val="0A2244"/>
+                </a:solidFill>
+              </a:rPr>
+              <a:t>  +  AI scorecard for executive reporting</a:t>
+            </a:r>
+          </a:p>
+        </p:txBody>
+      </p:sp>
+      <p:sp>
+        <p:nvSpPr>
+          <p:cNvPr id="12" name="TextBox 11"/>
+          <p:cNvSpPr txBox="1"/>
+          <p:nvPr/>
+        </p:nvSpPr>
+        <p:spPr>
+          <a:xfrm>
+            <a:off x="5669280" y="3337560"/>
+            <a:ext cx="731520" cy="640080"/>
+          </a:xfrm>
+          <a:prstGeom prst="rect">
+            <a:avLst/>
+          </a:prstGeom>
+          <a:noFill/>
+        </p:spPr>
+        <p:txBody>
+          <a:bodyPr wrap="square">
+            <a:spAutoFit/>
+          </a:bodyPr>
+          <a:lstStyle/>
+          <a:p>
+            <a:pPr algn="ctr"/>
+            <a:r>
+              <a:rPr sz="3600" b="1" i="0">
+                <a:solidFill>
+                  <a:srgbClr val="0F3460"/>
+                </a:solidFill>
+              </a:rPr>
+              <a:t>→</a:t>
+            </a:r>
+          </a:p>
+        </p:txBody>
+      </p:sp>
+      <p:sp>
+        <p:nvSpPr>
+          <p:cNvPr id="13" name="Rectangle 12"/>
+          <p:cNvSpPr/>
+          <p:nvPr/>
+        </p:nvSpPr>
+        <p:spPr>
+          <a:xfrm>
+            <a:off x="365760" y="6236208"/>
+            <a:ext cx="11430000" cy="457200"/>
+          </a:xfrm>
+          <a:prstGeom prst="rect">
+            <a:avLst/>
+          </a:prstGeom>
+          <a:solidFill>
+            <a:srgbClr val="0F3460"/>
+          </a:solidFill>
+          <a:ln>
+            <a:noFill/>
+          </a:ln>
+        </p:spPr>
+        <p:style>
+          <a:lnRef idx="1">
+            <a:schemeClr val="accent1"/>
+          </a:lnRef>
+          <a:fillRef idx="3">
+            <a:schemeClr val="accent1"/>
+          </a:fillRef>
+          <a:effectRef idx="2">
+            <a:schemeClr val="accent1"/>
+          </a:effectRef>
+          <a:fontRef idx="minor">
+            <a:schemeClr val="lt1"/>
+          </a:fontRef>
+        </p:style>
+        <p:txBody>
+          <a:bodyPr rtlCol="0" anchor="ctr"/>
+          <a:lstStyle/>
+          <a:p>
+            <a:pPr algn="ctr"/>
+          </a:p>
+        </p:txBody>
+      </p:sp>
+      <p:sp>
+        <p:nvSpPr>
+          <p:cNvPr id="14" name="TextBox 13"/>
+          <p:cNvSpPr txBox="1"/>
+          <p:nvPr/>
+        </p:nvSpPr>
+        <p:spPr>
+          <a:xfrm>
+            <a:off x="365760" y="6263640"/>
+            <a:ext cx="11430000" cy="402336"/>
+          </a:xfrm>
+          <a:prstGeom prst="rect">
+            <a:avLst/>
+          </a:prstGeom>
+          <a:noFill/>
+        </p:spPr>
+        <p:txBody>
+          <a:bodyPr wrap="square">
+            <a:spAutoFit/>
+          </a:bodyPr>
+          <a:lstStyle/>
+          <a:p>
+            <a:pPr algn="ctr"/>
+            <a:r>
+              <a:rPr sz="1350" b="1" i="0">
+                <a:solidFill>
+                  <a:srgbClr val="FFFFFF"/>
+                </a:solidFill>
+              </a:rPr>
+              <a:t>Result:  A data quality platform that improves itself — governed by humans, powered by AI, built on Databricks.</a:t>
             </a:r>
           </a:p>
         </p:txBody>
@@ -30166,17 +31631,19 @@
         </p:nvSpPr>
         <p:spPr>
           <a:xfrm>
-            <a:off x="548640" y="1508760"/>
-            <a:ext cx="11064240" cy="3063240"/>
-          </a:xfrm>
-          <a:prstGeom prst="rect">
-            <a:avLst/>
-          </a:prstGeom>
-          <a:solidFill>
-            <a:srgbClr val="1E1E2E"/>
-          </a:solidFill>
-          <a:ln>
-            <a:noFill/>
+            <a:off x="411480" y="1508760"/>
+            <a:ext cx="5074920" cy="4434840"/>
+          </a:xfrm>
+          <a:prstGeom prst="rect">
+            <a:avLst/>
+          </a:prstGeom>
+          <a:solidFill>
+            <a:srgbClr val="FFEDED"/>
+          </a:solidFill>
+          <a:ln w="22860">
+            <a:solidFill>
+              <a:srgbClr val="E94560"/>
+            </a:solidFill>
           </a:ln>
         </p:spPr>
         <p:style>
@@ -30203,14 +31670,82 @@
       </p:sp>
       <p:sp>
         <p:nvSpPr>
-          <p:cNvPr id="5" name="Rectangle 4"/>
+          <p:cNvPr id="5" name="TextBox 4"/>
+          <p:cNvSpPr txBox="1"/>
+          <p:nvPr/>
+        </p:nvSpPr>
+        <p:spPr>
+          <a:xfrm>
+            <a:off x="411480" y="1600200"/>
+            <a:ext cx="5074920" cy="411480"/>
+          </a:xfrm>
+          <a:prstGeom prst="rect">
+            <a:avLst/>
+          </a:prstGeom>
+          <a:noFill/>
+        </p:spPr>
+        <p:txBody>
+          <a:bodyPr wrap="square">
+            <a:spAutoFit/>
+          </a:bodyPr>
+          <a:lstStyle/>
+          <a:p>
+            <a:pPr algn="ctr"/>
+            <a:r>
+              <a:rPr sz="1700" b="1" i="0">
+                <a:solidFill>
+                  <a:srgbClr val="E94560"/>
+                </a:solidFill>
+              </a:rPr>
+              <a:t>TODAY</a:t>
+            </a:r>
+          </a:p>
+        </p:txBody>
+      </p:sp>
+      <p:sp>
+        <p:nvSpPr>
+          <p:cNvPr id="6" name="TextBox 5"/>
+          <p:cNvSpPr txBox="1"/>
+          <p:nvPr/>
+        </p:nvSpPr>
+        <p:spPr>
+          <a:xfrm>
+            <a:off x="411480" y="2011680"/>
+            <a:ext cx="5074920" cy="292608"/>
+          </a:xfrm>
+          <a:prstGeom prst="rect">
+            <a:avLst/>
+          </a:prstGeom>
+          <a:noFill/>
+        </p:spPr>
+        <p:txBody>
+          <a:bodyPr wrap="square">
+            <a:spAutoFit/>
+          </a:bodyPr>
+          <a:lstStyle/>
+          <a:p>
+            <a:pPr algn="ctr"/>
+            <a:r>
+              <a:rPr sz="1150" b="0" i="1">
+                <a:solidFill>
+                  <a:srgbClr val="E94560"/>
+                </a:solidFill>
+              </a:rPr>
+              <a:t>Reactive  ·  Slow  ·  Brittle</a:t>
+            </a:r>
+          </a:p>
+        </p:txBody>
+      </p:sp>
+      <p:sp>
+        <p:nvSpPr>
+          <p:cNvPr id="7" name="Rectangle 6"/>
           <p:cNvSpPr/>
           <p:nvPr/>
         </p:nvSpPr>
         <p:spPr>
           <a:xfrm>
-            <a:off x="548640" y="1508760"/>
-            <a:ext cx="50800" cy="3063240"/>
+            <a:off x="685800" y="2313432"/>
+            <a:ext cx="4526280" cy="12700"/>
           </a:xfrm>
           <a:prstGeom prst="rect">
             <a:avLst/>
@@ -30246,191 +31781,14 @@
       </p:sp>
       <p:sp>
         <p:nvSpPr>
-          <p:cNvPr id="6" name="TextBox 5"/>
-          <p:cNvSpPr txBox="1"/>
-          <p:nvPr/>
-        </p:nvSpPr>
-        <p:spPr>
-          <a:xfrm>
-            <a:off x="658368" y="1600200"/>
-            <a:ext cx="10899648" cy="2880360"/>
-          </a:xfrm>
-          <a:prstGeom prst="rect">
-            <a:avLst/>
-          </a:prstGeom>
-          <a:noFill/>
-        </p:spPr>
-        <p:txBody>
-          <a:bodyPr wrap="none">
-            <a:spAutoFit/>
-          </a:bodyPr>
-          <a:lstStyle/>
-          <a:p>
-            <a:pPr algn="l"/>
-            <a:r>
-              <a:rPr sz="1150">
-                <a:solidFill>
-                  <a:srgbClr val="CDD6F4"/>
-                </a:solidFill>
-                <a:latin typeface="Courier New"/>
-              </a:rPr>
-              <a:t>              TODAY                              TARGET</a:t>
-            </a:r>
-          </a:p>
-          <a:p>
-            <a:pPr algn="l"/>
-            <a:r>
-              <a:rPr sz="1150">
-                <a:solidFill>
-                  <a:srgbClr val="CDD6F4"/>
-                </a:solidFill>
-                <a:latin typeface="Courier New"/>
-              </a:rPr>
-              <a:t>    ┌──────────────────────┐         ┌──────────────────────────────┐</a:t>
-            </a:r>
-          </a:p>
-          <a:p>
-            <a:pPr algn="l"/>
-            <a:r>
-              <a:rPr sz="1150">
-                <a:solidFill>
-                  <a:srgbClr val="CDD6F4"/>
-                </a:solidFill>
-                <a:latin typeface="Courier New"/>
-              </a:rPr>
-              <a:t>    │  Data Engineer       │         │  AI analyses data profile    │</a:t>
-            </a:r>
-          </a:p>
-          <a:p>
-            <a:pPr algn="l"/>
-            <a:r>
-              <a:rPr sz="1150">
-                <a:solidFill>
-                  <a:srgbClr val="CDD6F4"/>
-                </a:solidFill>
-                <a:latin typeface="Courier New"/>
-              </a:rPr>
-              <a:t>    │  writes rules        │  →→→→   │  suggests rules              │</a:t>
-            </a:r>
-          </a:p>
-          <a:p>
-            <a:pPr algn="l"/>
-            <a:r>
-              <a:rPr sz="1150">
-                <a:solidFill>
-                  <a:srgbClr val="CDD6F4"/>
-                </a:solidFill>
-                <a:latin typeface="Courier New"/>
-              </a:rPr>
-              <a:t>    │  manually, reactively│         │  learns from violations      │</a:t>
-            </a:r>
-          </a:p>
-          <a:p>
-            <a:pPr algn="l"/>
-            <a:r>
-              <a:rPr sz="1150">
-                <a:solidFill>
-                  <a:srgbClr val="CDD6F4"/>
-                </a:solidFill>
-                <a:latin typeface="Courier New"/>
-              </a:rPr>
-              <a:t>    │  no effectiveness    │         │  continuously self-improves  │</a:t>
-            </a:r>
-          </a:p>
-          <a:p>
-            <a:pPr algn="l"/>
-            <a:r>
-              <a:rPr sz="1150">
-                <a:solidFill>
-                  <a:srgbClr val="CDD6F4"/>
-                </a:solidFill>
-                <a:latin typeface="Courier New"/>
-              </a:rPr>
-              <a:t>    │  feedback            │         │  governed by humans          │</a:t>
-            </a:r>
-          </a:p>
-          <a:p>
-            <a:pPr algn="l"/>
-            <a:r>
-              <a:rPr sz="1150">
-                <a:solidFill>
-                  <a:srgbClr val="CDD6F4"/>
-                </a:solidFill>
-                <a:latin typeface="Courier New"/>
-              </a:rPr>
-              <a:t>    └──────────────────────┘         └──────────────────────────────┘</a:t>
-            </a:r>
-          </a:p>
-          <a:p>
-            <a:pPr algn="l"/>
-            <a:r>
-              <a:rPr sz="1150">
-                <a:solidFill>
-                  <a:srgbClr val="CDD6F4"/>
-                </a:solidFill>
-                <a:latin typeface="Courier New"/>
-              </a:rPr>
-              <a:t/>
-            </a:r>
-          </a:p>
-          <a:p>
-            <a:pPr algn="l"/>
-            <a:r>
-              <a:rPr sz="1150">
-                <a:solidFill>
-                  <a:srgbClr val="CDD6F4"/>
-                </a:solidFill>
-                <a:latin typeface="Courier New"/>
-              </a:rPr>
-              <a:t>       Reactive, slow, brittle          Proactive, adaptive, governed</a:t>
-            </a:r>
-          </a:p>
-        </p:txBody>
-      </p:sp>
-      <p:sp>
-        <p:nvSpPr>
-          <p:cNvPr id="7" name="TextBox 6"/>
-          <p:cNvSpPr txBox="1"/>
-          <p:nvPr/>
-        </p:nvSpPr>
-        <p:spPr>
-          <a:xfrm>
-            <a:off x="640080" y="4709160"/>
-            <a:ext cx="10972800" cy="365760"/>
-          </a:xfrm>
-          <a:prstGeom prst="rect">
-            <a:avLst/>
-          </a:prstGeom>
-          <a:noFill/>
-        </p:spPr>
-        <p:txBody>
-          <a:bodyPr wrap="square">
-            <a:spAutoFit/>
-          </a:bodyPr>
-          <a:lstStyle/>
-          <a:p>
-            <a:pPr algn="l"/>
-            <a:r>
-              <a:rPr sz="1700" b="1" i="0">
-                <a:solidFill>
-                  <a:srgbClr val="0F3460"/>
-                </a:solidFill>
-              </a:rPr>
-              <a:t>Three shifts required:</a:t>
-            </a:r>
-          </a:p>
-        </p:txBody>
-      </p:sp>
-      <p:sp>
-        <p:nvSpPr>
           <p:cNvPr id="8" name="TextBox 7"/>
           <p:cNvSpPr txBox="1"/>
           <p:nvPr/>
         </p:nvSpPr>
         <p:spPr>
           <a:xfrm>
-            <a:off x="640080" y="5074920"/>
-            <a:ext cx="10972800" cy="1554480"/>
+            <a:off x="612648" y="2468880"/>
+            <a:ext cx="4800600" cy="3200400"/>
           </a:xfrm>
           <a:prstGeom prst="rect">
             <a:avLst/>
@@ -30445,46 +31803,476 @@
           <a:p>
             <a:pPr>
               <a:spcBef>
-                <a:spcPts val="700"/>
+                <a:spcPts val="1400"/>
               </a:spcBef>
             </a:pPr>
             <a:r>
-              <a:rPr sz="1600">
-                <a:solidFill>
-                  <a:srgbClr val="333333"/>
-                </a:solidFill>
-              </a:rPr>
-              <a:t>•  Batch → Real-time  —  Catch bad data as it arrives, not the next morning</a:t>
+              <a:rPr sz="1450">
+                <a:solidFill>
+                  <a:srgbClr val="55111A"/>
+                </a:solidFill>
+              </a:rPr>
+              <a:t>•  Engineer writes every rule manually</a:t>
             </a:r>
           </a:p>
           <a:p>
             <a:pPr>
               <a:spcBef>
-                <a:spcPts val="700"/>
+                <a:spcPts val="1400"/>
               </a:spcBef>
             </a:pPr>
             <a:r>
-              <a:rPr sz="1600">
-                <a:solidFill>
-                  <a:srgbClr val="333333"/>
-                </a:solidFill>
-              </a:rPr>
-              <a:t>•  Manual → AI-Generated  —  Let AI analyse the data and write the rules</a:t>
+              <a:rPr sz="1450">
+                <a:solidFill>
+                  <a:srgbClr val="55111A"/>
+                </a:solidFill>
+              </a:rPr>
+              <a:t>•  Rules created after a problem surfaces</a:t>
             </a:r>
           </a:p>
           <a:p>
             <a:pPr>
               <a:spcBef>
-                <a:spcPts val="700"/>
+                <a:spcPts val="1400"/>
               </a:spcBef>
             </a:pPr>
             <a:r>
-              <a:rPr sz="1600">
-                <a:solidFill>
-                  <a:srgbClr val="333333"/>
-                </a:solidFill>
-              </a:rPr>
-              <a:t>•  Static → Self-Improving  —  Rules that evolve as data patterns change</a:t>
+              <a:rPr sz="1450">
+                <a:solidFill>
+                  <a:srgbClr val="55111A"/>
+                </a:solidFill>
+              </a:rPr>
+              <a:t>•  Stale rules pile up — never reviewed</a:t>
+            </a:r>
+          </a:p>
+          <a:p>
+            <a:pPr>
+              <a:spcBef>
+                <a:spcPts val="1400"/>
+              </a:spcBef>
+            </a:pPr>
+            <a:r>
+              <a:rPr sz="1450">
+                <a:solidFill>
+                  <a:srgbClr val="55111A"/>
+                </a:solidFill>
+              </a:rPr>
+              <a:t>•  Schema changes break rules silently</a:t>
+            </a:r>
+          </a:p>
+          <a:p>
+            <a:pPr>
+              <a:spcBef>
+                <a:spcPts val="1400"/>
+              </a:spcBef>
+            </a:pPr>
+            <a:r>
+              <a:rPr sz="1450">
+                <a:solidFill>
+                  <a:srgbClr val="55111A"/>
+                </a:solidFill>
+              </a:rPr>
+              <a:t>•  No visibility into rule effectiveness</a:t>
+            </a:r>
+          </a:p>
+        </p:txBody>
+      </p:sp>
+      <p:sp>
+        <p:nvSpPr>
+          <p:cNvPr id="9" name="TextBox 8"/>
+          <p:cNvSpPr txBox="1"/>
+          <p:nvPr/>
+        </p:nvSpPr>
+        <p:spPr>
+          <a:xfrm>
+            <a:off x="5669280" y="3200400"/>
+            <a:ext cx="822960" cy="640080"/>
+          </a:xfrm>
+          <a:prstGeom prst="rect">
+            <a:avLst/>
+          </a:prstGeom>
+          <a:noFill/>
+        </p:spPr>
+        <p:txBody>
+          <a:bodyPr wrap="square">
+            <a:spAutoFit/>
+          </a:bodyPr>
+          <a:lstStyle/>
+          <a:p>
+            <a:pPr algn="ctr"/>
+            <a:r>
+              <a:rPr sz="3800" b="1" i="0">
+                <a:solidFill>
+                  <a:srgbClr val="0F3460"/>
+                </a:solidFill>
+              </a:rPr>
+              <a:t>→</a:t>
+            </a:r>
+          </a:p>
+        </p:txBody>
+      </p:sp>
+      <p:sp>
+        <p:nvSpPr>
+          <p:cNvPr id="10" name="TextBox 9"/>
+          <p:cNvSpPr txBox="1"/>
+          <p:nvPr/>
+        </p:nvSpPr>
+        <p:spPr>
+          <a:xfrm>
+            <a:off x="5577840" y="3858768"/>
+            <a:ext cx="1005840" cy="640080"/>
+          </a:xfrm>
+          <a:prstGeom prst="rect">
+            <a:avLst/>
+          </a:prstGeom>
+          <a:noFill/>
+        </p:spPr>
+        <p:txBody>
+          <a:bodyPr wrap="square">
+            <a:spAutoFit/>
+          </a:bodyPr>
+          <a:lstStyle/>
+          <a:p>
+            <a:pPr algn="ctr"/>
+            <a:r>
+              <a:rPr sz="1100" b="1" i="0">
+                <a:solidFill>
+                  <a:srgbClr val="0F3460"/>
+                </a:solidFill>
+              </a:rPr>
+              <a:t>AI
+Infusion</a:t>
+            </a:r>
+          </a:p>
+        </p:txBody>
+      </p:sp>
+      <p:sp>
+        <p:nvSpPr>
+          <p:cNvPr id="11" name="Rectangle 10"/>
+          <p:cNvSpPr/>
+          <p:nvPr/>
+        </p:nvSpPr>
+        <p:spPr>
+          <a:xfrm>
+            <a:off x="6675120" y="1508760"/>
+            <a:ext cx="5074920" cy="4434840"/>
+          </a:xfrm>
+          <a:prstGeom prst="rect">
+            <a:avLst/>
+          </a:prstGeom>
+          <a:solidFill>
+            <a:srgbClr val="E8F0FE"/>
+          </a:solidFill>
+          <a:ln w="22860">
+            <a:solidFill>
+              <a:srgbClr val="0F3460"/>
+            </a:solidFill>
+          </a:ln>
+        </p:spPr>
+        <p:style>
+          <a:lnRef idx="1">
+            <a:schemeClr val="accent1"/>
+          </a:lnRef>
+          <a:fillRef idx="3">
+            <a:schemeClr val="accent1"/>
+          </a:fillRef>
+          <a:effectRef idx="2">
+            <a:schemeClr val="accent1"/>
+          </a:effectRef>
+          <a:fontRef idx="minor">
+            <a:schemeClr val="lt1"/>
+          </a:fontRef>
+        </p:style>
+        <p:txBody>
+          <a:bodyPr rtlCol="0" anchor="ctr"/>
+          <a:lstStyle/>
+          <a:p>
+            <a:pPr algn="ctr"/>
+          </a:p>
+        </p:txBody>
+      </p:sp>
+      <p:sp>
+        <p:nvSpPr>
+          <p:cNvPr id="12" name="TextBox 11"/>
+          <p:cNvSpPr txBox="1"/>
+          <p:nvPr/>
+        </p:nvSpPr>
+        <p:spPr>
+          <a:xfrm>
+            <a:off x="6675120" y="1600200"/>
+            <a:ext cx="5074920" cy="411480"/>
+          </a:xfrm>
+          <a:prstGeom prst="rect">
+            <a:avLst/>
+          </a:prstGeom>
+          <a:noFill/>
+        </p:spPr>
+        <p:txBody>
+          <a:bodyPr wrap="square">
+            <a:spAutoFit/>
+          </a:bodyPr>
+          <a:lstStyle/>
+          <a:p>
+            <a:pPr algn="ctr"/>
+            <a:r>
+              <a:rPr sz="1700" b="1" i="0">
+                <a:solidFill>
+                  <a:srgbClr val="0F3460"/>
+                </a:solidFill>
+              </a:rPr>
+              <a:t>TARGET</a:t>
+            </a:r>
+          </a:p>
+        </p:txBody>
+      </p:sp>
+      <p:sp>
+        <p:nvSpPr>
+          <p:cNvPr id="13" name="TextBox 12"/>
+          <p:cNvSpPr txBox="1"/>
+          <p:nvPr/>
+        </p:nvSpPr>
+        <p:spPr>
+          <a:xfrm>
+            <a:off x="6675120" y="2011680"/>
+            <a:ext cx="5074920" cy="292608"/>
+          </a:xfrm>
+          <a:prstGeom prst="rect">
+            <a:avLst/>
+          </a:prstGeom>
+          <a:noFill/>
+        </p:spPr>
+        <p:txBody>
+          <a:bodyPr wrap="square">
+            <a:spAutoFit/>
+          </a:bodyPr>
+          <a:lstStyle/>
+          <a:p>
+            <a:pPr algn="ctr"/>
+            <a:r>
+              <a:rPr sz="1150" b="0" i="1">
+                <a:solidFill>
+                  <a:srgbClr val="0F3460"/>
+                </a:solidFill>
+              </a:rPr>
+              <a:t>Proactive  ·  Adaptive  ·  Governed</a:t>
+            </a:r>
+          </a:p>
+        </p:txBody>
+      </p:sp>
+      <p:sp>
+        <p:nvSpPr>
+          <p:cNvPr id="14" name="Rectangle 13"/>
+          <p:cNvSpPr/>
+          <p:nvPr/>
+        </p:nvSpPr>
+        <p:spPr>
+          <a:xfrm>
+            <a:off x="6949440" y="2313432"/>
+            <a:ext cx="4526280" cy="12700"/>
+          </a:xfrm>
+          <a:prstGeom prst="rect">
+            <a:avLst/>
+          </a:prstGeom>
+          <a:solidFill>
+            <a:srgbClr val="0F3460"/>
+          </a:solidFill>
+          <a:ln>
+            <a:noFill/>
+          </a:ln>
+        </p:spPr>
+        <p:style>
+          <a:lnRef idx="1">
+            <a:schemeClr val="accent1"/>
+          </a:lnRef>
+          <a:fillRef idx="3">
+            <a:schemeClr val="accent1"/>
+          </a:fillRef>
+          <a:effectRef idx="2">
+            <a:schemeClr val="accent1"/>
+          </a:effectRef>
+          <a:fontRef idx="minor">
+            <a:schemeClr val="lt1"/>
+          </a:fontRef>
+        </p:style>
+        <p:txBody>
+          <a:bodyPr rtlCol="0" anchor="ctr"/>
+          <a:lstStyle/>
+          <a:p>
+            <a:pPr algn="ctr"/>
+          </a:p>
+        </p:txBody>
+      </p:sp>
+      <p:sp>
+        <p:nvSpPr>
+          <p:cNvPr id="15" name="TextBox 14"/>
+          <p:cNvSpPr txBox="1"/>
+          <p:nvPr/>
+        </p:nvSpPr>
+        <p:spPr>
+          <a:xfrm>
+            <a:off x="6876288" y="2468880"/>
+            <a:ext cx="4800600" cy="3200400"/>
+          </a:xfrm>
+          <a:prstGeom prst="rect">
+            <a:avLst/>
+          </a:prstGeom>
+          <a:noFill/>
+        </p:spPr>
+        <p:txBody>
+          <a:bodyPr wrap="square">
+            <a:spAutoFit/>
+          </a:bodyPr>
+          <a:lstStyle/>
+          <a:p>
+            <a:pPr>
+              <a:spcBef>
+                <a:spcPts val="1400"/>
+              </a:spcBef>
+            </a:pPr>
+            <a:r>
+              <a:rPr sz="1450">
+                <a:solidFill>
+                  <a:srgbClr val="0A2244"/>
+                </a:solidFill>
+              </a:rPr>
+              <a:t>•  AI analyses data and generates rules</a:t>
+            </a:r>
+          </a:p>
+          <a:p>
+            <a:pPr>
+              <a:spcBef>
+                <a:spcPts val="1400"/>
+              </a:spcBef>
+            </a:pPr>
+            <a:r>
+              <a:rPr sz="1450">
+                <a:solidFill>
+                  <a:srgbClr val="0A2244"/>
+                </a:solidFill>
+              </a:rPr>
+              <a:t>•  Rules suggested proactively from patterns</a:t>
+            </a:r>
+          </a:p>
+          <a:p>
+            <a:pPr>
+              <a:spcBef>
+                <a:spcPts val="1400"/>
+              </a:spcBef>
+            </a:pPr>
+            <a:r>
+              <a:rPr sz="1450">
+                <a:solidFill>
+                  <a:srgbClr val="0A2244"/>
+                </a:solidFill>
+              </a:rPr>
+              <a:t>•  Effectiveness tracked after every run</a:t>
+            </a:r>
+          </a:p>
+          <a:p>
+            <a:pPr>
+              <a:spcBef>
+                <a:spcPts val="1400"/>
+              </a:spcBef>
+            </a:pPr>
+            <a:r>
+              <a:rPr sz="1450">
+                <a:solidFill>
+                  <a:srgbClr val="0A2244"/>
+                </a:solidFill>
+              </a:rPr>
+              <a:t>•  Stale rules automatically detected</a:t>
+            </a:r>
+          </a:p>
+          <a:p>
+            <a:pPr>
+              <a:spcBef>
+                <a:spcPts val="1400"/>
+              </a:spcBef>
+            </a:pPr>
+            <a:r>
+              <a:rPr sz="1450">
+                <a:solidFill>
+                  <a:srgbClr val="0A2244"/>
+                </a:solidFill>
+              </a:rPr>
+              <a:t>•  Human governance at every approval step</a:t>
+            </a:r>
+          </a:p>
+        </p:txBody>
+      </p:sp>
+      <p:sp>
+        <p:nvSpPr>
+          <p:cNvPr id="16" name="Rectangle 15"/>
+          <p:cNvSpPr/>
+          <p:nvPr/>
+        </p:nvSpPr>
+        <p:spPr>
+          <a:xfrm>
+            <a:off x="411480" y="6080760"/>
+            <a:ext cx="11338560" cy="530352"/>
+          </a:xfrm>
+          <a:prstGeom prst="rect">
+            <a:avLst/>
+          </a:prstGeom>
+          <a:solidFill>
+            <a:srgbClr val="0F3460"/>
+          </a:solidFill>
+          <a:ln>
+            <a:noFill/>
+          </a:ln>
+        </p:spPr>
+        <p:style>
+          <a:lnRef idx="1">
+            <a:schemeClr val="accent1"/>
+          </a:lnRef>
+          <a:fillRef idx="3">
+            <a:schemeClr val="accent1"/>
+          </a:fillRef>
+          <a:effectRef idx="2">
+            <a:schemeClr val="accent1"/>
+          </a:effectRef>
+          <a:fontRef idx="minor">
+            <a:schemeClr val="lt1"/>
+          </a:fontRef>
+        </p:style>
+        <p:txBody>
+          <a:bodyPr rtlCol="0" anchor="ctr"/>
+          <a:lstStyle/>
+          <a:p>
+            <a:pPr algn="ctr"/>
+          </a:p>
+        </p:txBody>
+      </p:sp>
+      <p:sp>
+        <p:nvSpPr>
+          <p:cNvPr id="17" name="TextBox 16"/>
+          <p:cNvSpPr txBox="1"/>
+          <p:nvPr/>
+        </p:nvSpPr>
+        <p:spPr>
+          <a:xfrm>
+            <a:off x="411480" y="6108192"/>
+            <a:ext cx="11338560" cy="475488"/>
+          </a:xfrm>
+          <a:prstGeom prst="rect">
+            <a:avLst/>
+          </a:prstGeom>
+          <a:noFill/>
+        </p:spPr>
+        <p:txBody>
+          <a:bodyPr wrap="square">
+            <a:spAutoFit/>
+          </a:bodyPr>
+          <a:lstStyle/>
+          <a:p>
+            <a:pPr algn="ctr"/>
+            <a:r>
+              <a:rPr sz="1400" b="1" i="0">
+                <a:solidFill>
+                  <a:srgbClr val="FFFFFF"/>
+                </a:solidFill>
+              </a:rPr>
+              <a:t>Three shifts:   Batch → Real-time   ·   Manual → AI-Generated   ·   Static → Self-Improving</a:t>
             </a:r>
           </a:p>
         </p:txBody>
@@ -30807,14 +32595,14 @@
         </p:nvSpPr>
         <p:spPr>
           <a:xfrm>
-            <a:off x="548640" y="1508760"/>
-            <a:ext cx="11064240" cy="3749039"/>
-          </a:xfrm>
-          <a:prstGeom prst="rect">
-            <a:avLst/>
-          </a:prstGeom>
-          <a:solidFill>
-            <a:srgbClr val="1E1E2E"/>
+            <a:off x="2286000" y="1508760"/>
+            <a:ext cx="7589520" cy="384048"/>
+          </a:xfrm>
+          <a:prstGeom prst="rect">
+            <a:avLst/>
+          </a:prstGeom>
+          <a:solidFill>
+            <a:srgbClr val="0F3460"/>
           </a:solidFill>
           <a:ln>
             <a:noFill/>
@@ -30844,23 +32632,59 @@
       </p:sp>
       <p:sp>
         <p:nvSpPr>
-          <p:cNvPr id="5" name="Rectangle 4"/>
+          <p:cNvPr id="5" name="TextBox 4"/>
+          <p:cNvSpPr txBox="1"/>
+          <p:nvPr/>
+        </p:nvSpPr>
+        <p:spPr>
+          <a:xfrm>
+            <a:off x="2286000" y="1536192"/>
+            <a:ext cx="7589520" cy="347472"/>
+          </a:xfrm>
+          <a:prstGeom prst="rect">
+            <a:avLst/>
+          </a:prstGeom>
+          <a:noFill/>
+        </p:spPr>
+        <p:txBody>
+          <a:bodyPr wrap="square">
+            <a:spAutoFit/>
+          </a:bodyPr>
+          <a:lstStyle/>
+          <a:p>
+            <a:pPr algn="ctr"/>
+            <a:r>
+              <a:rPr sz="1200" b="1" i="0">
+                <a:solidFill>
+                  <a:srgbClr val="FFFFFF"/>
+                </a:solidFill>
+              </a:rPr>
+              <a:t>CONTINUOUS FEEDBACK LOOP</a:t>
+            </a:r>
+          </a:p>
+        </p:txBody>
+      </p:sp>
+      <p:sp>
+        <p:nvSpPr>
+          <p:cNvPr id="6" name="Rectangle 5"/>
           <p:cNvSpPr/>
           <p:nvPr/>
         </p:nvSpPr>
         <p:spPr>
           <a:xfrm>
-            <a:off x="548640" y="1508760"/>
-            <a:ext cx="50800" cy="3749039"/>
-          </a:xfrm>
-          <a:prstGeom prst="rect">
-            <a:avLst/>
-          </a:prstGeom>
-          <a:solidFill>
-            <a:srgbClr val="E94560"/>
-          </a:solidFill>
-          <a:ln>
-            <a:noFill/>
+            <a:off x="457200" y="2057400"/>
+            <a:ext cx="2286000" cy="566928"/>
+          </a:xfrm>
+          <a:prstGeom prst="rect">
+            <a:avLst/>
+          </a:prstGeom>
+          <a:solidFill>
+            <a:srgbClr val="E8F0FE"/>
+          </a:solidFill>
+          <a:ln w="15240">
+            <a:solidFill>
+              <a:srgbClr val="0F3460"/>
+            </a:solidFill>
           </a:ln>
         </p:spPr>
         <p:style>
@@ -30878,188 +32702,17 @@
           </a:fontRef>
         </p:style>
         <p:txBody>
-          <a:bodyPr rtlCol="0" anchor="ctr"/>
-          <a:lstStyle/>
-          <a:p>
-            <a:pPr algn="ctr"/>
-          </a:p>
-        </p:txBody>
-      </p:sp>
-      <p:sp>
-        <p:nvSpPr>
-          <p:cNvPr id="6" name="TextBox 5"/>
-          <p:cNvSpPr txBox="1"/>
-          <p:nvPr/>
-        </p:nvSpPr>
-        <p:spPr>
-          <a:xfrm>
-            <a:off x="658368" y="1600200"/>
-            <a:ext cx="10899648" cy="3566159"/>
-          </a:xfrm>
-          <a:prstGeom prst="rect">
-            <a:avLst/>
-          </a:prstGeom>
-          <a:noFill/>
-        </p:spPr>
-        <p:txBody>
-          <a:bodyPr wrap="none">
-            <a:spAutoFit/>
-          </a:bodyPr>
-          <a:lstStyle/>
-          <a:p>
-            <a:pPr algn="l"/>
-            <a:r>
-              <a:rPr sz="1100">
-                <a:solidFill>
-                  <a:srgbClr val="CDD6F4"/>
-                </a:solidFill>
-                <a:latin typeface="Courier New"/>
-              </a:rPr>
-              <a:t>┌────────────────────────────────────────────────────────────────────────┐</a:t>
-            </a:r>
-          </a:p>
-          <a:p>
-            <a:pPr algn="l"/>
-            <a:r>
-              <a:rPr sz="1100">
-                <a:solidFill>
-                  <a:srgbClr val="CDD6F4"/>
-                </a:solidFill>
-                <a:latin typeface="Courier New"/>
-              </a:rPr>
-              <a:t>│                       CONTINUOUS FEEDBACK LOOP                          │</a:t>
-            </a:r>
-          </a:p>
-          <a:p>
-            <a:pPr algn="l"/>
-            <a:r>
-              <a:rPr sz="1100">
-                <a:solidFill>
-                  <a:srgbClr val="CDD6F4"/>
-                </a:solidFill>
-                <a:latin typeface="Courier New"/>
-              </a:rPr>
-              <a:t>│                                                                          │</a:t>
-            </a:r>
-          </a:p>
-          <a:p>
-            <a:pPr algn="l"/>
-            <a:r>
-              <a:rPr sz="1100">
-                <a:solidFill>
-                  <a:srgbClr val="CDD6F4"/>
-                </a:solidFill>
-                <a:latin typeface="Courier New"/>
-              </a:rPr>
-              <a:t>│   Raw Data ──► DQ Validation ──► Quarantine Bad Records                 │</a:t>
-            </a:r>
-          </a:p>
-          <a:p>
-            <a:pPr algn="l"/>
-            <a:r>
-              <a:rPr sz="1100">
-                <a:solidFill>
-                  <a:srgbClr val="CDD6F4"/>
-                </a:solidFill>
-                <a:latin typeface="Courier New"/>
-              </a:rPr>
-              <a:t>│       ▲              │                     │                            │</a:t>
-            </a:r>
-          </a:p>
-          <a:p>
-            <a:pPr algn="l"/>
-            <a:r>
-              <a:rPr sz="1100">
-                <a:solidFill>
-                  <a:srgbClr val="CDD6F4"/>
-                </a:solidFill>
-                <a:latin typeface="Courier New"/>
-              </a:rPr>
-              <a:t>│       │              │                     ▼                            │</a:t>
-            </a:r>
-          </a:p>
-          <a:p>
-            <a:pPr algn="l"/>
-            <a:r>
-              <a:rPr sz="1100">
-                <a:solidFill>
-                  <a:srgbClr val="CDD6F4"/>
-                </a:solidFill>
-                <a:latin typeface="Courier New"/>
-              </a:rPr>
-              <a:t>│  Rules Registry ◄── AI Rule ◄── AI Analyses Patterns in bad records    │</a:t>
-            </a:r>
-          </a:p>
-          <a:p>
-            <a:pPr algn="l"/>
-            <a:r>
-              <a:rPr sz="1100">
-                <a:solidFill>
-                  <a:srgbClr val="CDD6F4"/>
-                </a:solidFill>
-                <a:latin typeface="Courier New"/>
-              </a:rPr>
-              <a:t>│  (promoted rules)   Suggester                                           │</a:t>
-            </a:r>
-          </a:p>
-          <a:p>
-            <a:pPr algn="l"/>
-            <a:r>
-              <a:rPr sz="1100">
-                <a:solidFill>
-                  <a:srgbClr val="CDD6F4"/>
-                </a:solidFill>
-                <a:latin typeface="Courier New"/>
-              </a:rPr>
-              <a:t>│       │                                    │                            │</a:t>
-            </a:r>
-          </a:p>
-          <a:p>
-            <a:pPr algn="l"/>
-            <a:r>
-              <a:rPr sz="1100">
-                <a:solidFill>
-                  <a:srgbClr val="CDD6F4"/>
-                </a:solidFill>
-                <a:latin typeface="Courier New"/>
-              </a:rPr>
-              <a:t>│       │             Rule Effectiveness ◄───┘                            │</a:t>
-            </a:r>
-          </a:p>
-          <a:p>
-            <a:pPr algn="l"/>
-            <a:r>
-              <a:rPr sz="1100">
-                <a:solidFill>
-                  <a:srgbClr val="CDD6F4"/>
-                </a:solidFill>
-                <a:latin typeface="Courier New"/>
-              </a:rPr>
-              <a:t>│       └─────────────  Dashboard                                         │</a:t>
-            </a:r>
-          </a:p>
-          <a:p>
-            <a:pPr algn="l"/>
-            <a:r>
-              <a:rPr sz="1100">
-                <a:solidFill>
-                  <a:srgbClr val="CDD6F4"/>
-                </a:solidFill>
-                <a:latin typeface="Courier New"/>
-              </a:rPr>
-              <a:t>│                    (which rules fire, which don't)                      │</a:t>
-            </a:r>
-          </a:p>
-          <a:p>
-            <a:pPr algn="l"/>
-            <a:r>
-              <a:rPr sz="1100">
-                <a:solidFill>
-                  <a:srgbClr val="CDD6F4"/>
-                </a:solidFill>
-                <a:latin typeface="Courier New"/>
-              </a:rPr>
-              <a:t>└────────────────────────────────────────────────────────────────────────┘</a:t>
+          <a:bodyPr rtlCol="0" anchor="ctr" wrap="square" tIns="164401"/>
+          <a:lstStyle/>
+          <a:p>
+            <a:pPr algn="ctr"/>
+            <a:r>
+              <a:rPr sz="1250" b="0">
+                <a:solidFill>
+                  <a:srgbClr val="0F3460"/>
+                </a:solidFill>
+              </a:rPr>
+              <a:t>Raw Data</a:t>
             </a:r>
           </a:p>
         </p:txBody>
@@ -31072,23 +32725,758 @@
         </p:nvSpPr>
         <p:spPr>
           <a:xfrm>
-            <a:off x="640080" y="5394960"/>
-            <a:ext cx="10972800" cy="640080"/>
-          </a:xfrm>
-          <a:prstGeom prst="rect">
-            <a:avLst/>
-          </a:prstGeom>
-          <a:noFill/>
-        </p:spPr>
-        <p:txBody>
-          <a:bodyPr wrap="square">
-            <a:spAutoFit/>
-          </a:bodyPr>
-          <a:lstStyle/>
-          <a:p>
-            <a:pPr algn="l"/>
-            <a:r>
-              <a:rPr sz="1700" b="1" i="1">
+            <a:off x="2834640" y="2148840"/>
+            <a:ext cx="411480" cy="457200"/>
+          </a:xfrm>
+          <a:prstGeom prst="rect">
+            <a:avLst/>
+          </a:prstGeom>
+          <a:noFill/>
+        </p:spPr>
+        <p:txBody>
+          <a:bodyPr wrap="square">
+            <a:spAutoFit/>
+          </a:bodyPr>
+          <a:lstStyle/>
+          <a:p>
+            <a:pPr algn="ctr"/>
+            <a:r>
+              <a:rPr sz="1800" b="1" i="0">
+                <a:solidFill>
+                  <a:srgbClr val="CCCCCC"/>
+                </a:solidFill>
+              </a:rPr>
+              <a:t>→</a:t>
+            </a:r>
+          </a:p>
+        </p:txBody>
+      </p:sp>
+      <p:sp>
+        <p:nvSpPr>
+          <p:cNvPr id="8" name="Rectangle 7"/>
+          <p:cNvSpPr/>
+          <p:nvPr/>
+        </p:nvSpPr>
+        <p:spPr>
+          <a:xfrm>
+            <a:off x="3291840" y="2057400"/>
+            <a:ext cx="2286000" cy="566928"/>
+          </a:xfrm>
+          <a:prstGeom prst="rect">
+            <a:avLst/>
+          </a:prstGeom>
+          <a:solidFill>
+            <a:srgbClr val="E8F0FE"/>
+          </a:solidFill>
+          <a:ln w="15240">
+            <a:solidFill>
+              <a:srgbClr val="0F3460"/>
+            </a:solidFill>
+          </a:ln>
+        </p:spPr>
+        <p:style>
+          <a:lnRef idx="1">
+            <a:schemeClr val="accent1"/>
+          </a:lnRef>
+          <a:fillRef idx="3">
+            <a:schemeClr val="accent1"/>
+          </a:fillRef>
+          <a:effectRef idx="2">
+            <a:schemeClr val="accent1"/>
+          </a:effectRef>
+          <a:fontRef idx="minor">
+            <a:schemeClr val="lt1"/>
+          </a:fontRef>
+        </p:style>
+        <p:txBody>
+          <a:bodyPr rtlCol="0" anchor="ctr" wrap="square" tIns="164401"/>
+          <a:lstStyle/>
+          <a:p>
+            <a:pPr algn="ctr"/>
+            <a:r>
+              <a:rPr sz="1250" b="1">
+                <a:solidFill>
+                  <a:srgbClr val="0F3460"/>
+                </a:solidFill>
+              </a:rPr>
+              <a:t>DQ Rule Engine</a:t>
+            </a:r>
+          </a:p>
+        </p:txBody>
+      </p:sp>
+      <p:sp>
+        <p:nvSpPr>
+          <p:cNvPr id="9" name="TextBox 8"/>
+          <p:cNvSpPr txBox="1"/>
+          <p:nvPr/>
+        </p:nvSpPr>
+        <p:spPr>
+          <a:xfrm>
+            <a:off x="5669280" y="2148840"/>
+            <a:ext cx="411480" cy="457200"/>
+          </a:xfrm>
+          <a:prstGeom prst="rect">
+            <a:avLst/>
+          </a:prstGeom>
+          <a:noFill/>
+        </p:spPr>
+        <p:txBody>
+          <a:bodyPr wrap="square">
+            <a:spAutoFit/>
+          </a:bodyPr>
+          <a:lstStyle/>
+          <a:p>
+            <a:pPr algn="ctr"/>
+            <a:r>
+              <a:rPr sz="1800" b="1" i="0">
+                <a:solidFill>
+                  <a:srgbClr val="CCCCCC"/>
+                </a:solidFill>
+              </a:rPr>
+              <a:t>→</a:t>
+            </a:r>
+          </a:p>
+        </p:txBody>
+      </p:sp>
+      <p:sp>
+        <p:nvSpPr>
+          <p:cNvPr id="10" name="Rectangle 9"/>
+          <p:cNvSpPr/>
+          <p:nvPr/>
+        </p:nvSpPr>
+        <p:spPr>
+          <a:xfrm>
+            <a:off x="6172200" y="2057400"/>
+            <a:ext cx="2286000" cy="566928"/>
+          </a:xfrm>
+          <a:prstGeom prst="rect">
+            <a:avLst/>
+          </a:prstGeom>
+          <a:solidFill>
+            <a:srgbClr val="E6F4EA"/>
+          </a:solidFill>
+          <a:ln w="15240">
+            <a:solidFill>
+              <a:srgbClr val="1E7E34"/>
+            </a:solidFill>
+          </a:ln>
+        </p:spPr>
+        <p:style>
+          <a:lnRef idx="1">
+            <a:schemeClr val="accent1"/>
+          </a:lnRef>
+          <a:fillRef idx="3">
+            <a:schemeClr val="accent1"/>
+          </a:fillRef>
+          <a:effectRef idx="2">
+            <a:schemeClr val="accent1"/>
+          </a:effectRef>
+          <a:fontRef idx="minor">
+            <a:schemeClr val="lt1"/>
+          </a:fontRef>
+        </p:style>
+        <p:txBody>
+          <a:bodyPr rtlCol="0" anchor="ctr" wrap="square" tIns="173926"/>
+          <a:lstStyle/>
+          <a:p>
+            <a:pPr algn="ctr"/>
+            <a:r>
+              <a:rPr sz="1150" b="0">
+                <a:solidFill>
+                  <a:srgbClr val="1E7E34"/>
+                </a:solidFill>
+              </a:rPr>
+              <a:t>✓  Clean Records
+(analytics-ready)</a:t>
+            </a:r>
+          </a:p>
+        </p:txBody>
+      </p:sp>
+      <p:sp>
+        <p:nvSpPr>
+          <p:cNvPr id="11" name="TextBox 10"/>
+          <p:cNvSpPr txBox="1"/>
+          <p:nvPr/>
+        </p:nvSpPr>
+        <p:spPr>
+          <a:xfrm>
+            <a:off x="4133087" y="2670048"/>
+            <a:ext cx="320040" cy="384048"/>
+          </a:xfrm>
+          <a:prstGeom prst="rect">
+            <a:avLst/>
+          </a:prstGeom>
+          <a:noFill/>
+        </p:spPr>
+        <p:txBody>
+          <a:bodyPr wrap="square">
+            <a:spAutoFit/>
+          </a:bodyPr>
+          <a:lstStyle/>
+          <a:p>
+            <a:pPr algn="ctr"/>
+            <a:r>
+              <a:rPr sz="1800" b="1" i="0">
+                <a:solidFill>
+                  <a:srgbClr val="CCCCCC"/>
+                </a:solidFill>
+              </a:rPr>
+              <a:t>↓</a:t>
+            </a:r>
+          </a:p>
+        </p:txBody>
+      </p:sp>
+      <p:sp>
+        <p:nvSpPr>
+          <p:cNvPr id="12" name="Rectangle 11"/>
+          <p:cNvSpPr/>
+          <p:nvPr/>
+        </p:nvSpPr>
+        <p:spPr>
+          <a:xfrm>
+            <a:off x="3291840" y="3136392"/>
+            <a:ext cx="2286000" cy="566928"/>
+          </a:xfrm>
+          <a:prstGeom prst="rect">
+            <a:avLst/>
+          </a:prstGeom>
+          <a:solidFill>
+            <a:srgbClr val="FFEDED"/>
+          </a:solidFill>
+          <a:ln w="15240">
+            <a:solidFill>
+              <a:srgbClr val="E94560"/>
+            </a:solidFill>
+          </a:ln>
+        </p:spPr>
+        <p:style>
+          <a:lnRef idx="1">
+            <a:schemeClr val="accent1"/>
+          </a:lnRef>
+          <a:fillRef idx="3">
+            <a:schemeClr val="accent1"/>
+          </a:fillRef>
+          <a:effectRef idx="2">
+            <a:schemeClr val="accent1"/>
+          </a:effectRef>
+          <a:fontRef idx="minor">
+            <a:schemeClr val="lt1"/>
+          </a:fontRef>
+        </p:style>
+        <p:txBody>
+          <a:bodyPr rtlCol="0" anchor="ctr" wrap="square" tIns="173926"/>
+          <a:lstStyle/>
+          <a:p>
+            <a:pPr algn="ctr"/>
+            <a:r>
+              <a:rPr sz="1150" b="0">
+                <a:solidFill>
+                  <a:srgbClr val="E94560"/>
+                </a:solidFill>
+              </a:rPr>
+              <a:t>✗  Quarantine Records
+(rule violations)</a:t>
+            </a:r>
+          </a:p>
+        </p:txBody>
+      </p:sp>
+      <p:sp>
+        <p:nvSpPr>
+          <p:cNvPr id="13" name="TextBox 12"/>
+          <p:cNvSpPr txBox="1"/>
+          <p:nvPr/>
+        </p:nvSpPr>
+        <p:spPr>
+          <a:xfrm>
+            <a:off x="5669280" y="3227832"/>
+            <a:ext cx="411480" cy="457200"/>
+          </a:xfrm>
+          <a:prstGeom prst="rect">
+            <a:avLst/>
+          </a:prstGeom>
+          <a:noFill/>
+        </p:spPr>
+        <p:txBody>
+          <a:bodyPr wrap="square">
+            <a:spAutoFit/>
+          </a:bodyPr>
+          <a:lstStyle/>
+          <a:p>
+            <a:pPr algn="ctr"/>
+            <a:r>
+              <a:rPr sz="1800" b="1" i="0">
+                <a:solidFill>
+                  <a:srgbClr val="CCCCCC"/>
+                </a:solidFill>
+              </a:rPr>
+              <a:t>→</a:t>
+            </a:r>
+          </a:p>
+        </p:txBody>
+      </p:sp>
+      <p:sp>
+        <p:nvSpPr>
+          <p:cNvPr id="14" name="Rectangle 13"/>
+          <p:cNvSpPr/>
+          <p:nvPr/>
+        </p:nvSpPr>
+        <p:spPr>
+          <a:xfrm>
+            <a:off x="6172200" y="3136392"/>
+            <a:ext cx="2286000" cy="566928"/>
+          </a:xfrm>
+          <a:prstGeom prst="rect">
+            <a:avLst/>
+          </a:prstGeom>
+          <a:solidFill>
+            <a:srgbClr val="E4F6F1"/>
+          </a:solidFill>
+          <a:ln w="15240">
+            <a:solidFill>
+              <a:srgbClr val="0B8A6A"/>
+            </a:solidFill>
+          </a:ln>
+        </p:spPr>
+        <p:style>
+          <a:lnRef idx="1">
+            <a:schemeClr val="accent1"/>
+          </a:lnRef>
+          <a:fillRef idx="3">
+            <a:schemeClr val="accent1"/>
+          </a:fillRef>
+          <a:effectRef idx="2">
+            <a:schemeClr val="accent1"/>
+          </a:effectRef>
+          <a:fontRef idx="minor">
+            <a:schemeClr val="lt1"/>
+          </a:fontRef>
+        </p:style>
+        <p:txBody>
+          <a:bodyPr rtlCol="0" anchor="ctr" wrap="square" tIns="164401"/>
+          <a:lstStyle/>
+          <a:p>
+            <a:pPr algn="ctr"/>
+            <a:r>
+              <a:rPr sz="1250" b="0">
+                <a:solidFill>
+                  <a:srgbClr val="0B8A6A"/>
+                </a:solidFill>
+              </a:rPr>
+              <a:t>AI Analyses Patterns</a:t>
+            </a:r>
+          </a:p>
+        </p:txBody>
+      </p:sp>
+      <p:sp>
+        <p:nvSpPr>
+          <p:cNvPr id="15" name="TextBox 14"/>
+          <p:cNvSpPr txBox="1"/>
+          <p:nvPr/>
+        </p:nvSpPr>
+        <p:spPr>
+          <a:xfrm>
+            <a:off x="4133087" y="3749039"/>
+            <a:ext cx="320040" cy="384048"/>
+          </a:xfrm>
+          <a:prstGeom prst="rect">
+            <a:avLst/>
+          </a:prstGeom>
+          <a:noFill/>
+        </p:spPr>
+        <p:txBody>
+          <a:bodyPr wrap="square">
+            <a:spAutoFit/>
+          </a:bodyPr>
+          <a:lstStyle/>
+          <a:p>
+            <a:pPr algn="ctr"/>
+            <a:r>
+              <a:rPr sz="1800" b="1" i="0">
+                <a:solidFill>
+                  <a:srgbClr val="CCCCCC"/>
+                </a:solidFill>
+              </a:rPr>
+              <a:t>↓</a:t>
+            </a:r>
+          </a:p>
+        </p:txBody>
+      </p:sp>
+      <p:sp>
+        <p:nvSpPr>
+          <p:cNvPr id="16" name="TextBox 15"/>
+          <p:cNvSpPr txBox="1"/>
+          <p:nvPr/>
+        </p:nvSpPr>
+        <p:spPr>
+          <a:xfrm>
+            <a:off x="7296912" y="3749039"/>
+            <a:ext cx="320040" cy="384048"/>
+          </a:xfrm>
+          <a:prstGeom prst="rect">
+            <a:avLst/>
+          </a:prstGeom>
+          <a:noFill/>
+        </p:spPr>
+        <p:txBody>
+          <a:bodyPr wrap="square">
+            <a:spAutoFit/>
+          </a:bodyPr>
+          <a:lstStyle/>
+          <a:p>
+            <a:pPr algn="ctr"/>
+            <a:r>
+              <a:rPr sz="1800" b="1" i="0">
+                <a:solidFill>
+                  <a:srgbClr val="CCCCCC"/>
+                </a:solidFill>
+              </a:rPr>
+              <a:t>↓</a:t>
+            </a:r>
+          </a:p>
+        </p:txBody>
+      </p:sp>
+      <p:sp>
+        <p:nvSpPr>
+          <p:cNvPr id="17" name="Rectangle 16"/>
+          <p:cNvSpPr/>
+          <p:nvPr/>
+        </p:nvSpPr>
+        <p:spPr>
+          <a:xfrm>
+            <a:off x="457200" y="4224528"/>
+            <a:ext cx="2286000" cy="566928"/>
+          </a:xfrm>
+          <a:prstGeom prst="rect">
+            <a:avLst/>
+          </a:prstGeom>
+          <a:solidFill>
+            <a:srgbClr val="E6F4EA"/>
+          </a:solidFill>
+          <a:ln w="15240">
+            <a:solidFill>
+              <a:srgbClr val="1E7E34"/>
+            </a:solidFill>
+          </a:ln>
+        </p:spPr>
+        <p:style>
+          <a:lnRef idx="1">
+            <a:schemeClr val="accent1"/>
+          </a:lnRef>
+          <a:fillRef idx="3">
+            <a:schemeClr val="accent1"/>
+          </a:fillRef>
+          <a:effectRef idx="2">
+            <a:schemeClr val="accent1"/>
+          </a:effectRef>
+          <a:fontRef idx="minor">
+            <a:schemeClr val="lt1"/>
+          </a:fontRef>
+        </p:style>
+        <p:txBody>
+          <a:bodyPr rtlCol="0" anchor="ctr" wrap="square" tIns="173926"/>
+          <a:lstStyle/>
+          <a:p>
+            <a:pPr algn="ctr"/>
+            <a:r>
+              <a:rPr sz="1150" b="0">
+                <a:solidFill>
+                  <a:srgbClr val="1E7E34"/>
+                </a:solidFill>
+              </a:rPr>
+              <a:t>dq_rules_registry
+(active rules)</a:t>
+            </a:r>
+          </a:p>
+        </p:txBody>
+      </p:sp>
+      <p:sp>
+        <p:nvSpPr>
+          <p:cNvPr id="18" name="TextBox 17"/>
+          <p:cNvSpPr txBox="1"/>
+          <p:nvPr/>
+        </p:nvSpPr>
+        <p:spPr>
+          <a:xfrm>
+            <a:off x="2834640" y="4315968"/>
+            <a:ext cx="411480" cy="457200"/>
+          </a:xfrm>
+          <a:prstGeom prst="rect">
+            <a:avLst/>
+          </a:prstGeom>
+          <a:noFill/>
+        </p:spPr>
+        <p:txBody>
+          <a:bodyPr wrap="square">
+            <a:spAutoFit/>
+          </a:bodyPr>
+          <a:lstStyle/>
+          <a:p>
+            <a:pPr algn="ctr"/>
+            <a:r>
+              <a:rPr sz="1800" b="1" i="0">
+                <a:solidFill>
+                  <a:srgbClr val="CCCCCC"/>
+                </a:solidFill>
+              </a:rPr>
+              <a:t>←</a:t>
+            </a:r>
+          </a:p>
+        </p:txBody>
+      </p:sp>
+      <p:sp>
+        <p:nvSpPr>
+          <p:cNvPr id="19" name="Rectangle 18"/>
+          <p:cNvSpPr/>
+          <p:nvPr/>
+        </p:nvSpPr>
+        <p:spPr>
+          <a:xfrm>
+            <a:off x="3291840" y="4224528"/>
+            <a:ext cx="2286000" cy="566928"/>
+          </a:xfrm>
+          <a:prstGeom prst="rect">
+            <a:avLst/>
+          </a:prstGeom>
+          <a:solidFill>
+            <a:srgbClr val="FFF3E0"/>
+          </a:solidFill>
+          <a:ln w="15240">
+            <a:solidFill>
+              <a:srgbClr val="E65C00"/>
+            </a:solidFill>
+          </a:ln>
+        </p:spPr>
+        <p:style>
+          <a:lnRef idx="1">
+            <a:schemeClr val="accent1"/>
+          </a:lnRef>
+          <a:fillRef idx="3">
+            <a:schemeClr val="accent1"/>
+          </a:fillRef>
+          <a:effectRef idx="2">
+            <a:schemeClr val="accent1"/>
+          </a:effectRef>
+          <a:fontRef idx="minor">
+            <a:schemeClr val="lt1"/>
+          </a:fontRef>
+        </p:style>
+        <p:txBody>
+          <a:bodyPr rtlCol="0" anchor="ctr" wrap="square" tIns="173926"/>
+          <a:lstStyle/>
+          <a:p>
+            <a:pPr algn="ctr"/>
+            <a:r>
+              <a:rPr sz="1150" b="0">
+                <a:solidFill>
+                  <a:srgbClr val="E65C00"/>
+                </a:solidFill>
+              </a:rPr>
+              <a:t>Human Review
+(approve / reject)</a:t>
+            </a:r>
+          </a:p>
+        </p:txBody>
+      </p:sp>
+      <p:sp>
+        <p:nvSpPr>
+          <p:cNvPr id="20" name="TextBox 19"/>
+          <p:cNvSpPr txBox="1"/>
+          <p:nvPr/>
+        </p:nvSpPr>
+        <p:spPr>
+          <a:xfrm>
+            <a:off x="5669280" y="4315968"/>
+            <a:ext cx="411480" cy="457200"/>
+          </a:xfrm>
+          <a:prstGeom prst="rect">
+            <a:avLst/>
+          </a:prstGeom>
+          <a:noFill/>
+        </p:spPr>
+        <p:txBody>
+          <a:bodyPr wrap="square">
+            <a:spAutoFit/>
+          </a:bodyPr>
+          <a:lstStyle/>
+          <a:p>
+            <a:pPr algn="ctr"/>
+            <a:r>
+              <a:rPr sz="1800" b="1" i="0">
+                <a:solidFill>
+                  <a:srgbClr val="CCCCCC"/>
+                </a:solidFill>
+              </a:rPr>
+              <a:t>←</a:t>
+            </a:r>
+          </a:p>
+        </p:txBody>
+      </p:sp>
+      <p:sp>
+        <p:nvSpPr>
+          <p:cNvPr id="21" name="Rectangle 20"/>
+          <p:cNvSpPr/>
+          <p:nvPr/>
+        </p:nvSpPr>
+        <p:spPr>
+          <a:xfrm>
+            <a:off x="6172200" y="4224528"/>
+            <a:ext cx="2286000" cy="566928"/>
+          </a:xfrm>
+          <a:prstGeom prst="rect">
+            <a:avLst/>
+          </a:prstGeom>
+          <a:solidFill>
+            <a:srgbClr val="E4F6F1"/>
+          </a:solidFill>
+          <a:ln w="15240">
+            <a:solidFill>
+              <a:srgbClr val="0B8A6A"/>
+            </a:solidFill>
+          </a:ln>
+        </p:spPr>
+        <p:style>
+          <a:lnRef idx="1">
+            <a:schemeClr val="accent1"/>
+          </a:lnRef>
+          <a:fillRef idx="3">
+            <a:schemeClr val="accent1"/>
+          </a:fillRef>
+          <a:effectRef idx="2">
+            <a:schemeClr val="accent1"/>
+          </a:effectRef>
+          <a:fontRef idx="minor">
+            <a:schemeClr val="lt1"/>
+          </a:fontRef>
+        </p:style>
+        <p:txBody>
+          <a:bodyPr rtlCol="0" anchor="ctr" wrap="square" tIns="164401"/>
+          <a:lstStyle/>
+          <a:p>
+            <a:pPr algn="ctr"/>
+            <a:r>
+              <a:rPr sz="1250" b="0">
+                <a:solidFill>
+                  <a:srgbClr val="0B8A6A"/>
+                </a:solidFill>
+              </a:rPr>
+              <a:t>AI Rule Suggester</a:t>
+            </a:r>
+          </a:p>
+        </p:txBody>
+      </p:sp>
+      <p:sp>
+        <p:nvSpPr>
+          <p:cNvPr id="22" name="Rectangle 21"/>
+          <p:cNvSpPr/>
+          <p:nvPr/>
+        </p:nvSpPr>
+        <p:spPr>
+          <a:xfrm>
+            <a:off x="6172200" y="4974336"/>
+            <a:ext cx="2286000" cy="566928"/>
+          </a:xfrm>
+          <a:prstGeom prst="rect">
+            <a:avLst/>
+          </a:prstGeom>
+          <a:solidFill>
+            <a:srgbClr val="E8F0FE"/>
+          </a:solidFill>
+          <a:ln w="15240">
+            <a:solidFill>
+              <a:srgbClr val="0F3460"/>
+            </a:solidFill>
+          </a:ln>
+        </p:spPr>
+        <p:style>
+          <a:lnRef idx="1">
+            <a:schemeClr val="accent1"/>
+          </a:lnRef>
+          <a:fillRef idx="3">
+            <a:schemeClr val="accent1"/>
+          </a:fillRef>
+          <a:effectRef idx="2">
+            <a:schemeClr val="accent1"/>
+          </a:effectRef>
+          <a:fontRef idx="minor">
+            <a:schemeClr val="lt1"/>
+          </a:fontRef>
+        </p:style>
+        <p:txBody>
+          <a:bodyPr rtlCol="0" anchor="ctr" wrap="square" tIns="173926"/>
+          <a:lstStyle/>
+          <a:p>
+            <a:pPr algn="ctr"/>
+            <a:r>
+              <a:rPr sz="1150" b="0">
+                <a:solidFill>
+                  <a:srgbClr val="0F3460"/>
+                </a:solidFill>
+              </a:rPr>
+              <a:t>Rule Effectiveness
+Dashboard</a:t>
+            </a:r>
+          </a:p>
+        </p:txBody>
+      </p:sp>
+      <p:sp>
+        <p:nvSpPr>
+          <p:cNvPr id="23" name="TextBox 22"/>
+          <p:cNvSpPr txBox="1"/>
+          <p:nvPr/>
+        </p:nvSpPr>
+        <p:spPr>
+          <a:xfrm>
+            <a:off x="457200" y="4846320"/>
+            <a:ext cx="2286000" cy="502920"/>
+          </a:xfrm>
+          <a:prstGeom prst="rect">
+            <a:avLst/>
+          </a:prstGeom>
+          <a:noFill/>
+        </p:spPr>
+        <p:txBody>
+          <a:bodyPr wrap="square">
+            <a:spAutoFit/>
+          </a:bodyPr>
+          <a:lstStyle/>
+          <a:p>
+            <a:pPr algn="l"/>
+            <a:r>
+              <a:rPr sz="950" b="0" i="1">
+                <a:solidFill>
+                  <a:srgbClr val="333333"/>
+                </a:solidFill>
+              </a:rPr>
+              <a:t>↑  rules updated → better validation on next run</a:t>
+            </a:r>
+          </a:p>
+        </p:txBody>
+      </p:sp>
+      <p:sp>
+        <p:nvSpPr>
+          <p:cNvPr id="24" name="TextBox 23"/>
+          <p:cNvSpPr txBox="1"/>
+          <p:nvPr/>
+        </p:nvSpPr>
+        <p:spPr>
+          <a:xfrm>
+            <a:off x="457200" y="6446520"/>
+            <a:ext cx="11247120" cy="292608"/>
+          </a:xfrm>
+          <a:prstGeom prst="rect">
+            <a:avLst/>
+          </a:prstGeom>
+          <a:noFill/>
+        </p:spPr>
+        <p:txBody>
+          <a:bodyPr wrap="square">
+            <a:spAutoFit/>
+          </a:bodyPr>
+          <a:lstStyle/>
+          <a:p>
+            <a:pPr algn="ctr"/>
+            <a:r>
+              <a:rPr sz="1350" b="1" i="1">
                 <a:solidFill>
                   <a:srgbClr val="0F3460"/>
                 </a:solidFill>

--- a/AI_Infusion_Delivery_Assessment.pptx
+++ b/AI_Infusion_Delivery_Assessment.pptx
@@ -3437,7 +3437,7 @@
                   <a:srgbClr val="0F3460"/>
                 </a:solidFill>
               </a:rPr>
-              <a:t>POC Overview — Five Working Phases</a:t>
+              <a:t>POC Overview — Five Phases plus Stage A</a:t>
             </a:r>
           </a:p>
         </p:txBody>
@@ -5341,14 +5341,14 @@
         </p:nvSpPr>
         <p:spPr>
           <a:xfrm>
-            <a:off x="457200" y="5074920"/>
-            <a:ext cx="11247120" cy="1280160"/>
-          </a:xfrm>
-          <a:prstGeom prst="rect">
-            <a:avLst/>
-          </a:prstGeom>
-          <a:solidFill>
-            <a:srgbClr val="F7F9FC"/>
+            <a:off x="457200" y="3630168"/>
+            <a:ext cx="457200" cy="347472"/>
+          </a:xfrm>
+          <a:prstGeom prst="rect">
+            <a:avLst/>
+          </a:prstGeom>
+          <a:solidFill>
+            <a:srgbClr val="FFFFFF"/>
           </a:solidFill>
           <a:ln>
             <a:noFill/>
@@ -5378,20 +5378,54 @@
       </p:sp>
       <p:sp>
         <p:nvSpPr>
-          <p:cNvPr id="53" name="Rectangle 52"/>
-          <p:cNvSpPr/>
-          <p:nvPr/>
-        </p:nvSpPr>
-        <p:spPr>
-          <a:xfrm>
-            <a:off x="457200" y="5074920"/>
-            <a:ext cx="63500" cy="1280160"/>
-          </a:xfrm>
-          <a:prstGeom prst="rect">
-            <a:avLst/>
-          </a:prstGeom>
-          <a:solidFill>
-            <a:srgbClr val="E94560"/>
+          <p:cNvPr id="53" name="TextBox 52"/>
+          <p:cNvSpPr txBox="1"/>
+          <p:nvPr/>
+        </p:nvSpPr>
+        <p:spPr>
+          <a:xfrm>
+            <a:off x="502920" y="3668268"/>
+            <a:ext cx="365760" cy="347472"/>
+          </a:xfrm>
+          <a:prstGeom prst="rect">
+            <a:avLst/>
+          </a:prstGeom>
+          <a:noFill/>
+        </p:spPr>
+        <p:txBody>
+          <a:bodyPr wrap="square">
+            <a:spAutoFit/>
+          </a:bodyPr>
+          <a:lstStyle/>
+          <a:p>
+            <a:pPr algn="l"/>
+            <a:r>
+              <a:rPr sz="1300" b="0" i="0">
+                <a:solidFill>
+                  <a:srgbClr val="333333"/>
+                </a:solidFill>
+              </a:rPr>
+              <a:t>A</a:t>
+            </a:r>
+          </a:p>
+        </p:txBody>
+      </p:sp>
+      <p:sp>
+        <p:nvSpPr>
+          <p:cNvPr id="54" name="Rectangle 53"/>
+          <p:cNvSpPr/>
+          <p:nvPr/>
+        </p:nvSpPr>
+        <p:spPr>
+          <a:xfrm>
+            <a:off x="914400" y="3630168"/>
+            <a:ext cx="2377440" cy="347472"/>
+          </a:xfrm>
+          <a:prstGeom prst="rect">
+            <a:avLst/>
+          </a:prstGeom>
+          <a:solidFill>
+            <a:srgbClr val="FFFFFF"/>
           </a:solidFill>
           <a:ln>
             <a:noFill/>
@@ -5421,14 +5455,288 @@
       </p:sp>
       <p:sp>
         <p:nvSpPr>
-          <p:cNvPr id="54" name="TextBox 53"/>
-          <p:cNvSpPr txBox="1"/>
-          <p:nvPr/>
-        </p:nvSpPr>
-        <p:spPr>
-          <a:xfrm>
-            <a:off x="685800" y="5166360"/>
-            <a:ext cx="10881360" cy="1097280"/>
+          <p:cNvPr id="55" name="TextBox 54"/>
+          <p:cNvSpPr txBox="1"/>
+          <p:nvPr/>
+        </p:nvSpPr>
+        <p:spPr>
+          <a:xfrm>
+            <a:off x="960120" y="3668268"/>
+            <a:ext cx="2286000" cy="347472"/>
+          </a:xfrm>
+          <a:prstGeom prst="rect">
+            <a:avLst/>
+          </a:prstGeom>
+          <a:noFill/>
+        </p:spPr>
+        <p:txBody>
+          <a:bodyPr wrap="square">
+            <a:spAutoFit/>
+          </a:bodyPr>
+          <a:lstStyle/>
+          <a:p>
+            <a:pPr algn="l"/>
+            <a:r>
+              <a:rPr sz="1300" b="0" i="0">
+                <a:solidFill>
+                  <a:srgbClr val="333333"/>
+                </a:solidFill>
+              </a:rPr>
+              <a:t>Automated Alerting</a:t>
+            </a:r>
+          </a:p>
+        </p:txBody>
+      </p:sp>
+      <p:sp>
+        <p:nvSpPr>
+          <p:cNvPr id="56" name="Rectangle 55"/>
+          <p:cNvSpPr/>
+          <p:nvPr/>
+        </p:nvSpPr>
+        <p:spPr>
+          <a:xfrm>
+            <a:off x="3291840" y="3630168"/>
+            <a:ext cx="6035040" cy="347472"/>
+          </a:xfrm>
+          <a:prstGeom prst="rect">
+            <a:avLst/>
+          </a:prstGeom>
+          <a:solidFill>
+            <a:srgbClr val="FFFFFF"/>
+          </a:solidFill>
+          <a:ln>
+            <a:noFill/>
+          </a:ln>
+        </p:spPr>
+        <p:style>
+          <a:lnRef idx="1">
+            <a:schemeClr val="accent1"/>
+          </a:lnRef>
+          <a:fillRef idx="3">
+            <a:schemeClr val="accent1"/>
+          </a:fillRef>
+          <a:effectRef idx="2">
+            <a:schemeClr val="accent1"/>
+          </a:effectRef>
+          <a:fontRef idx="minor">
+            <a:schemeClr val="lt1"/>
+          </a:fontRef>
+        </p:style>
+        <p:txBody>
+          <a:bodyPr rtlCol="0" anchor="ctr"/>
+          <a:lstStyle/>
+          <a:p>
+            <a:pPr algn="ctr"/>
+          </a:p>
+        </p:txBody>
+      </p:sp>
+      <p:sp>
+        <p:nvSpPr>
+          <p:cNvPr id="57" name="TextBox 56"/>
+          <p:cNvSpPr txBox="1"/>
+          <p:nvPr/>
+        </p:nvSpPr>
+        <p:spPr>
+          <a:xfrm>
+            <a:off x="3337560" y="3668268"/>
+            <a:ext cx="5943600" cy="347472"/>
+          </a:xfrm>
+          <a:prstGeom prst="rect">
+            <a:avLst/>
+          </a:prstGeom>
+          <a:noFill/>
+        </p:spPr>
+        <p:txBody>
+          <a:bodyPr wrap="square">
+            <a:spAutoFit/>
+          </a:bodyPr>
+          <a:lstStyle/>
+          <a:p>
+            <a:pPr algn="l"/>
+            <a:r>
+              <a:rPr sz="1300" b="0" i="0">
+                <a:solidFill>
+                  <a:srgbClr val="333333"/>
+                </a:solidFill>
+              </a:rPr>
+              <a:t>Flags violation-rate spikes vs. each rule's own baseline; audit log</a:t>
+            </a:r>
+          </a:p>
+        </p:txBody>
+      </p:sp>
+      <p:sp>
+        <p:nvSpPr>
+          <p:cNvPr id="58" name="Rectangle 57"/>
+          <p:cNvSpPr/>
+          <p:nvPr/>
+        </p:nvSpPr>
+        <p:spPr>
+          <a:xfrm>
+            <a:off x="9326880" y="3630168"/>
+            <a:ext cx="2377440" cy="347472"/>
+          </a:xfrm>
+          <a:prstGeom prst="rect">
+            <a:avLst/>
+          </a:prstGeom>
+          <a:solidFill>
+            <a:srgbClr val="FFFFFF"/>
+          </a:solidFill>
+          <a:ln>
+            <a:noFill/>
+          </a:ln>
+        </p:spPr>
+        <p:style>
+          <a:lnRef idx="1">
+            <a:schemeClr val="accent1"/>
+          </a:lnRef>
+          <a:fillRef idx="3">
+            <a:schemeClr val="accent1"/>
+          </a:fillRef>
+          <a:effectRef idx="2">
+            <a:schemeClr val="accent1"/>
+          </a:effectRef>
+          <a:fontRef idx="minor">
+            <a:schemeClr val="lt1"/>
+          </a:fontRef>
+        </p:style>
+        <p:txBody>
+          <a:bodyPr rtlCol="0" anchor="ctr"/>
+          <a:lstStyle/>
+          <a:p>
+            <a:pPr algn="ctr"/>
+          </a:p>
+        </p:txBody>
+      </p:sp>
+      <p:sp>
+        <p:nvSpPr>
+          <p:cNvPr id="59" name="TextBox 58"/>
+          <p:cNvSpPr txBox="1"/>
+          <p:nvPr/>
+        </p:nvSpPr>
+        <p:spPr>
+          <a:xfrm>
+            <a:off x="9372600" y="3668268"/>
+            <a:ext cx="2286000" cy="347472"/>
+          </a:xfrm>
+          <a:prstGeom prst="rect">
+            <a:avLst/>
+          </a:prstGeom>
+          <a:noFill/>
+        </p:spPr>
+        <p:txBody>
+          <a:bodyPr wrap="square">
+            <a:spAutoFit/>
+          </a:bodyPr>
+          <a:lstStyle/>
+          <a:p>
+            <a:pPr algn="l"/>
+            <a:r>
+              <a:rPr sz="1300" b="0" i="0">
+                <a:solidFill>
+                  <a:srgbClr val="333333"/>
+                </a:solidFill>
+              </a:rPr>
+              <a:t>✅ Built — Slack pending</a:t>
+            </a:r>
+          </a:p>
+        </p:txBody>
+      </p:sp>
+      <p:sp>
+        <p:nvSpPr>
+          <p:cNvPr id="60" name="Rectangle 59"/>
+          <p:cNvSpPr/>
+          <p:nvPr/>
+        </p:nvSpPr>
+        <p:spPr>
+          <a:xfrm>
+            <a:off x="457200" y="5074920"/>
+            <a:ext cx="11247120" cy="1051560"/>
+          </a:xfrm>
+          <a:prstGeom prst="rect">
+            <a:avLst/>
+          </a:prstGeom>
+          <a:solidFill>
+            <a:srgbClr val="F7F9FC"/>
+          </a:solidFill>
+          <a:ln>
+            <a:noFill/>
+          </a:ln>
+        </p:spPr>
+        <p:style>
+          <a:lnRef idx="1">
+            <a:schemeClr val="accent1"/>
+          </a:lnRef>
+          <a:fillRef idx="3">
+            <a:schemeClr val="accent1"/>
+          </a:fillRef>
+          <a:effectRef idx="2">
+            <a:schemeClr val="accent1"/>
+          </a:effectRef>
+          <a:fontRef idx="minor">
+            <a:schemeClr val="lt1"/>
+          </a:fontRef>
+        </p:style>
+        <p:txBody>
+          <a:bodyPr rtlCol="0" anchor="ctr"/>
+          <a:lstStyle/>
+          <a:p>
+            <a:pPr algn="ctr"/>
+          </a:p>
+        </p:txBody>
+      </p:sp>
+      <p:sp>
+        <p:nvSpPr>
+          <p:cNvPr id="61" name="Rectangle 60"/>
+          <p:cNvSpPr/>
+          <p:nvPr/>
+        </p:nvSpPr>
+        <p:spPr>
+          <a:xfrm>
+            <a:off x="457200" y="5074920"/>
+            <a:ext cx="63500" cy="1051560"/>
+          </a:xfrm>
+          <a:prstGeom prst="rect">
+            <a:avLst/>
+          </a:prstGeom>
+          <a:solidFill>
+            <a:srgbClr val="E94560"/>
+          </a:solidFill>
+          <a:ln>
+            <a:noFill/>
+          </a:ln>
+        </p:spPr>
+        <p:style>
+          <a:lnRef idx="1">
+            <a:schemeClr val="accent1"/>
+          </a:lnRef>
+          <a:fillRef idx="3">
+            <a:schemeClr val="accent1"/>
+          </a:fillRef>
+          <a:effectRef idx="2">
+            <a:schemeClr val="accent1"/>
+          </a:effectRef>
+          <a:fontRef idx="minor">
+            <a:schemeClr val="lt1"/>
+          </a:fontRef>
+        </p:style>
+        <p:txBody>
+          <a:bodyPr rtlCol="0" anchor="ctr"/>
+          <a:lstStyle/>
+          <a:p>
+            <a:pPr algn="ctr"/>
+          </a:p>
+        </p:txBody>
+      </p:sp>
+      <p:sp>
+        <p:nvSpPr>
+          <p:cNvPr id="62" name="TextBox 61"/>
+          <p:cNvSpPr txBox="1"/>
+          <p:nvPr/>
+        </p:nvSpPr>
+        <p:spPr>
+          <a:xfrm>
+            <a:off x="685800" y="5138928"/>
+            <a:ext cx="10881360" cy="914400"/>
           </a:xfrm>
           <a:prstGeom prst="rect">
             <a:avLst/>
@@ -5448,7 +5756,7 @@
                   <a:srgbClr val="333333"/>
                 </a:solidFill>
               </a:rPr>
-              <a:t>All five phases are built, integrated, and running on Databricks. The POC uses generated retail data (sales transactions + event streams) designed to mirror real-world data patterns at scale.</a:t>
+              <a:t>All five phases and Stage A alerting are built and running on Databricks; the batch DAG and the streaming pipeline have been run end to end. The POC uses generated retail data (sales transactions + event streams) designed to mirror real-world data patterns at scale.</a:t>
             </a:r>
           </a:p>
         </p:txBody>
@@ -9226,7 +9534,19 @@
                 </a:solidFill>
                 <a:latin typeface="Courier New"/>
               </a:rPr>
-              <a:t>    if is_numeric and col_min is not None and col_min &gt; 0:</a:t>
+              <a:t>    # (skipped for code-like integers such as division / *_id)</a:t>
+            </a:r>
+          </a:p>
+          <a:p>
+            <a:pPr algn="l"/>
+            <a:r>
+              <a:rPr sz="1050">
+                <a:solidFill>
+                  <a:srgbClr val="CDD6F4"/>
+                </a:solidFill>
+                <a:latin typeface="Courier New"/>
+              </a:rPr>
+              <a:t>    if is_numeric and not _is_code_like(col_name, dtype) and col_min &gt; 0:</a:t>
             </a:r>
           </a:p>
           <a:p>
@@ -9798,7 +10118,7 @@
                 </a:solidFill>
                 <a:latin typeface="Courier New"/>
               </a:rPr>
-              <a:t>approve_rule(rule_id, spark)   # inserts into dq_rules_registry</a:t>
+              <a:t>promote_rule(rule_id, reviewed_by, spark)  # DQX-native names -&gt; dq_rules_registry</a:t>
             </a:r>
           </a:p>
           <a:p>
@@ -9810,7 +10130,31 @@
                 </a:solidFill>
                 <a:latin typeface="Courier New"/>
               </a:rPr>
-              <a:t>reject_rule(rule_id, spark)    # marks status='rejected', preserved for fine-tuning</a:t>
+              <a:t>reject_rule(rule_id, reviewed_by, spark)   # status='rejected', kept for fine-tuning</a:t>
+            </a:r>
+          </a:p>
+          <a:p>
+            <a:pPr algn="l"/>
+            <a:r>
+              <a:rPr sz="1050">
+                <a:solidFill>
+                  <a:srgbClr val="CDD6F4"/>
+                </a:solidFill>
+                <a:latin typeface="Courier New"/>
+              </a:rPr>
+              <a:t/>
+            </a:r>
+          </a:p>
+          <a:p>
+            <a:pPr algn="l"/>
+            <a:r>
+              <a:rPr sz="1050">
+                <a:solidFill>
+                  <a:srgbClr val="CDD6F4"/>
+                </a:solidFill>
+                <a:latin typeface="Courier New"/>
+              </a:rPr>
+              <a:t># On write: duplicates and names of live rules are skipped</a:t>
             </a:r>
           </a:p>
         </p:txBody>
@@ -9823,28 +10167,28 @@
         </p:nvSpPr>
         <p:spPr>
           <a:xfrm>
-            <a:off x="457200" y="6263640"/>
-            <a:ext cx="11247120" cy="365760"/>
-          </a:xfrm>
-          <a:prstGeom prst="rect">
-            <a:avLst/>
-          </a:prstGeom>
-          <a:noFill/>
-        </p:spPr>
-        <p:txBody>
-          <a:bodyPr wrap="square">
-            <a:spAutoFit/>
-          </a:bodyPr>
-          <a:lstStyle/>
-          <a:p>
-            <a:pPr algn="l"/>
-            <a:r>
-              <a:rPr sz="1400" b="1" i="0">
+            <a:off x="457200" y="6217920"/>
+            <a:ext cx="11247120" cy="548640"/>
+          </a:xfrm>
+          <a:prstGeom prst="rect">
+            <a:avLst/>
+          </a:prstGeom>
+          <a:noFill/>
+        </p:spPr>
+        <p:txBody>
+          <a:bodyPr wrap="square">
+            <a:spAutoFit/>
+          </a:bodyPr>
+          <a:lstStyle/>
+          <a:p>
+            <a:pPr algn="l"/>
+            <a:r>
+              <a:rPr sz="1300" b="1" i="0">
                 <a:solidFill>
                   <a:srgbClr val="0F3460"/>
                 </a:solidFill>
               </a:rPr>
-              <a:t>Full audit trail: rule_id · suggested_at · reviewed_at · reviewed_by · llm_backend</a:t>
+              <a:t>Audit trail: rule_id · suggested_at · reviewed_by · llm_backend   |   Duplicates skipped on write · DQX names applied on promotion</a:t>
             </a:r>
           </a:p>
         </p:txBody>
@@ -15773,7 +16117,7 @@
                   <a:srgbClr val="0F3460"/>
                 </a:solidFill>
               </a:rPr>
-              <a:t>DATABRICKS UNITY CATALOG  —  dqx_poc_cluster_7405619883480512 / retail_dqx_poc</a:t>
+              <a:t>DATABRICKS UNITY CATALOG  —  dqx_poc_dev / retail_dqx_poc</a:t>
             </a:r>
           </a:p>
         </p:txBody>
@@ -16852,7 +17196,7 @@
                 </a:solidFill>
                 <a:latin typeface="Courier New"/>
               </a:rPr>
-              <a:t>CATALOG  = 'dqx_poc_cluster_7405619883480512'</a:t>
+              <a:t>CATALOG  = 'dqx_poc_dev'</a:t>
             </a:r>
           </a:p>
           <a:p>
@@ -18917,7 +19261,7 @@
         <p:spPr>
           <a:xfrm>
             <a:off x="457200" y="1508760"/>
-            <a:ext cx="3840480" cy="384048"/>
+            <a:ext cx="3200400" cy="384048"/>
           </a:xfrm>
           <a:prstGeom prst="rect">
             <a:avLst/>
@@ -18960,7 +19304,7 @@
         <p:spPr>
           <a:xfrm>
             <a:off x="502920" y="1559560"/>
-            <a:ext cx="3749040" cy="384048"/>
+            <a:ext cx="3108960" cy="384048"/>
           </a:xfrm>
           <a:prstGeom prst="rect">
             <a:avLst/>
@@ -18993,8 +19337,8 @@
         </p:nvSpPr>
         <p:spPr>
           <a:xfrm>
-            <a:off x="4297680" y="1508760"/>
-            <a:ext cx="2560320" cy="384048"/>
+            <a:off x="3657600" y="1508760"/>
+            <a:ext cx="2743200" cy="384048"/>
           </a:xfrm>
           <a:prstGeom prst="rect">
             <a:avLst/>
@@ -19036,8 +19380,8 @@
         </p:nvSpPr>
         <p:spPr>
           <a:xfrm>
-            <a:off x="4343400" y="1559560"/>
-            <a:ext cx="2468880" cy="384048"/>
+            <a:off x="3703320" y="1559560"/>
+            <a:ext cx="2651760" cy="384048"/>
           </a:xfrm>
           <a:prstGeom prst="rect">
             <a:avLst/>
@@ -19070,8 +19414,8 @@
         </p:nvSpPr>
         <p:spPr>
           <a:xfrm>
-            <a:off x="6858000" y="1508760"/>
-            <a:ext cx="4846320" cy="384048"/>
+            <a:off x="6400800" y="1508760"/>
+            <a:ext cx="5303520" cy="384048"/>
           </a:xfrm>
           <a:prstGeom prst="rect">
             <a:avLst/>
@@ -19113,8 +19457,8 @@
         </p:nvSpPr>
         <p:spPr>
           <a:xfrm>
-            <a:off x="6903720" y="1559560"/>
-            <a:ext cx="4754880" cy="384048"/>
+            <a:off x="6446520" y="1559560"/>
+            <a:ext cx="5212080" cy="384048"/>
           </a:xfrm>
           <a:prstGeom prst="rect">
             <a:avLst/>
@@ -19134,7 +19478,7 @@
                   <a:srgbClr val="FFFFFF"/>
                 </a:solidFill>
               </a:rPr>
-              <a:t>Notebook / Script</a:t>
+              <a:t>Tasks</a:t>
             </a:r>
           </a:p>
         </p:txBody>
@@ -19148,7 +19492,7 @@
         <p:spPr>
           <a:xfrm>
             <a:off x="457200" y="1892808"/>
-            <a:ext cx="3840480" cy="347472"/>
+            <a:ext cx="3200400" cy="347472"/>
           </a:xfrm>
           <a:prstGeom prst="rect">
             <a:avLst/>
@@ -19191,27 +19535,27 @@
         <p:spPr>
           <a:xfrm>
             <a:off x="502920" y="1930908"/>
-            <a:ext cx="3749040" cy="347472"/>
-          </a:xfrm>
-          <a:prstGeom prst="rect">
-            <a:avLst/>
-          </a:prstGeom>
-          <a:noFill/>
-        </p:spPr>
-        <p:txBody>
-          <a:bodyPr wrap="square">
-            <a:spAutoFit/>
-          </a:bodyPr>
-          <a:lstStyle/>
-          <a:p>
-            <a:pPr algn="l"/>
-            <a:r>
-              <a:rPr sz="1300" b="0" i="0">
+            <a:ext cx="3108960" cy="347472"/>
+          </a:xfrm>
+          <a:prstGeom prst="rect">
+            <a:avLst/>
+          </a:prstGeom>
+          <a:noFill/>
+        </p:spPr>
+        <p:txBody>
+          <a:bodyPr wrap="square">
+            <a:spAutoFit/>
+          </a:bodyPr>
+          <a:lstStyle/>
+          <a:p>
+            <a:pPr algn="l"/>
+            <a:r>
+              <a:rPr sz="1200" b="0" i="0">
                 <a:solidFill>
                   <a:srgbClr val="333333"/>
                 </a:solidFill>
               </a:rPr>
-              <a:t>[RTM] Setup Delta Tables</a:t>
+              <a:t>[RTM] Seed Rules Registry</a:t>
             </a:r>
           </a:p>
         </p:txBody>
@@ -19224,8 +19568,8 @@
         </p:nvSpPr>
         <p:spPr>
           <a:xfrm>
-            <a:off x="4297680" y="1892808"/>
-            <a:ext cx="2560320" cy="347472"/>
+            <a:off x="3657600" y="1892808"/>
+            <a:ext cx="2743200" cy="347472"/>
           </a:xfrm>
           <a:prstGeom prst="rect">
             <a:avLst/>
@@ -19267,28 +19611,28 @@
         </p:nvSpPr>
         <p:spPr>
           <a:xfrm>
-            <a:off x="4343400" y="1930908"/>
-            <a:ext cx="2468880" cy="347472"/>
-          </a:xfrm>
-          <a:prstGeom prst="rect">
-            <a:avLst/>
-          </a:prstGeom>
-          <a:noFill/>
-        </p:spPr>
-        <p:txBody>
-          <a:bodyPr wrap="square">
-            <a:spAutoFit/>
-          </a:bodyPr>
-          <a:lstStyle/>
-          <a:p>
-            <a:pPr algn="l"/>
-            <a:r>
-              <a:rPr sz="1300" b="0" i="0">
+            <a:off x="3703320" y="1930908"/>
+            <a:ext cx="2651760" cy="347472"/>
+          </a:xfrm>
+          <a:prstGeom prst="rect">
+            <a:avLst/>
+          </a:prstGeom>
+          <a:noFill/>
+        </p:spPr>
+        <p:txBody>
+          <a:bodyPr wrap="square">
+            <a:spAutoFit/>
+          </a:bodyPr>
+          <a:lstStyle/>
+          <a:p>
+            <a:pPr algn="l"/>
+            <a:r>
+              <a:rPr sz="1200" b="0" i="0">
                 <a:solidFill>
                   <a:srgbClr val="333333"/>
                 </a:solidFill>
               </a:rPr>
-              <a:t>Once (infra)</a:t>
+              <a:t>Once per environment</a:t>
             </a:r>
           </a:p>
         </p:txBody>
@@ -19301,8 +19645,8 @@
         </p:nvSpPr>
         <p:spPr>
           <a:xfrm>
-            <a:off x="6858000" y="1892808"/>
-            <a:ext cx="4846320" cy="347472"/>
+            <a:off x="6400800" y="1892808"/>
+            <a:ext cx="5303520" cy="347472"/>
           </a:xfrm>
           <a:prstGeom prst="rect">
             <a:avLst/>
@@ -19344,28 +19688,28 @@
         </p:nvSpPr>
         <p:spPr>
           <a:xfrm>
-            <a:off x="6903720" y="1930908"/>
-            <a:ext cx="4754880" cy="347472"/>
-          </a:xfrm>
-          <a:prstGeom prst="rect">
-            <a:avLst/>
-          </a:prstGeom>
-          <a:noFill/>
-        </p:spPr>
-        <p:txBody>
-          <a:bodyPr wrap="square">
-            <a:spAutoFit/>
-          </a:bodyPr>
-          <a:lstStyle/>
-          <a:p>
-            <a:pPr algn="l"/>
-            <a:r>
-              <a:rPr sz="1300" b="0" i="0">
+            <a:off x="6446520" y="1930908"/>
+            <a:ext cx="5212080" cy="347472"/>
+          </a:xfrm>
+          <a:prstGeom prst="rect">
+            <a:avLst/>
+          </a:prstGeom>
+          <a:noFill/>
+        </p:spPr>
+        <p:txBody>
+          <a:bodyPr wrap="square">
+            <a:spAutoFit/>
+          </a:bodyPr>
+          <a:lstStyle/>
+          <a:p>
+            <a:pPr algn="l"/>
+            <a:r>
+              <a:rPr sz="1200" b="0" i="0">
                 <a:solidFill>
                   <a:srgbClr val="333333"/>
                 </a:solidFill>
               </a:rPr>
-              <a:t>notebooks/setup_delta_tables.py</a:t>
+              <a:t>seed_rules — loads configs/rules_*.yml into dq_rules_registry</a:t>
             </a:r>
           </a:p>
         </p:txBody>
@@ -19379,7 +19723,7 @@
         <p:spPr>
           <a:xfrm>
             <a:off x="457200" y="2240280"/>
-            <a:ext cx="3840480" cy="347472"/>
+            <a:ext cx="3200400" cy="347472"/>
           </a:xfrm>
           <a:prstGeom prst="rect">
             <a:avLst/>
@@ -19422,27 +19766,27 @@
         <p:spPr>
           <a:xfrm>
             <a:off x="502920" y="2278380"/>
-            <a:ext cx="3749040" cy="347472"/>
-          </a:xfrm>
-          <a:prstGeom prst="rect">
-            <a:avLst/>
-          </a:prstGeom>
-          <a:noFill/>
-        </p:spPr>
-        <p:txBody>
-          <a:bodyPr wrap="square">
-            <a:spAutoFit/>
-          </a:bodyPr>
-          <a:lstStyle/>
-          <a:p>
-            <a:pPr algn="l"/>
-            <a:r>
-              <a:rPr sz="1300" b="0" i="0">
+            <a:ext cx="3108960" cy="347472"/>
+          </a:xfrm>
+          <a:prstGeom prst="rect">
+            <a:avLst/>
+          </a:prstGeom>
+          <a:noFill/>
+        </p:spPr>
+        <p:txBody>
+          <a:bodyPr wrap="square">
+            <a:spAutoFit/>
+          </a:bodyPr>
+          <a:lstStyle/>
+          <a:p>
+            <a:pPr algn="l"/>
+            <a:r>
+              <a:rPr sz="1200" b="0" i="0">
                 <a:solidFill>
                   <a:srgbClr val="333333"/>
                 </a:solidFill>
               </a:rPr>
-              <a:t>[RTM] Batch DQX Validation</a:t>
+              <a:t>[RTM] Batch DQX Pipeline</a:t>
             </a:r>
           </a:p>
         </p:txBody>
@@ -19455,8 +19799,8 @@
         </p:nvSpPr>
         <p:spPr>
           <a:xfrm>
-            <a:off x="4297680" y="2240280"/>
-            <a:ext cx="2560320" cy="347472"/>
+            <a:off x="3657600" y="2240280"/>
+            <a:ext cx="2743200" cy="347472"/>
           </a:xfrm>
           <a:prstGeom prst="rect">
             <a:avLst/>
@@ -19498,28 +19842,28 @@
         </p:nvSpPr>
         <p:spPr>
           <a:xfrm>
-            <a:off x="4343400" y="2278380"/>
-            <a:ext cx="2468880" cy="347472"/>
-          </a:xfrm>
-          <a:prstGeom prst="rect">
-            <a:avLst/>
-          </a:prstGeom>
-          <a:noFill/>
-        </p:spPr>
-        <p:txBody>
-          <a:bodyPr wrap="square">
-            <a:spAutoFit/>
-          </a:bodyPr>
-          <a:lstStyle/>
-          <a:p>
-            <a:pPr algn="l"/>
-            <a:r>
-              <a:rPr sz="1300" b="0" i="0">
+            <a:off x="3703320" y="2278380"/>
+            <a:ext cx="2651760" cy="347472"/>
+          </a:xfrm>
+          <a:prstGeom prst="rect">
+            <a:avLst/>
+          </a:prstGeom>
+          <a:noFill/>
+        </p:spPr>
+        <p:txBody>
+          <a:bodyPr wrap="square">
+            <a:spAutoFit/>
+          </a:bodyPr>
+          <a:lstStyle/>
+          <a:p>
+            <a:pPr algn="l"/>
+            <a:r>
+              <a:rPr sz="1200" b="0" i="0">
                 <a:solidFill>
                   <a:srgbClr val="333333"/>
                 </a:solidFill>
               </a:rPr>
-              <a:t>Scheduled / on-demand</a:t>
+              <a:t>On-demand / scheduled</a:t>
             </a:r>
           </a:p>
         </p:txBody>
@@ -19532,8 +19876,8 @@
         </p:nvSpPr>
         <p:spPr>
           <a:xfrm>
-            <a:off x="6858000" y="2240280"/>
-            <a:ext cx="4846320" cy="347472"/>
+            <a:off x="6400800" y="2240280"/>
+            <a:ext cx="5303520" cy="347472"/>
           </a:xfrm>
           <a:prstGeom prst="rect">
             <a:avLst/>
@@ -19575,28 +19919,28 @@
         </p:nvSpPr>
         <p:spPr>
           <a:xfrm>
-            <a:off x="6903720" y="2278380"/>
-            <a:ext cx="4754880" cy="347472"/>
-          </a:xfrm>
-          <a:prstGeom prst="rect">
-            <a:avLst/>
-          </a:prstGeom>
-          <a:noFill/>
-        </p:spPr>
-        <p:txBody>
-          <a:bodyPr wrap="square">
-            <a:spAutoFit/>
-          </a:bodyPr>
-          <a:lstStyle/>
-          <a:p>
-            <a:pPr algn="l"/>
-            <a:r>
-              <a:rPr sz="1300" b="0" i="0">
+            <a:off x="6446520" y="2278380"/>
+            <a:ext cx="5212080" cy="347472"/>
+          </a:xfrm>
+          <a:prstGeom prst="rect">
+            <a:avLst/>
+          </a:prstGeom>
+          <a:noFill/>
+        </p:spPr>
+        <p:txBody>
+          <a:bodyPr wrap="square">
+            <a:spAutoFit/>
+          </a:bodyPr>
+          <a:lstStyle/>
+          <a:p>
+            <a:pPr algn="l"/>
+            <a:r>
+              <a:rPr sz="1200" b="0" i="0">
                 <a:solidFill>
                   <a:srgbClr val="333333"/>
                 </a:solidFill>
               </a:rPr>
-              <a:t>notebooks/batch_dqx_validation.py</a:t>
+              <a:t>6-task DAG: stage → validate → suggest ∥ analyze → report → alerts</a:t>
             </a:r>
           </a:p>
         </p:txBody>
@@ -19610,7 +19954,7 @@
         <p:spPr>
           <a:xfrm>
             <a:off x="457200" y="2587752"/>
-            <a:ext cx="3840480" cy="347472"/>
+            <a:ext cx="3200400" cy="347472"/>
           </a:xfrm>
           <a:prstGeom prst="rect">
             <a:avLst/>
@@ -19653,27 +19997,27 @@
         <p:spPr>
           <a:xfrm>
             <a:off x="502920" y="2625852"/>
-            <a:ext cx="3749040" cy="347472"/>
-          </a:xfrm>
-          <a:prstGeom prst="rect">
-            <a:avLst/>
-          </a:prstGeom>
-          <a:noFill/>
-        </p:spPr>
-        <p:txBody>
-          <a:bodyPr wrap="square">
-            <a:spAutoFit/>
-          </a:bodyPr>
-          <a:lstStyle/>
-          <a:p>
-            <a:pPr algn="l"/>
-            <a:r>
-              <a:rPr sz="1300" b="0" i="0">
+            <a:ext cx="3108960" cy="347472"/>
+          </a:xfrm>
+          <a:prstGeom prst="rect">
+            <a:avLst/>
+          </a:prstGeom>
+          <a:noFill/>
+        </p:spPr>
+        <p:txBody>
+          <a:bodyPr wrap="square">
+            <a:spAutoFit/>
+          </a:bodyPr>
+          <a:lstStyle/>
+          <a:p>
+            <a:pPr algn="l"/>
+            <a:r>
+              <a:rPr sz="1200" b="0" i="0">
                 <a:solidFill>
                   <a:srgbClr val="333333"/>
                 </a:solidFill>
               </a:rPr>
-              <a:t>[RTM] Kafka Stream DQX Validation</a:t>
+              <a:t>[RTM] Kafka Streaming Pipeline</a:t>
             </a:r>
           </a:p>
         </p:txBody>
@@ -19686,8 +20030,8 @@
         </p:nvSpPr>
         <p:spPr>
           <a:xfrm>
-            <a:off x="4297680" y="2587752"/>
-            <a:ext cx="2560320" cy="347472"/>
+            <a:off x="3657600" y="2587752"/>
+            <a:ext cx="2743200" cy="347472"/>
           </a:xfrm>
           <a:prstGeom prst="rect">
             <a:avLst/>
@@ -19729,28 +20073,28 @@
         </p:nvSpPr>
         <p:spPr>
           <a:xfrm>
-            <a:off x="4343400" y="2625852"/>
-            <a:ext cx="2468880" cy="347472"/>
-          </a:xfrm>
-          <a:prstGeom prst="rect">
-            <a:avLst/>
-          </a:prstGeom>
-          <a:noFill/>
-        </p:spPr>
-        <p:txBody>
-          <a:bodyPr wrap="square">
-            <a:spAutoFit/>
-          </a:bodyPr>
-          <a:lstStyle/>
-          <a:p>
-            <a:pPr algn="l"/>
-            <a:r>
-              <a:rPr sz="1300" b="0" i="0">
+            <a:off x="3703320" y="2625852"/>
+            <a:ext cx="2651760" cy="347472"/>
+          </a:xfrm>
+          <a:prstGeom prst="rect">
+            <a:avLst/>
+          </a:prstGeom>
+          <a:noFill/>
+        </p:spPr>
+        <p:txBody>
+          <a:bodyPr wrap="square">
+            <a:spAutoFit/>
+          </a:bodyPr>
+          <a:lstStyle/>
+          <a:p>
+            <a:pPr algn="l"/>
+            <a:r>
+              <a:rPr sz="1200" b="0" i="0">
                 <a:solidFill>
                   <a:srgbClr val="333333"/>
                 </a:solidFill>
               </a:rPr>
-              <a:t>Continuous</a:t>
+              <a:t>Continuous (runs until cancelled)</a:t>
             </a:r>
           </a:p>
         </p:txBody>
@@ -19763,8 +20107,8 @@
         </p:nvSpPr>
         <p:spPr>
           <a:xfrm>
-            <a:off x="6858000" y="2587752"/>
-            <a:ext cx="4846320" cy="347472"/>
+            <a:off x="6400800" y="2587752"/>
+            <a:ext cx="5303520" cy="347472"/>
           </a:xfrm>
           <a:prstGeom prst="rect">
             <a:avLst/>
@@ -19806,28 +20150,28 @@
         </p:nvSpPr>
         <p:spPr>
           <a:xfrm>
-            <a:off x="6903720" y="2625852"/>
-            <a:ext cx="4754880" cy="347472"/>
-          </a:xfrm>
-          <a:prstGeom prst="rect">
-            <a:avLst/>
-          </a:prstGeom>
-          <a:noFill/>
-        </p:spPr>
-        <p:txBody>
-          <a:bodyPr wrap="square">
-            <a:spAutoFit/>
-          </a:bodyPr>
-          <a:lstStyle/>
-          <a:p>
-            <a:pPr algn="l"/>
-            <a:r>
-              <a:rPr sz="1300" b="0" i="0">
+            <a:off x="6446520" y="2625852"/>
+            <a:ext cx="5212080" cy="347472"/>
+          </a:xfrm>
+          <a:prstGeom prst="rect">
+            <a:avLst/>
+          </a:prstGeom>
+          <a:noFill/>
+        </p:spPr>
+        <p:txBody>
+          <a:bodyPr wrap="square">
+            <a:spAutoFit/>
+          </a:bodyPr>
+          <a:lstStyle/>
+          <a:p>
+            <a:pPr algn="l"/>
+            <a:r>
+              <a:rPr sz="1200" b="0" i="0">
                 <a:solidFill>
                   <a:srgbClr val="333333"/>
                 </a:solidFill>
               </a:rPr>
-              <a:t>notebooks/kafka_stream_dqx_validation.py</a:t>
+              <a:t>stream_and_validate + produce_events, started together; readiness handshake</a:t>
             </a:r>
           </a:p>
         </p:txBody>
@@ -19841,7 +20185,7 @@
         <p:spPr>
           <a:xfrm>
             <a:off x="457200" y="2935224"/>
-            <a:ext cx="3840480" cy="347472"/>
+            <a:ext cx="3200400" cy="347472"/>
           </a:xfrm>
           <a:prstGeom prst="rect">
             <a:avLst/>
@@ -19884,27 +20228,27 @@
         <p:spPr>
           <a:xfrm>
             <a:off x="502920" y="2973324"/>
-            <a:ext cx="3749040" cy="347472"/>
-          </a:xfrm>
-          <a:prstGeom prst="rect">
-            <a:avLst/>
-          </a:prstGeom>
-          <a:noFill/>
-        </p:spPr>
-        <p:txBody>
-          <a:bodyPr wrap="square">
-            <a:spAutoFit/>
-          </a:bodyPr>
-          <a:lstStyle/>
-          <a:p>
-            <a:pPr algn="l"/>
-            <a:r>
-              <a:rPr sz="1300" b="0" i="0">
+            <a:ext cx="3108960" cy="347472"/>
+          </a:xfrm>
+          <a:prstGeom prst="rect">
+            <a:avLst/>
+          </a:prstGeom>
+          <a:noFill/>
+        </p:spPr>
+        <p:txBody>
+          <a:bodyPr wrap="square">
+            <a:spAutoFit/>
+          </a:bodyPr>
+          <a:lstStyle/>
+          <a:p>
+            <a:pPr algn="l"/>
+            <a:r>
+              <a:rPr sz="1200" b="0" i="0">
                 <a:solidFill>
                   <a:srgbClr val="333333"/>
                 </a:solidFill>
               </a:rPr>
-              <a:t>[RTM] AI Rule Suggester</a:t>
+              <a:t>[RTM] DQ Alert Check (Streaming)</a:t>
             </a:r>
           </a:p>
         </p:txBody>
@@ -19917,8 +20261,8 @@
         </p:nvSpPr>
         <p:spPr>
           <a:xfrm>
-            <a:off x="4297680" y="2935224"/>
-            <a:ext cx="2560320" cy="347472"/>
+            <a:off x="3657600" y="2935224"/>
+            <a:ext cx="2743200" cy="347472"/>
           </a:xfrm>
           <a:prstGeom prst="rect">
             <a:avLst/>
@@ -19960,28 +20304,28 @@
         </p:nvSpPr>
         <p:spPr>
           <a:xfrm>
-            <a:off x="4343400" y="2973324"/>
-            <a:ext cx="2468880" cy="347472"/>
-          </a:xfrm>
-          <a:prstGeom prst="rect">
-            <a:avLst/>
-          </a:prstGeom>
-          <a:noFill/>
-        </p:spPr>
-        <p:txBody>
-          <a:bodyPr wrap="square">
-            <a:spAutoFit/>
-          </a:bodyPr>
-          <a:lstStyle/>
-          <a:p>
-            <a:pPr algn="l"/>
-            <a:r>
-              <a:rPr sz="1300" b="0" i="0">
+            <a:off x="3703320" y="2973324"/>
+            <a:ext cx="2651760" cy="347472"/>
+          </a:xfrm>
+          <a:prstGeom prst="rect">
+            <a:avLst/>
+          </a:prstGeom>
+          <a:noFill/>
+        </p:spPr>
+        <p:txBody>
+          <a:bodyPr wrap="square">
+            <a:spAutoFit/>
+          </a:bodyPr>
+          <a:lstStyle/>
+          <a:p>
+            <a:pPr algn="l"/>
+            <a:r>
+              <a:rPr sz="1200" b="0" i="0">
                 <a:solidFill>
                   <a:srgbClr val="333333"/>
                 </a:solidFill>
               </a:rPr>
-              <a:t>On-demand</a:t>
+              <a:t>Every 15 minutes</a:t>
             </a:r>
           </a:p>
         </p:txBody>
@@ -19994,8 +20338,8 @@
         </p:nvSpPr>
         <p:spPr>
           <a:xfrm>
-            <a:off x="6858000" y="2935224"/>
-            <a:ext cx="4846320" cy="347472"/>
+            <a:off x="6400800" y="2935224"/>
+            <a:ext cx="5303520" cy="347472"/>
           </a:xfrm>
           <a:prstGeom prst="rect">
             <a:avLst/>
@@ -20037,28 +20381,28 @@
         </p:nvSpPr>
         <p:spPr>
           <a:xfrm>
-            <a:off x="6903720" y="2973324"/>
-            <a:ext cx="4754880" cy="347472"/>
-          </a:xfrm>
-          <a:prstGeom prst="rect">
-            <a:avLst/>
-          </a:prstGeom>
-          <a:noFill/>
-        </p:spPr>
-        <p:txBody>
-          <a:bodyPr wrap="square">
-            <a:spAutoFit/>
-          </a:bodyPr>
-          <a:lstStyle/>
-          <a:p>
-            <a:pPr algn="l"/>
-            <a:r>
-              <a:rPr sz="1300" b="0" i="0">
+            <a:off x="6446520" y="2973324"/>
+            <a:ext cx="5212080" cy="347472"/>
+          </a:xfrm>
+          <a:prstGeom prst="rect">
+            <a:avLst/>
+          </a:prstGeom>
+          <a:noFill/>
+        </p:spPr>
+        <p:txBody>
+          <a:bodyPr wrap="square">
+            <a:spAutoFit/>
+          </a:bodyPr>
+          <a:lstStyle/>
+          <a:p>
+            <a:pPr algn="l"/>
+            <a:r>
+              <a:rPr sz="1200" b="0" i="0">
                 <a:solidFill>
                   <a:srgbClr val="333333"/>
                 </a:solidFill>
               </a:rPr>
-              <a:t>notebooks/ai_rule_suggester.py</a:t>
+              <a:t>check_alerts — spike detection on streaming rules</a:t>
             </a:r>
           </a:p>
         </p:txBody>
@@ -20071,8 +20415,8 @@
         </p:nvSpPr>
         <p:spPr>
           <a:xfrm>
-            <a:off x="457200" y="3282696"/>
-            <a:ext cx="3840480" cy="347472"/>
+            <a:off x="457200" y="4983480"/>
+            <a:ext cx="11247120" cy="1371600"/>
           </a:xfrm>
           <a:prstGeom prst="rect">
             <a:avLst/>
@@ -20108,54 +20452,20 @@
       </p:sp>
       <p:sp>
         <p:nvSpPr>
-          <p:cNvPr id="35" name="TextBox 34"/>
-          <p:cNvSpPr txBox="1"/>
-          <p:nvPr/>
-        </p:nvSpPr>
-        <p:spPr>
-          <a:xfrm>
-            <a:off x="502920" y="3320796"/>
-            <a:ext cx="3749040" cy="347472"/>
-          </a:xfrm>
-          <a:prstGeom prst="rect">
-            <a:avLst/>
-          </a:prstGeom>
-          <a:noFill/>
-        </p:spPr>
-        <p:txBody>
-          <a:bodyPr wrap="square">
-            <a:spAutoFit/>
-          </a:bodyPr>
-          <a:lstStyle/>
-          <a:p>
-            <a:pPr algn="l"/>
-            <a:r>
-              <a:rPr sz="1300" b="0" i="0">
-                <a:solidFill>
-                  <a:srgbClr val="333333"/>
-                </a:solidFill>
-              </a:rPr>
-              <a:t>[RTM] Quarantine Analyzer</a:t>
-            </a:r>
-          </a:p>
-        </p:txBody>
-      </p:sp>
-      <p:sp>
-        <p:nvSpPr>
-          <p:cNvPr id="36" name="Rectangle 35"/>
-          <p:cNvSpPr/>
-          <p:nvPr/>
-        </p:nvSpPr>
-        <p:spPr>
-          <a:xfrm>
-            <a:off x="4297680" y="3282696"/>
-            <a:ext cx="2560320" cy="347472"/>
-          </a:xfrm>
-          <a:prstGeom prst="rect">
-            <a:avLst/>
-          </a:prstGeom>
-          <a:solidFill>
-            <a:srgbClr val="F7F9FC"/>
+          <p:cNvPr id="35" name="Rectangle 34"/>
+          <p:cNvSpPr/>
+          <p:nvPr/>
+        </p:nvSpPr>
+        <p:spPr>
+          <a:xfrm>
+            <a:off x="457200" y="4983480"/>
+            <a:ext cx="63500" cy="1371600"/>
+          </a:xfrm>
+          <a:prstGeom prst="rect">
+            <a:avLst/>
+          </a:prstGeom>
+          <a:solidFill>
+            <a:srgbClr val="E94560"/>
           </a:solidFill>
           <a:ln>
             <a:noFill/>
@@ -20185,462 +20495,34 @@
       </p:sp>
       <p:sp>
         <p:nvSpPr>
-          <p:cNvPr id="37" name="TextBox 36"/>
-          <p:cNvSpPr txBox="1"/>
-          <p:nvPr/>
-        </p:nvSpPr>
-        <p:spPr>
-          <a:xfrm>
-            <a:off x="4343400" y="3320796"/>
-            <a:ext cx="2468880" cy="347472"/>
-          </a:xfrm>
-          <a:prstGeom prst="rect">
-            <a:avLst/>
-          </a:prstGeom>
-          <a:noFill/>
-        </p:spPr>
-        <p:txBody>
-          <a:bodyPr wrap="square">
-            <a:spAutoFit/>
-          </a:bodyPr>
-          <a:lstStyle/>
-          <a:p>
-            <a:pPr algn="l"/>
-            <a:r>
-              <a:rPr sz="1300" b="0" i="0">
+          <p:cNvPr id="36" name="TextBox 35"/>
+          <p:cNvSpPr txBox="1"/>
+          <p:nvPr/>
+        </p:nvSpPr>
+        <p:spPr>
+          <a:xfrm>
+            <a:off x="685800" y="5074920"/>
+            <a:ext cx="10881360" cy="1188720"/>
+          </a:xfrm>
+          <a:prstGeom prst="rect">
+            <a:avLst/>
+          </a:prstGeom>
+          <a:noFill/>
+        </p:spPr>
+        <p:txBody>
+          <a:bodyPr wrap="square">
+            <a:spAutoFit/>
+          </a:bodyPr>
+          <a:lstStyle/>
+          <a:p>
+            <a:pPr algn="l"/>
+            <a:r>
+              <a:rPr sz="1400" b="0" i="1">
                 <a:solidFill>
                   <a:srgbClr val="333333"/>
                 </a:solidFill>
               </a:rPr>
-              <a:t>On-demand / scheduled</a:t>
-            </a:r>
-          </a:p>
-        </p:txBody>
-      </p:sp>
-      <p:sp>
-        <p:nvSpPr>
-          <p:cNvPr id="38" name="Rectangle 37"/>
-          <p:cNvSpPr/>
-          <p:nvPr/>
-        </p:nvSpPr>
-        <p:spPr>
-          <a:xfrm>
-            <a:off x="6858000" y="3282696"/>
-            <a:ext cx="4846320" cy="347472"/>
-          </a:xfrm>
-          <a:prstGeom prst="rect">
-            <a:avLst/>
-          </a:prstGeom>
-          <a:solidFill>
-            <a:srgbClr val="F7F9FC"/>
-          </a:solidFill>
-          <a:ln>
-            <a:noFill/>
-          </a:ln>
-        </p:spPr>
-        <p:style>
-          <a:lnRef idx="1">
-            <a:schemeClr val="accent1"/>
-          </a:lnRef>
-          <a:fillRef idx="3">
-            <a:schemeClr val="accent1"/>
-          </a:fillRef>
-          <a:effectRef idx="2">
-            <a:schemeClr val="accent1"/>
-          </a:effectRef>
-          <a:fontRef idx="minor">
-            <a:schemeClr val="lt1"/>
-          </a:fontRef>
-        </p:style>
-        <p:txBody>
-          <a:bodyPr rtlCol="0" anchor="ctr"/>
-          <a:lstStyle/>
-          <a:p>
-            <a:pPr algn="ctr"/>
-          </a:p>
-        </p:txBody>
-      </p:sp>
-      <p:sp>
-        <p:nvSpPr>
-          <p:cNvPr id="39" name="TextBox 38"/>
-          <p:cNvSpPr txBox="1"/>
-          <p:nvPr/>
-        </p:nvSpPr>
-        <p:spPr>
-          <a:xfrm>
-            <a:off x="6903720" y="3320796"/>
-            <a:ext cx="4754880" cy="347472"/>
-          </a:xfrm>
-          <a:prstGeom prst="rect">
-            <a:avLst/>
-          </a:prstGeom>
-          <a:noFill/>
-        </p:spPr>
-        <p:txBody>
-          <a:bodyPr wrap="square">
-            <a:spAutoFit/>
-          </a:bodyPr>
-          <a:lstStyle/>
-          <a:p>
-            <a:pPr algn="l"/>
-            <a:r>
-              <a:rPr sz="1300" b="0" i="0">
-                <a:solidFill>
-                  <a:srgbClr val="333333"/>
-                </a:solidFill>
-              </a:rPr>
-              <a:t>notebooks/quarantine_analyzer.py</a:t>
-            </a:r>
-          </a:p>
-        </p:txBody>
-      </p:sp>
-      <p:sp>
-        <p:nvSpPr>
-          <p:cNvPr id="40" name="Rectangle 39"/>
-          <p:cNvSpPr/>
-          <p:nvPr/>
-        </p:nvSpPr>
-        <p:spPr>
-          <a:xfrm>
-            <a:off x="457200" y="3630168"/>
-            <a:ext cx="3840480" cy="347472"/>
-          </a:xfrm>
-          <a:prstGeom prst="rect">
-            <a:avLst/>
-          </a:prstGeom>
-          <a:solidFill>
-            <a:srgbClr val="FFFFFF"/>
-          </a:solidFill>
-          <a:ln>
-            <a:noFill/>
-          </a:ln>
-        </p:spPr>
-        <p:style>
-          <a:lnRef idx="1">
-            <a:schemeClr val="accent1"/>
-          </a:lnRef>
-          <a:fillRef idx="3">
-            <a:schemeClr val="accent1"/>
-          </a:fillRef>
-          <a:effectRef idx="2">
-            <a:schemeClr val="accent1"/>
-          </a:effectRef>
-          <a:fontRef idx="minor">
-            <a:schemeClr val="lt1"/>
-          </a:fontRef>
-        </p:style>
-        <p:txBody>
-          <a:bodyPr rtlCol="0" anchor="ctr"/>
-          <a:lstStyle/>
-          <a:p>
-            <a:pPr algn="ctr"/>
-          </a:p>
-        </p:txBody>
-      </p:sp>
-      <p:sp>
-        <p:nvSpPr>
-          <p:cNvPr id="41" name="TextBox 40"/>
-          <p:cNvSpPr txBox="1"/>
-          <p:nvPr/>
-        </p:nvSpPr>
-        <p:spPr>
-          <a:xfrm>
-            <a:off x="502920" y="3668268"/>
-            <a:ext cx="3749040" cy="347472"/>
-          </a:xfrm>
-          <a:prstGeom prst="rect">
-            <a:avLst/>
-          </a:prstGeom>
-          <a:noFill/>
-        </p:spPr>
-        <p:txBody>
-          <a:bodyPr wrap="square">
-            <a:spAutoFit/>
-          </a:bodyPr>
-          <a:lstStyle/>
-          <a:p>
-            <a:pPr algn="l"/>
-            <a:r>
-              <a:rPr sz="1300" b="0" i="0">
-                <a:solidFill>
-                  <a:srgbClr val="333333"/>
-                </a:solidFill>
-              </a:rPr>
-              <a:t>[RTM] Rule Effectiveness Report</a:t>
-            </a:r>
-          </a:p>
-        </p:txBody>
-      </p:sp>
-      <p:sp>
-        <p:nvSpPr>
-          <p:cNvPr id="42" name="Rectangle 41"/>
-          <p:cNvSpPr/>
-          <p:nvPr/>
-        </p:nvSpPr>
-        <p:spPr>
-          <a:xfrm>
-            <a:off x="4297680" y="3630168"/>
-            <a:ext cx="2560320" cy="347472"/>
-          </a:xfrm>
-          <a:prstGeom prst="rect">
-            <a:avLst/>
-          </a:prstGeom>
-          <a:solidFill>
-            <a:srgbClr val="FFFFFF"/>
-          </a:solidFill>
-          <a:ln>
-            <a:noFill/>
-          </a:ln>
-        </p:spPr>
-        <p:style>
-          <a:lnRef idx="1">
-            <a:schemeClr val="accent1"/>
-          </a:lnRef>
-          <a:fillRef idx="3">
-            <a:schemeClr val="accent1"/>
-          </a:fillRef>
-          <a:effectRef idx="2">
-            <a:schemeClr val="accent1"/>
-          </a:effectRef>
-          <a:fontRef idx="minor">
-            <a:schemeClr val="lt1"/>
-          </a:fontRef>
-        </p:style>
-        <p:txBody>
-          <a:bodyPr rtlCol="0" anchor="ctr"/>
-          <a:lstStyle/>
-          <a:p>
-            <a:pPr algn="ctr"/>
-          </a:p>
-        </p:txBody>
-      </p:sp>
-      <p:sp>
-        <p:nvSpPr>
-          <p:cNvPr id="43" name="TextBox 42"/>
-          <p:cNvSpPr txBox="1"/>
-          <p:nvPr/>
-        </p:nvSpPr>
-        <p:spPr>
-          <a:xfrm>
-            <a:off x="4343400" y="3668268"/>
-            <a:ext cx="2468880" cy="347472"/>
-          </a:xfrm>
-          <a:prstGeom prst="rect">
-            <a:avLst/>
-          </a:prstGeom>
-          <a:noFill/>
-        </p:spPr>
-        <p:txBody>
-          <a:bodyPr wrap="square">
-            <a:spAutoFit/>
-          </a:bodyPr>
-          <a:lstStyle/>
-          <a:p>
-            <a:pPr algn="l"/>
-            <a:r>
-              <a:rPr sz="1300" b="0" i="0">
-                <a:solidFill>
-                  <a:srgbClr val="333333"/>
-                </a:solidFill>
-              </a:rPr>
-              <a:t>On-demand / scheduled</a:t>
-            </a:r>
-          </a:p>
-        </p:txBody>
-      </p:sp>
-      <p:sp>
-        <p:nvSpPr>
-          <p:cNvPr id="44" name="Rectangle 43"/>
-          <p:cNvSpPr/>
-          <p:nvPr/>
-        </p:nvSpPr>
-        <p:spPr>
-          <a:xfrm>
-            <a:off x="6858000" y="3630168"/>
-            <a:ext cx="4846320" cy="347472"/>
-          </a:xfrm>
-          <a:prstGeom prst="rect">
-            <a:avLst/>
-          </a:prstGeom>
-          <a:solidFill>
-            <a:srgbClr val="FFFFFF"/>
-          </a:solidFill>
-          <a:ln>
-            <a:noFill/>
-          </a:ln>
-        </p:spPr>
-        <p:style>
-          <a:lnRef idx="1">
-            <a:schemeClr val="accent1"/>
-          </a:lnRef>
-          <a:fillRef idx="3">
-            <a:schemeClr val="accent1"/>
-          </a:fillRef>
-          <a:effectRef idx="2">
-            <a:schemeClr val="accent1"/>
-          </a:effectRef>
-          <a:fontRef idx="minor">
-            <a:schemeClr val="lt1"/>
-          </a:fontRef>
-        </p:style>
-        <p:txBody>
-          <a:bodyPr rtlCol="0" anchor="ctr"/>
-          <a:lstStyle/>
-          <a:p>
-            <a:pPr algn="ctr"/>
-          </a:p>
-        </p:txBody>
-      </p:sp>
-      <p:sp>
-        <p:nvSpPr>
-          <p:cNvPr id="45" name="TextBox 44"/>
-          <p:cNvSpPr txBox="1"/>
-          <p:nvPr/>
-        </p:nvSpPr>
-        <p:spPr>
-          <a:xfrm>
-            <a:off x="6903720" y="3668268"/>
-            <a:ext cx="4754880" cy="347472"/>
-          </a:xfrm>
-          <a:prstGeom prst="rect">
-            <a:avLst/>
-          </a:prstGeom>
-          <a:noFill/>
-        </p:spPr>
-        <p:txBody>
-          <a:bodyPr wrap="square">
-            <a:spAutoFit/>
-          </a:bodyPr>
-          <a:lstStyle/>
-          <a:p>
-            <a:pPr algn="l"/>
-            <a:r>
-              <a:rPr sz="1300" b="0" i="0">
-                <a:solidFill>
-                  <a:srgbClr val="333333"/>
-                </a:solidFill>
-              </a:rPr>
-              <a:t>notebooks/rule_effectiveness_report.py</a:t>
-            </a:r>
-          </a:p>
-        </p:txBody>
-      </p:sp>
-      <p:sp>
-        <p:nvSpPr>
-          <p:cNvPr id="46" name="Rectangle 45"/>
-          <p:cNvSpPr/>
-          <p:nvPr/>
-        </p:nvSpPr>
-        <p:spPr>
-          <a:xfrm>
-            <a:off x="457200" y="4983480"/>
-            <a:ext cx="11247120" cy="914400"/>
-          </a:xfrm>
-          <a:prstGeom prst="rect">
-            <a:avLst/>
-          </a:prstGeom>
-          <a:solidFill>
-            <a:srgbClr val="F7F9FC"/>
-          </a:solidFill>
-          <a:ln>
-            <a:noFill/>
-          </a:ln>
-        </p:spPr>
-        <p:style>
-          <a:lnRef idx="1">
-            <a:schemeClr val="accent1"/>
-          </a:lnRef>
-          <a:fillRef idx="3">
-            <a:schemeClr val="accent1"/>
-          </a:fillRef>
-          <a:effectRef idx="2">
-            <a:schemeClr val="accent1"/>
-          </a:effectRef>
-          <a:fontRef idx="minor">
-            <a:schemeClr val="lt1"/>
-          </a:fontRef>
-        </p:style>
-        <p:txBody>
-          <a:bodyPr rtlCol="0" anchor="ctr"/>
-          <a:lstStyle/>
-          <a:p>
-            <a:pPr algn="ctr"/>
-          </a:p>
-        </p:txBody>
-      </p:sp>
-      <p:sp>
-        <p:nvSpPr>
-          <p:cNvPr id="47" name="Rectangle 46"/>
-          <p:cNvSpPr/>
-          <p:nvPr/>
-        </p:nvSpPr>
-        <p:spPr>
-          <a:xfrm>
-            <a:off x="457200" y="4983480"/>
-            <a:ext cx="63500" cy="914400"/>
-          </a:xfrm>
-          <a:prstGeom prst="rect">
-            <a:avLst/>
-          </a:prstGeom>
-          <a:solidFill>
-            <a:srgbClr val="E94560"/>
-          </a:solidFill>
-          <a:ln>
-            <a:noFill/>
-          </a:ln>
-        </p:spPr>
-        <p:style>
-          <a:lnRef idx="1">
-            <a:schemeClr val="accent1"/>
-          </a:lnRef>
-          <a:fillRef idx="3">
-            <a:schemeClr val="accent1"/>
-          </a:fillRef>
-          <a:effectRef idx="2">
-            <a:schemeClr val="accent1"/>
-          </a:effectRef>
-          <a:fontRef idx="minor">
-            <a:schemeClr val="lt1"/>
-          </a:fontRef>
-        </p:style>
-        <p:txBody>
-          <a:bodyPr rtlCol="0" anchor="ctr"/>
-          <a:lstStyle/>
-          <a:p>
-            <a:pPr algn="ctr"/>
-          </a:p>
-        </p:txBody>
-      </p:sp>
-      <p:sp>
-        <p:nvSpPr>
-          <p:cNvPr id="48" name="TextBox 47"/>
-          <p:cNvSpPr txBox="1"/>
-          <p:nvPr/>
-        </p:nvSpPr>
-        <p:spPr>
-          <a:xfrm>
-            <a:off x="685800" y="5074920"/>
-            <a:ext cx="10881360" cy="777240"/>
-          </a:xfrm>
-          <a:prstGeom prst="rect">
-            <a:avLst/>
-          </a:prstGeom>
-          <a:noFill/>
-        </p:spPr>
-        <p:txBody>
-          <a:bodyPr wrap="square">
-            <a:spAutoFit/>
-          </a:bodyPr>
-          <a:lstStyle/>
-          <a:p>
-            <a:pPr algn="l"/>
-            <a:r>
-              <a:rPr sz="1400" b="0" i="1">
-                <a:solidFill>
-                  <a:srgbClr val="333333"/>
-                </a:solidFill>
-              </a:rPr>
-              <a:t>All jobs defined in databricks.yml as a Databricks Asset Bundle — infrastructure as code, deployable across dev / staging / prod with a single CLI command: databricks bundle deploy</a:t>
+              <a:t>Six manually triggered jobs were chained into four orchestrated ones. All are defined in databricks.yml as a Databricks Asset Bundle, including the cluster libraries (pipeline_libraries), so a new environment needs no manual setup: databricks bundle deploy</a:t>
             </a:r>
           </a:p>
         </p:txBody>
@@ -21797,7 +21679,7 @@
                   <a:srgbClr val="333333"/>
                 </a:solidFill>
               </a:rPr>
-              <a:t>~15 seeded + AI-suggested</a:t>
+              <a:t>12 seeded + AI-suggested</a:t>
             </a:r>
           </a:p>
         </p:txBody>
@@ -22490,7 +22372,7 @@
                   <a:srgbClr val="333333"/>
                 </a:solidFill>
               </a:rPr>
-              <a:t>Databricks Secrets</a:t>
+              <a:t>Secret scope backed by Azure Key Vault</a:t>
             </a:r>
           </a:p>
         </p:txBody>
@@ -22567,7 +22449,7 @@
                   <a:srgbClr val="333333"/>
                 </a:solidFill>
               </a:rPr>
-              <a:t>Enterprise key vault (Azure Key Vault / HashiCorp)</a:t>
+              <a:t>Managed identities, rotation policies, per-environment vaults</a:t>
             </a:r>
           </a:p>
         </p:txBody>
@@ -23742,7 +23624,7 @@
                   <a:srgbClr val="333333"/>
                 </a:solidFill>
               </a:rPr>
-              <a:t>The LLM produced structurally valid, business-relevant rules from a column profile — no domain hints given. Rules were immediately executable by DQX with zero manual editing.</a:t>
+              <a:t>The LLM produced structurally valid, business-relevant rules from a column profile — no domain hints given. A built-in translation maps them to DQX-native names on promotion, so approved rules run without manual editing.</a:t>
             </a:r>
           </a:p>
         </p:txBody>
@@ -23755,7 +23637,7 @@
         </p:nvSpPr>
         <p:spPr>
           <a:xfrm>
-            <a:off x="548640" y="2258568"/>
+            <a:off x="548640" y="2350008"/>
             <a:ext cx="11064240" cy="320040"/>
           </a:xfrm>
           <a:prstGeom prst="rect">
@@ -23789,7 +23671,7 @@
         </p:nvSpPr>
         <p:spPr>
           <a:xfrm>
-            <a:off x="822960" y="2560320"/>
+            <a:off x="822960" y="2651760"/>
             <a:ext cx="10789920" cy="320040"/>
           </a:xfrm>
           <a:prstGeom prst="rect">
@@ -23823,7 +23705,7 @@
         </p:nvSpPr>
         <p:spPr>
           <a:xfrm>
-            <a:off x="548640" y="3008376"/>
+            <a:off x="548640" y="3191256"/>
             <a:ext cx="11064240" cy="320040"/>
           </a:xfrm>
           <a:prstGeom prst="rect">
@@ -23857,7 +23739,7 @@
         </p:nvSpPr>
         <p:spPr>
           <a:xfrm>
-            <a:off x="822960" y="3310128"/>
+            <a:off x="822960" y="3493008"/>
             <a:ext cx="10789920" cy="320040"/>
           </a:xfrm>
           <a:prstGeom prst="rect">
@@ -23891,7 +23773,7 @@
         </p:nvSpPr>
         <p:spPr>
           <a:xfrm>
-            <a:off x="548640" y="3758184"/>
+            <a:off x="548640" y="4032504"/>
             <a:ext cx="11064240" cy="320040"/>
           </a:xfrm>
           <a:prstGeom prst="rect">
@@ -23925,7 +23807,7 @@
         </p:nvSpPr>
         <p:spPr>
           <a:xfrm>
-            <a:off x="822960" y="4059936"/>
+            <a:off x="822960" y="4334256"/>
             <a:ext cx="10789920" cy="320040"/>
           </a:xfrm>
           <a:prstGeom prst="rect">
@@ -23959,7 +23841,7 @@
         </p:nvSpPr>
         <p:spPr>
           <a:xfrm>
-            <a:off x="548640" y="4507992"/>
+            <a:off x="548640" y="4873752"/>
             <a:ext cx="11064240" cy="320040"/>
           </a:xfrm>
           <a:prstGeom prst="rect">
@@ -23993,7 +23875,7 @@
         </p:nvSpPr>
         <p:spPr>
           <a:xfrm>
-            <a:off x="822960" y="4809744"/>
+            <a:off x="822960" y="5175504"/>
             <a:ext cx="10789920" cy="320040"/>
           </a:xfrm>
           <a:prstGeom prst="rect">
@@ -24143,7 +24025,7 @@
                   <a:srgbClr val="0F3460"/>
                 </a:solidFill>
               </a:rPr>
-              <a:t>48 unit tests across 4 files — all passing locally, no Spark cluster required:</a:t>
+              <a:t>105 unit tests across 9 files — 95 run without Spark; the 10 profiler tests need a local Spark session:</a:t>
             </a:r>
           </a:p>
         </p:txBody>
@@ -24156,7 +24038,7 @@
         </p:nvSpPr>
         <p:spPr>
           <a:xfrm>
-            <a:off x="457200" y="1920240"/>
+            <a:off x="457200" y="1874519"/>
             <a:ext cx="3840480" cy="384048"/>
           </a:xfrm>
           <a:prstGeom prst="rect">
@@ -24199,7 +24081,7 @@
         </p:nvSpPr>
         <p:spPr>
           <a:xfrm>
-            <a:off x="502920" y="1971040"/>
+            <a:off x="502920" y="1925319"/>
             <a:ext cx="3749040" cy="384048"/>
           </a:xfrm>
           <a:prstGeom prst="rect">
@@ -24215,7 +24097,7 @@
           <a:p>
             <a:pPr algn="l"/>
             <a:r>
-              <a:rPr sz="1400" b="1" i="0">
+              <a:rPr sz="1100" b="1" i="0">
                 <a:solidFill>
                   <a:srgbClr val="FFFFFF"/>
                 </a:solidFill>
@@ -24233,8 +24115,8 @@
         </p:nvSpPr>
         <p:spPr>
           <a:xfrm>
-            <a:off x="4297680" y="1920240"/>
-            <a:ext cx="1005840" cy="384048"/>
+            <a:off x="4297680" y="1874519"/>
+            <a:ext cx="914400" cy="384048"/>
           </a:xfrm>
           <a:prstGeom prst="rect">
             <a:avLst/>
@@ -24276,23 +24158,23 @@
         </p:nvSpPr>
         <p:spPr>
           <a:xfrm>
-            <a:off x="4343400" y="1971040"/>
-            <a:ext cx="914400" cy="384048"/>
-          </a:xfrm>
-          <a:prstGeom prst="rect">
-            <a:avLst/>
-          </a:prstGeom>
-          <a:noFill/>
-        </p:spPr>
-        <p:txBody>
-          <a:bodyPr wrap="square">
-            <a:spAutoFit/>
-          </a:bodyPr>
-          <a:lstStyle/>
-          <a:p>
-            <a:pPr algn="l"/>
-            <a:r>
-              <a:rPr sz="1400" b="1" i="0">
+            <a:off x="4343400" y="1925319"/>
+            <a:ext cx="822960" cy="384048"/>
+          </a:xfrm>
+          <a:prstGeom prst="rect">
+            <a:avLst/>
+          </a:prstGeom>
+          <a:noFill/>
+        </p:spPr>
+        <p:txBody>
+          <a:bodyPr wrap="square">
+            <a:spAutoFit/>
+          </a:bodyPr>
+          <a:lstStyle/>
+          <a:p>
+            <a:pPr algn="l"/>
+            <a:r>
+              <a:rPr sz="1100" b="1" i="0">
                 <a:solidFill>
                   <a:srgbClr val="FFFFFF"/>
                 </a:solidFill>
@@ -24310,8 +24192,8 @@
         </p:nvSpPr>
         <p:spPr>
           <a:xfrm>
-            <a:off x="5303520" y="1920240"/>
-            <a:ext cx="6400800" cy="384048"/>
+            <a:off x="5212080" y="1874519"/>
+            <a:ext cx="6492240" cy="384048"/>
           </a:xfrm>
           <a:prstGeom prst="rect">
             <a:avLst/>
@@ -24353,23 +24235,23 @@
         </p:nvSpPr>
         <p:spPr>
           <a:xfrm>
-            <a:off x="5349240" y="1971040"/>
-            <a:ext cx="6309360" cy="384048"/>
-          </a:xfrm>
-          <a:prstGeom prst="rect">
-            <a:avLst/>
-          </a:prstGeom>
-          <a:noFill/>
-        </p:spPr>
-        <p:txBody>
-          <a:bodyPr wrap="square">
-            <a:spAutoFit/>
-          </a:bodyPr>
-          <a:lstStyle/>
-          <a:p>
-            <a:pPr algn="l"/>
-            <a:r>
-              <a:rPr sz="1400" b="1" i="0">
+            <a:off x="5257800" y="1925319"/>
+            <a:ext cx="6400800" cy="384048"/>
+          </a:xfrm>
+          <a:prstGeom prst="rect">
+            <a:avLst/>
+          </a:prstGeom>
+          <a:noFill/>
+        </p:spPr>
+        <p:txBody>
+          <a:bodyPr wrap="square">
+            <a:spAutoFit/>
+          </a:bodyPr>
+          <a:lstStyle/>
+          <a:p>
+            <a:pPr algn="l"/>
+            <a:r>
+              <a:rPr sz="1100" b="1" i="0">
                 <a:solidFill>
                   <a:srgbClr val="FFFFFF"/>
                 </a:solidFill>
@@ -24387,7 +24269,7 @@
         </p:nvSpPr>
         <p:spPr>
           <a:xfrm>
-            <a:off x="457200" y="2304288"/>
+            <a:off x="457200" y="2258567"/>
             <a:ext cx="3840480" cy="347472"/>
           </a:xfrm>
           <a:prstGeom prst="rect">
@@ -24430,7 +24312,7 @@
         </p:nvSpPr>
         <p:spPr>
           <a:xfrm>
-            <a:off x="502920" y="2342388"/>
+            <a:off x="502920" y="2296667"/>
             <a:ext cx="3749040" cy="347472"/>
           </a:xfrm>
           <a:prstGeom prst="rect">
@@ -24446,7 +24328,7 @@
           <a:p>
             <a:pPr algn="l"/>
             <a:r>
-              <a:rPr sz="1300" b="0" i="0">
+              <a:rPr sz="1050" b="0" i="0">
                 <a:solidFill>
                   <a:srgbClr val="333333"/>
                 </a:solidFill>
@@ -24464,8 +24346,8 @@
         </p:nvSpPr>
         <p:spPr>
           <a:xfrm>
-            <a:off x="4297680" y="2304288"/>
-            <a:ext cx="1005840" cy="347472"/>
+            <a:off x="4297680" y="2258567"/>
+            <a:ext cx="914400" cy="347472"/>
           </a:xfrm>
           <a:prstGeom prst="rect">
             <a:avLst/>
@@ -24507,28 +24389,28 @@
         </p:nvSpPr>
         <p:spPr>
           <a:xfrm>
-            <a:off x="4343400" y="2342388"/>
-            <a:ext cx="914400" cy="347472"/>
-          </a:xfrm>
-          <a:prstGeom prst="rect">
-            <a:avLst/>
-          </a:prstGeom>
-          <a:noFill/>
-        </p:spPr>
-        <p:txBody>
-          <a:bodyPr wrap="square">
-            <a:spAutoFit/>
-          </a:bodyPr>
-          <a:lstStyle/>
-          <a:p>
-            <a:pPr algn="l"/>
-            <a:r>
-              <a:rPr sz="1300" b="0" i="0">
+            <a:off x="4343400" y="2296667"/>
+            <a:ext cx="822960" cy="347472"/>
+          </a:xfrm>
+          <a:prstGeom prst="rect">
+            <a:avLst/>
+          </a:prstGeom>
+          <a:noFill/>
+        </p:spPr>
+        <p:txBody>
+          <a:bodyPr wrap="square">
+            <a:spAutoFit/>
+          </a:bodyPr>
+          <a:lstStyle/>
+          <a:p>
+            <a:pPr algn="l"/>
+            <a:r>
+              <a:rPr sz="1050" b="0" i="0">
                 <a:solidFill>
                   <a:srgbClr val="333333"/>
                 </a:solidFill>
               </a:rPr>
-              <a:t>12</a:t>
+              <a:t>10</a:t>
             </a:r>
           </a:p>
         </p:txBody>
@@ -24541,8 +24423,8 @@
         </p:nvSpPr>
         <p:spPr>
           <a:xfrm>
-            <a:off x="5303520" y="2304288"/>
-            <a:ext cx="6400800" cy="347472"/>
+            <a:off x="5212080" y="2258567"/>
+            <a:ext cx="6492240" cy="347472"/>
           </a:xfrm>
           <a:prstGeom prst="rect">
             <a:avLst/>
@@ -24584,28 +24466,28 @@
         </p:nvSpPr>
         <p:spPr>
           <a:xfrm>
-            <a:off x="5349240" y="2342388"/>
-            <a:ext cx="6309360" cy="347472"/>
-          </a:xfrm>
-          <a:prstGeom prst="rect">
-            <a:avLst/>
-          </a:prstGeom>
-          <a:noFill/>
-        </p:spPr>
-        <p:txBody>
-          <a:bodyPr wrap="square">
-            <a:spAutoFit/>
-          </a:bodyPr>
-          <a:lstStyle/>
-          <a:p>
-            <a:pPr algn="l"/>
-            <a:r>
-              <a:rPr sz="1300" b="0" i="0">
+            <a:off x="5257800" y="2296667"/>
+            <a:ext cx="6400800" cy="347472"/>
+          </a:xfrm>
+          <a:prstGeom prst="rect">
+            <a:avLst/>
+          </a:prstGeom>
+          <a:noFill/>
+        </p:spPr>
+        <p:txBody>
+          <a:bodyPr wrap="square">
+            <a:spAutoFit/>
+          </a:bodyPr>
+          <a:lstStyle/>
+          <a:p>
+            <a:pPr algn="l"/>
+            <a:r>
+              <a:rPr sz="1050" b="0" i="0">
                 <a:solidFill>
                   <a:srgbClr val="333333"/>
                 </a:solidFill>
               </a:rPr>
-              <a:t>Column statistics, null detection, distribution analysis</a:t>
+              <a:t>Column statistics, null detection, distinct values (local Spark)</a:t>
             </a:r>
           </a:p>
         </p:txBody>
@@ -24618,7 +24500,7 @@
         </p:nvSpPr>
         <p:spPr>
           <a:xfrm>
-            <a:off x="457200" y="2651760"/>
+            <a:off x="457200" y="2606039"/>
             <a:ext cx="3840480" cy="347472"/>
           </a:xfrm>
           <a:prstGeom prst="rect">
@@ -24661,7 +24543,7 @@
         </p:nvSpPr>
         <p:spPr>
           <a:xfrm>
-            <a:off x="502920" y="2689860"/>
+            <a:off x="502920" y="2644139"/>
             <a:ext cx="3749040" cy="347472"/>
           </a:xfrm>
           <a:prstGeom prst="rect">
@@ -24677,7 +24559,7 @@
           <a:p>
             <a:pPr algn="l"/>
             <a:r>
-              <a:rPr sz="1300" b="0" i="0">
+              <a:rPr sz="1050" b="0" i="0">
                 <a:solidFill>
                   <a:srgbClr val="333333"/>
                 </a:solidFill>
@@ -24695,8 +24577,8 @@
         </p:nvSpPr>
         <p:spPr>
           <a:xfrm>
-            <a:off x="4297680" y="2651760"/>
-            <a:ext cx="1005840" cy="347472"/>
+            <a:off x="4297680" y="2606039"/>
+            <a:ext cx="914400" cy="347472"/>
           </a:xfrm>
           <a:prstGeom prst="rect">
             <a:avLst/>
@@ -24738,28 +24620,28 @@
         </p:nvSpPr>
         <p:spPr>
           <a:xfrm>
-            <a:off x="4343400" y="2689860"/>
-            <a:ext cx="914400" cy="347472"/>
-          </a:xfrm>
-          <a:prstGeom prst="rect">
-            <a:avLst/>
-          </a:prstGeom>
-          <a:noFill/>
-        </p:spPr>
-        <p:txBody>
-          <a:bodyPr wrap="square">
-            <a:spAutoFit/>
-          </a:bodyPr>
-          <a:lstStyle/>
-          <a:p>
-            <a:pPr algn="l"/>
-            <a:r>
-              <a:rPr sz="1300" b="0" i="0">
+            <a:off x="4343400" y="2644139"/>
+            <a:ext cx="822960" cy="347472"/>
+          </a:xfrm>
+          <a:prstGeom prst="rect">
+            <a:avLst/>
+          </a:prstGeom>
+          <a:noFill/>
+        </p:spPr>
+        <p:txBody>
+          <a:bodyPr wrap="square">
+            <a:spAutoFit/>
+          </a:bodyPr>
+          <a:lstStyle/>
+          <a:p>
+            <a:pPr algn="l"/>
+            <a:r>
+              <a:rPr sz="1050" b="0" i="0">
                 <a:solidFill>
                   <a:srgbClr val="333333"/>
                 </a:solidFill>
               </a:rPr>
-              <a:t>18</a:t>
+              <a:t>25</a:t>
             </a:r>
           </a:p>
         </p:txBody>
@@ -24772,8 +24654,8 @@
         </p:nvSpPr>
         <p:spPr>
           <a:xfrm>
-            <a:off x="5303520" y="2651760"/>
-            <a:ext cx="6400800" cy="347472"/>
+            <a:off x="5212080" y="2606039"/>
+            <a:ext cx="6492240" cy="347472"/>
           </a:xfrm>
           <a:prstGeom prst="rect">
             <a:avLst/>
@@ -24815,28 +24697,28 @@
         </p:nvSpPr>
         <p:spPr>
           <a:xfrm>
-            <a:off x="5349240" y="2689860"/>
-            <a:ext cx="6309360" cy="347472"/>
-          </a:xfrm>
-          <a:prstGeom prst="rect">
-            <a:avLst/>
-          </a:prstGeom>
-          <a:noFill/>
-        </p:spPr>
-        <p:txBody>
-          <a:bodyPr wrap="square">
-            <a:spAutoFit/>
-          </a:bodyPr>
-          <a:lstStyle/>
-          <a:p>
-            <a:pPr algn="l"/>
-            <a:r>
-              <a:rPr sz="1300" b="0" i="0">
+            <a:off x="5257800" y="2644139"/>
+            <a:ext cx="6400800" cy="347472"/>
+          </a:xfrm>
+          <a:prstGeom prst="rect">
+            <a:avLst/>
+          </a:prstGeom>
+          <a:noFill/>
+        </p:spPr>
+        <p:txBody>
+          <a:bodyPr wrap="square">
+            <a:spAutoFit/>
+          </a:bodyPr>
+          <a:lstStyle/>
+          <a:p>
+            <a:pPr algn="l"/>
+            <a:r>
+              <a:rPr sz="1050" b="0" i="0">
                 <a:solidFill>
                   <a:srgbClr val="333333"/>
                 </a:solidFill>
               </a:rPr>
-              <a:t>Prompt construction, JSON parse, rule validation</a:t>
+              <a:t>Statistical rules, code-column skipping, ceiling rounding</a:t>
             </a:r>
           </a:p>
         </p:txBody>
@@ -24849,7 +24731,7 @@
         </p:nvSpPr>
         <p:spPr>
           <a:xfrm>
-            <a:off x="457200" y="2999232"/>
+            <a:off x="457200" y="2953511"/>
             <a:ext cx="3840480" cy="347472"/>
           </a:xfrm>
           <a:prstGeom prst="rect">
@@ -24892,7 +24774,7 @@
         </p:nvSpPr>
         <p:spPr>
           <a:xfrm>
-            <a:off x="502920" y="3037332"/>
+            <a:off x="502920" y="2991611"/>
             <a:ext cx="3749040" cy="347472"/>
           </a:xfrm>
           <a:prstGeom prst="rect">
@@ -24908,12 +24790,12 @@
           <a:p>
             <a:pPr algn="l"/>
             <a:r>
-              <a:rPr sz="1300" b="0" i="0">
+              <a:rPr sz="1050" b="0" i="0">
                 <a:solidFill>
                   <a:srgbClr val="333333"/>
                 </a:solidFill>
               </a:rPr>
-              <a:t>tests/test_rule_metrics.py</a:t>
+              <a:t>tests/test_rule_writer.py</a:t>
             </a:r>
           </a:p>
         </p:txBody>
@@ -24926,8 +24808,8 @@
         </p:nvSpPr>
         <p:spPr>
           <a:xfrm>
-            <a:off x="4297680" y="2999232"/>
-            <a:ext cx="1005840" cy="347472"/>
+            <a:off x="4297680" y="2953511"/>
+            <a:ext cx="914400" cy="347472"/>
           </a:xfrm>
           <a:prstGeom prst="rect">
             <a:avLst/>
@@ -24969,28 +24851,28 @@
         </p:nvSpPr>
         <p:spPr>
           <a:xfrm>
-            <a:off x="4343400" y="3037332"/>
-            <a:ext cx="914400" cy="347472"/>
-          </a:xfrm>
-          <a:prstGeom prst="rect">
-            <a:avLst/>
-          </a:prstGeom>
-          <a:noFill/>
-        </p:spPr>
-        <p:txBody>
-          <a:bodyPr wrap="square">
-            <a:spAutoFit/>
-          </a:bodyPr>
-          <a:lstStyle/>
-          <a:p>
-            <a:pPr algn="l"/>
-            <a:r>
-              <a:rPr sz="1300" b="0" i="0">
+            <a:off x="4343400" y="2991611"/>
+            <a:ext cx="822960" cy="347472"/>
+          </a:xfrm>
+          <a:prstGeom prst="rect">
+            <a:avLst/>
+          </a:prstGeom>
+          <a:noFill/>
+        </p:spPr>
+        <p:txBody>
+          <a:bodyPr wrap="square">
+            <a:spAutoFit/>
+          </a:bodyPr>
+          <a:lstStyle/>
+          <a:p>
+            <a:pPr algn="l"/>
+            <a:r>
+              <a:rPr sz="1050" b="0" i="0">
                 <a:solidFill>
                   <a:srgbClr val="333333"/>
                 </a:solidFill>
               </a:rPr>
-              <a:t>9</a:t>
+              <a:t>11</a:t>
             </a:r>
           </a:p>
         </p:txBody>
@@ -25003,8 +24885,8 @@
         </p:nvSpPr>
         <p:spPr>
           <a:xfrm>
-            <a:off x="5303520" y="2999232"/>
-            <a:ext cx="6400800" cy="347472"/>
+            <a:off x="5212080" y="2953511"/>
+            <a:ext cx="6492240" cy="347472"/>
           </a:xfrm>
           <a:prstGeom prst="rect">
             <a:avLst/>
@@ -25046,28 +24928,28 @@
         </p:nvSpPr>
         <p:spPr>
           <a:xfrm>
-            <a:off x="5349240" y="3037332"/>
-            <a:ext cx="6309360" cy="347472"/>
-          </a:xfrm>
-          <a:prstGeom prst="rect">
-            <a:avLst/>
-          </a:prstGeom>
-          <a:noFill/>
-        </p:spPr>
-        <p:txBody>
-          <a:bodyPr wrap="square">
-            <a:spAutoFit/>
-          </a:bodyPr>
-          <a:lstStyle/>
-          <a:p>
-            <a:pPr algn="l"/>
-            <a:r>
-              <a:rPr sz="1300" b="0" i="0">
+            <a:off x="5257800" y="2991611"/>
+            <a:ext cx="6400800" cy="347472"/>
+          </a:xfrm>
+          <a:prstGeom prst="rect">
+            <a:avLst/>
+          </a:prstGeom>
+          <a:noFill/>
+        </p:spPr>
+        <p:txBody>
+          <a:bodyPr wrap="square">
+            <a:spAutoFit/>
+          </a:bodyPr>
+          <a:lstStyle/>
+          <a:p>
+            <a:pPr algn="l"/>
+            <a:r>
+              <a:rPr sz="1050" b="0" i="0">
                 <a:solidFill>
                   <a:srgbClr val="333333"/>
                 </a:solidFill>
               </a:rPr>
-              <a:t>Metrics dict building, violation % calc, write path</a:t>
+              <a:t>DQX-name translation on promotion, duplicate filtering</a:t>
             </a:r>
           </a:p>
         </p:txBody>
@@ -25080,7 +24962,7 @@
         </p:nvSpPr>
         <p:spPr>
           <a:xfrm>
-            <a:off x="457200" y="3346704"/>
+            <a:off x="457200" y="3300983"/>
             <a:ext cx="3840480" cy="347472"/>
           </a:xfrm>
           <a:prstGeom prst="rect">
@@ -25123,7 +25005,7 @@
         </p:nvSpPr>
         <p:spPr>
           <a:xfrm>
-            <a:off x="502920" y="3384804"/>
+            <a:off x="502920" y="3339083"/>
             <a:ext cx="3749040" cy="347472"/>
           </a:xfrm>
           <a:prstGeom prst="rect">
@@ -25139,12 +25021,12 @@
           <a:p>
             <a:pPr algn="l"/>
             <a:r>
-              <a:rPr sz="1300" b="0" i="0">
+              <a:rPr sz="1050" b="0" i="0">
                 <a:solidFill>
                   <a:srgbClr val="333333"/>
                 </a:solidFill>
               </a:rPr>
-              <a:t>tests/test_rule_writer.py</a:t>
+              <a:t>tests/test_rule_seed.py</a:t>
             </a:r>
           </a:p>
         </p:txBody>
@@ -25157,8 +25039,8 @@
         </p:nvSpPr>
         <p:spPr>
           <a:xfrm>
-            <a:off x="4297680" y="3346704"/>
-            <a:ext cx="1005840" cy="347472"/>
+            <a:off x="4297680" y="3300983"/>
+            <a:ext cx="914400" cy="347472"/>
           </a:xfrm>
           <a:prstGeom prst="rect">
             <a:avLst/>
@@ -25200,28 +25082,28 @@
         </p:nvSpPr>
         <p:spPr>
           <a:xfrm>
-            <a:off x="4343400" y="3384804"/>
-            <a:ext cx="914400" cy="347472"/>
-          </a:xfrm>
-          <a:prstGeom prst="rect">
-            <a:avLst/>
-          </a:prstGeom>
-          <a:noFill/>
-        </p:spPr>
-        <p:txBody>
-          <a:bodyPr wrap="square">
-            <a:spAutoFit/>
-          </a:bodyPr>
-          <a:lstStyle/>
-          <a:p>
-            <a:pPr algn="l"/>
-            <a:r>
-              <a:rPr sz="1300" b="0" i="0">
+            <a:off x="4343400" y="3339083"/>
+            <a:ext cx="822960" cy="347472"/>
+          </a:xfrm>
+          <a:prstGeom prst="rect">
+            <a:avLst/>
+          </a:prstGeom>
+          <a:noFill/>
+        </p:spPr>
+        <p:txBody>
+          <a:bodyPr wrap="square">
+            <a:spAutoFit/>
+          </a:bodyPr>
+          <a:lstStyle/>
+          <a:p>
+            <a:pPr algn="l"/>
+            <a:r>
+              <a:rPr sz="1050" b="0" i="0">
                 <a:solidFill>
                   <a:srgbClr val="333333"/>
                 </a:solidFill>
               </a:rPr>
-              <a:t>9</a:t>
+              <a:t>7</a:t>
             </a:r>
           </a:p>
         </p:txBody>
@@ -25234,8 +25116,8 @@
         </p:nvSpPr>
         <p:spPr>
           <a:xfrm>
-            <a:off x="5303520" y="3346704"/>
-            <a:ext cx="6400800" cy="347472"/>
+            <a:off x="5212080" y="3300983"/>
+            <a:ext cx="6492240" cy="347472"/>
           </a:xfrm>
           <a:prstGeom prst="rect">
             <a:avLst/>
@@ -25277,28 +25159,28 @@
         </p:nvSpPr>
         <p:spPr>
           <a:xfrm>
-            <a:off x="5349240" y="3384804"/>
-            <a:ext cx="6309360" cy="347472"/>
-          </a:xfrm>
-          <a:prstGeom prst="rect">
-            <a:avLst/>
-          </a:prstGeom>
-          <a:noFill/>
-        </p:spPr>
-        <p:txBody>
-          <a:bodyPr wrap="square">
-            <a:spAutoFit/>
-          </a:bodyPr>
-          <a:lstStyle/>
-          <a:p>
-            <a:pPr algn="l"/>
-            <a:r>
-              <a:rPr sz="1300" b="0" i="0">
+            <a:off x="5257800" y="3339083"/>
+            <a:ext cx="6400800" cy="347472"/>
+          </a:xfrm>
+          <a:prstGeom prst="rect">
+            <a:avLst/>
+          </a:prstGeom>
+          <a:noFill/>
+        </p:spPr>
+        <p:txBody>
+          <a:bodyPr wrap="square">
+            <a:spAutoFit/>
+          </a:bodyPr>
+          <a:lstStyle/>
+          <a:p>
+            <a:pPr algn="l"/>
+            <a:r>
+              <a:rPr sz="1050" b="0" i="0">
                 <a:solidFill>
                   <a:srgbClr val="333333"/>
                 </a:solidFill>
               </a:rPr>
-              <a:t>Staging insert, approve/reject lifecycle, registry promotion</a:t>
+              <a:t>YAML → DQX-native check conversion for every rule type</a:t>
             </a:r>
           </a:p>
         </p:txBody>
@@ -25311,14 +25193,14 @@
         </p:nvSpPr>
         <p:spPr>
           <a:xfrm>
-            <a:off x="457200" y="3566160"/>
-            <a:ext cx="4572000" cy="1097280"/>
-          </a:xfrm>
-          <a:prstGeom prst="rect">
-            <a:avLst/>
-          </a:prstGeom>
-          <a:solidFill>
-            <a:srgbClr val="1E1E2E"/>
+            <a:off x="457200" y="3648455"/>
+            <a:ext cx="3840480" cy="347472"/>
+          </a:xfrm>
+          <a:prstGeom prst="rect">
+            <a:avLst/>
+          </a:prstGeom>
+          <a:solidFill>
+            <a:srgbClr val="F7F9FC"/>
           </a:solidFill>
           <a:ln>
             <a:noFill/>
@@ -25348,20 +25230,54 @@
       </p:sp>
       <p:sp>
         <p:nvSpPr>
-          <p:cNvPr id="36" name="Rectangle 35"/>
-          <p:cNvSpPr/>
-          <p:nvPr/>
-        </p:nvSpPr>
-        <p:spPr>
-          <a:xfrm>
-            <a:off x="457200" y="3566160"/>
-            <a:ext cx="50800" cy="1097280"/>
-          </a:xfrm>
-          <a:prstGeom prst="rect">
-            <a:avLst/>
-          </a:prstGeom>
-          <a:solidFill>
-            <a:srgbClr val="E94560"/>
+          <p:cNvPr id="36" name="TextBox 35"/>
+          <p:cNvSpPr txBox="1"/>
+          <p:nvPr/>
+        </p:nvSpPr>
+        <p:spPr>
+          <a:xfrm>
+            <a:off x="502920" y="3686555"/>
+            <a:ext cx="3749040" cy="347472"/>
+          </a:xfrm>
+          <a:prstGeom prst="rect">
+            <a:avLst/>
+          </a:prstGeom>
+          <a:noFill/>
+        </p:spPr>
+        <p:txBody>
+          <a:bodyPr wrap="square">
+            <a:spAutoFit/>
+          </a:bodyPr>
+          <a:lstStyle/>
+          <a:p>
+            <a:pPr algn="l"/>
+            <a:r>
+              <a:rPr sz="1050" b="0" i="0">
+                <a:solidFill>
+                  <a:srgbClr val="333333"/>
+                </a:solidFill>
+              </a:rPr>
+              <a:t>tests/test_quarantine_analyzer.py</a:t>
+            </a:r>
+          </a:p>
+        </p:txBody>
+      </p:sp>
+      <p:sp>
+        <p:nvSpPr>
+          <p:cNvPr id="37" name="Rectangle 36"/>
+          <p:cNvSpPr/>
+          <p:nvPr/>
+        </p:nvSpPr>
+        <p:spPr>
+          <a:xfrm>
+            <a:off x="4297680" y="3648455"/>
+            <a:ext cx="914400" cy="347472"/>
+          </a:xfrm>
+          <a:prstGeom prst="rect">
+            <a:avLst/>
+          </a:prstGeom>
+          <a:solidFill>
+            <a:srgbClr val="F7F9FC"/>
           </a:solidFill>
           <a:ln>
             <a:noFill/>
@@ -25391,14 +25307,1135 @@
       </p:sp>
       <p:sp>
         <p:nvSpPr>
-          <p:cNvPr id="37" name="TextBox 36"/>
-          <p:cNvSpPr txBox="1"/>
-          <p:nvPr/>
-        </p:nvSpPr>
-        <p:spPr>
-          <a:xfrm>
-            <a:off x="566928" y="3657600"/>
-            <a:ext cx="4407408" cy="914400"/>
+          <p:cNvPr id="38" name="TextBox 37"/>
+          <p:cNvSpPr txBox="1"/>
+          <p:nvPr/>
+        </p:nvSpPr>
+        <p:spPr>
+          <a:xfrm>
+            <a:off x="4343400" y="3686555"/>
+            <a:ext cx="822960" cy="347472"/>
+          </a:xfrm>
+          <a:prstGeom prst="rect">
+            <a:avLst/>
+          </a:prstGeom>
+          <a:noFill/>
+        </p:spPr>
+        <p:txBody>
+          <a:bodyPr wrap="square">
+            <a:spAutoFit/>
+          </a:bodyPr>
+          <a:lstStyle/>
+          <a:p>
+            <a:pPr algn="l"/>
+            <a:r>
+              <a:rPr sz="1050" b="0" i="0">
+                <a:solidFill>
+                  <a:srgbClr val="333333"/>
+                </a:solidFill>
+              </a:rPr>
+              <a:t>14</a:t>
+            </a:r>
+          </a:p>
+        </p:txBody>
+      </p:sp>
+      <p:sp>
+        <p:nvSpPr>
+          <p:cNvPr id="39" name="Rectangle 38"/>
+          <p:cNvSpPr/>
+          <p:nvPr/>
+        </p:nvSpPr>
+        <p:spPr>
+          <a:xfrm>
+            <a:off x="5212080" y="3648455"/>
+            <a:ext cx="6492240" cy="347472"/>
+          </a:xfrm>
+          <a:prstGeom prst="rect">
+            <a:avLst/>
+          </a:prstGeom>
+          <a:solidFill>
+            <a:srgbClr val="F7F9FC"/>
+          </a:solidFill>
+          <a:ln>
+            <a:noFill/>
+          </a:ln>
+        </p:spPr>
+        <p:style>
+          <a:lnRef idx="1">
+            <a:schemeClr val="accent1"/>
+          </a:lnRef>
+          <a:fillRef idx="3">
+            <a:schemeClr val="accent1"/>
+          </a:fillRef>
+          <a:effectRef idx="2">
+            <a:schemeClr val="accent1"/>
+          </a:effectRef>
+          <a:fontRef idx="minor">
+            <a:schemeClr val="lt1"/>
+          </a:fontRef>
+        </p:style>
+        <p:txBody>
+          <a:bodyPr rtlCol="0" anchor="ctr"/>
+          <a:lstStyle/>
+          <a:p>
+            <a:pPr algn="ctr"/>
+          </a:p>
+        </p:txBody>
+      </p:sp>
+      <p:sp>
+        <p:nvSpPr>
+          <p:cNvPr id="40" name="TextBox 39"/>
+          <p:cNvSpPr txBox="1"/>
+          <p:nvPr/>
+        </p:nvSpPr>
+        <p:spPr>
+          <a:xfrm>
+            <a:off x="5257800" y="3686555"/>
+            <a:ext cx="6400800" cy="347472"/>
+          </a:xfrm>
+          <a:prstGeom prst="rect">
+            <a:avLst/>
+          </a:prstGeom>
+          <a:noFill/>
+        </p:spPr>
+        <p:txBody>
+          <a:bodyPr wrap="square">
+            <a:spAutoFit/>
+          </a:bodyPr>
+          <a:lstStyle/>
+          <a:p>
+            <a:pPr algn="l"/>
+            <a:r>
+              <a:rPr sz="1050" b="0" i="0">
+                <a:solidFill>
+                  <a:srgbClr val="333333"/>
+                </a:solidFill>
+              </a:rPr>
+              <a:t>Prompt construction, JSON parsing, rule validation</a:t>
+            </a:r>
+          </a:p>
+        </p:txBody>
+      </p:sp>
+      <p:sp>
+        <p:nvSpPr>
+          <p:cNvPr id="41" name="Rectangle 40"/>
+          <p:cNvSpPr/>
+          <p:nvPr/>
+        </p:nvSpPr>
+        <p:spPr>
+          <a:xfrm>
+            <a:off x="457200" y="3995927"/>
+            <a:ext cx="3840480" cy="347472"/>
+          </a:xfrm>
+          <a:prstGeom prst="rect">
+            <a:avLst/>
+          </a:prstGeom>
+          <a:solidFill>
+            <a:srgbClr val="FFFFFF"/>
+          </a:solidFill>
+          <a:ln>
+            <a:noFill/>
+          </a:ln>
+        </p:spPr>
+        <p:style>
+          <a:lnRef idx="1">
+            <a:schemeClr val="accent1"/>
+          </a:lnRef>
+          <a:fillRef idx="3">
+            <a:schemeClr val="accent1"/>
+          </a:fillRef>
+          <a:effectRef idx="2">
+            <a:schemeClr val="accent1"/>
+          </a:effectRef>
+          <a:fontRef idx="minor">
+            <a:schemeClr val="lt1"/>
+          </a:fontRef>
+        </p:style>
+        <p:txBody>
+          <a:bodyPr rtlCol="0" anchor="ctr"/>
+          <a:lstStyle/>
+          <a:p>
+            <a:pPr algn="ctr"/>
+          </a:p>
+        </p:txBody>
+      </p:sp>
+      <p:sp>
+        <p:nvSpPr>
+          <p:cNvPr id="42" name="TextBox 41"/>
+          <p:cNvSpPr txBox="1"/>
+          <p:nvPr/>
+        </p:nvSpPr>
+        <p:spPr>
+          <a:xfrm>
+            <a:off x="502920" y="4034027"/>
+            <a:ext cx="3749040" cy="347472"/>
+          </a:xfrm>
+          <a:prstGeom prst="rect">
+            <a:avLst/>
+          </a:prstGeom>
+          <a:noFill/>
+        </p:spPr>
+        <p:txBody>
+          <a:bodyPr wrap="square">
+            <a:spAutoFit/>
+          </a:bodyPr>
+          <a:lstStyle/>
+          <a:p>
+            <a:pPr algn="l"/>
+            <a:r>
+              <a:rPr sz="1050" b="0" i="0">
+                <a:solidFill>
+                  <a:srgbClr val="333333"/>
+                </a:solidFill>
+              </a:rPr>
+              <a:t>tests/test_rule_metrics.py</a:t>
+            </a:r>
+          </a:p>
+        </p:txBody>
+      </p:sp>
+      <p:sp>
+        <p:nvSpPr>
+          <p:cNvPr id="43" name="Rectangle 42"/>
+          <p:cNvSpPr/>
+          <p:nvPr/>
+        </p:nvSpPr>
+        <p:spPr>
+          <a:xfrm>
+            <a:off x="4297680" y="3995927"/>
+            <a:ext cx="914400" cy="347472"/>
+          </a:xfrm>
+          <a:prstGeom prst="rect">
+            <a:avLst/>
+          </a:prstGeom>
+          <a:solidFill>
+            <a:srgbClr val="FFFFFF"/>
+          </a:solidFill>
+          <a:ln>
+            <a:noFill/>
+          </a:ln>
+        </p:spPr>
+        <p:style>
+          <a:lnRef idx="1">
+            <a:schemeClr val="accent1"/>
+          </a:lnRef>
+          <a:fillRef idx="3">
+            <a:schemeClr val="accent1"/>
+          </a:fillRef>
+          <a:effectRef idx="2">
+            <a:schemeClr val="accent1"/>
+          </a:effectRef>
+          <a:fontRef idx="minor">
+            <a:schemeClr val="lt1"/>
+          </a:fontRef>
+        </p:style>
+        <p:txBody>
+          <a:bodyPr rtlCol="0" anchor="ctr"/>
+          <a:lstStyle/>
+          <a:p>
+            <a:pPr algn="ctr"/>
+          </a:p>
+        </p:txBody>
+      </p:sp>
+      <p:sp>
+        <p:nvSpPr>
+          <p:cNvPr id="44" name="TextBox 43"/>
+          <p:cNvSpPr txBox="1"/>
+          <p:nvPr/>
+        </p:nvSpPr>
+        <p:spPr>
+          <a:xfrm>
+            <a:off x="4343400" y="4034027"/>
+            <a:ext cx="822960" cy="347472"/>
+          </a:xfrm>
+          <a:prstGeom prst="rect">
+            <a:avLst/>
+          </a:prstGeom>
+          <a:noFill/>
+        </p:spPr>
+        <p:txBody>
+          <a:bodyPr wrap="square">
+            <a:spAutoFit/>
+          </a:bodyPr>
+          <a:lstStyle/>
+          <a:p>
+            <a:pPr algn="l"/>
+            <a:r>
+              <a:rPr sz="1050" b="0" i="0">
+                <a:solidFill>
+                  <a:srgbClr val="333333"/>
+                </a:solidFill>
+              </a:rPr>
+              <a:t>9</a:t>
+            </a:r>
+          </a:p>
+        </p:txBody>
+      </p:sp>
+      <p:sp>
+        <p:nvSpPr>
+          <p:cNvPr id="45" name="Rectangle 44"/>
+          <p:cNvSpPr/>
+          <p:nvPr/>
+        </p:nvSpPr>
+        <p:spPr>
+          <a:xfrm>
+            <a:off x="5212080" y="3995927"/>
+            <a:ext cx="6492240" cy="347472"/>
+          </a:xfrm>
+          <a:prstGeom prst="rect">
+            <a:avLst/>
+          </a:prstGeom>
+          <a:solidFill>
+            <a:srgbClr val="FFFFFF"/>
+          </a:solidFill>
+          <a:ln>
+            <a:noFill/>
+          </a:ln>
+        </p:spPr>
+        <p:style>
+          <a:lnRef idx="1">
+            <a:schemeClr val="accent1"/>
+          </a:lnRef>
+          <a:fillRef idx="3">
+            <a:schemeClr val="accent1"/>
+          </a:fillRef>
+          <a:effectRef idx="2">
+            <a:schemeClr val="accent1"/>
+          </a:effectRef>
+          <a:fontRef idx="minor">
+            <a:schemeClr val="lt1"/>
+          </a:fontRef>
+        </p:style>
+        <p:txBody>
+          <a:bodyPr rtlCol="0" anchor="ctr"/>
+          <a:lstStyle/>
+          <a:p>
+            <a:pPr algn="ctr"/>
+          </a:p>
+        </p:txBody>
+      </p:sp>
+      <p:sp>
+        <p:nvSpPr>
+          <p:cNvPr id="46" name="TextBox 45"/>
+          <p:cNvSpPr txBox="1"/>
+          <p:nvPr/>
+        </p:nvSpPr>
+        <p:spPr>
+          <a:xfrm>
+            <a:off x="5257800" y="4034027"/>
+            <a:ext cx="6400800" cy="347472"/>
+          </a:xfrm>
+          <a:prstGeom prst="rect">
+            <a:avLst/>
+          </a:prstGeom>
+          <a:noFill/>
+        </p:spPr>
+        <p:txBody>
+          <a:bodyPr wrap="square">
+            <a:spAutoFit/>
+          </a:bodyPr>
+          <a:lstStyle/>
+          <a:p>
+            <a:pPr algn="l"/>
+            <a:r>
+              <a:rPr sz="1050" b="0" i="0">
+                <a:solidFill>
+                  <a:srgbClr val="333333"/>
+                </a:solidFill>
+              </a:rPr>
+              <a:t>Metrics building, violation % calculation, write path</a:t>
+            </a:r>
+          </a:p>
+        </p:txBody>
+      </p:sp>
+      <p:sp>
+        <p:nvSpPr>
+          <p:cNvPr id="47" name="Rectangle 46"/>
+          <p:cNvSpPr/>
+          <p:nvPr/>
+        </p:nvSpPr>
+        <p:spPr>
+          <a:xfrm>
+            <a:off x="457200" y="4343399"/>
+            <a:ext cx="3840480" cy="347472"/>
+          </a:xfrm>
+          <a:prstGeom prst="rect">
+            <a:avLst/>
+          </a:prstGeom>
+          <a:solidFill>
+            <a:srgbClr val="F7F9FC"/>
+          </a:solidFill>
+          <a:ln>
+            <a:noFill/>
+          </a:ln>
+        </p:spPr>
+        <p:style>
+          <a:lnRef idx="1">
+            <a:schemeClr val="accent1"/>
+          </a:lnRef>
+          <a:fillRef idx="3">
+            <a:schemeClr val="accent1"/>
+          </a:fillRef>
+          <a:effectRef idx="2">
+            <a:schemeClr val="accent1"/>
+          </a:effectRef>
+          <a:fontRef idx="minor">
+            <a:schemeClr val="lt1"/>
+          </a:fontRef>
+        </p:style>
+        <p:txBody>
+          <a:bodyPr rtlCol="0" anchor="ctr"/>
+          <a:lstStyle/>
+          <a:p>
+            <a:pPr algn="ctr"/>
+          </a:p>
+        </p:txBody>
+      </p:sp>
+      <p:sp>
+        <p:nvSpPr>
+          <p:cNvPr id="48" name="TextBox 47"/>
+          <p:cNvSpPr txBox="1"/>
+          <p:nvPr/>
+        </p:nvSpPr>
+        <p:spPr>
+          <a:xfrm>
+            <a:off x="502920" y="4381499"/>
+            <a:ext cx="3749040" cy="347472"/>
+          </a:xfrm>
+          <a:prstGeom prst="rect">
+            <a:avLst/>
+          </a:prstGeom>
+          <a:noFill/>
+        </p:spPr>
+        <p:txBody>
+          <a:bodyPr wrap="square">
+            <a:spAutoFit/>
+          </a:bodyPr>
+          <a:lstStyle/>
+          <a:p>
+            <a:pPr algn="l"/>
+            <a:r>
+              <a:rPr sz="1050" b="0" i="0">
+                <a:solidFill>
+                  <a:srgbClr val="333333"/>
+                </a:solidFill>
+              </a:rPr>
+              <a:t>tests/test_alerting.py</a:t>
+            </a:r>
+          </a:p>
+        </p:txBody>
+      </p:sp>
+      <p:sp>
+        <p:nvSpPr>
+          <p:cNvPr id="49" name="Rectangle 48"/>
+          <p:cNvSpPr/>
+          <p:nvPr/>
+        </p:nvSpPr>
+        <p:spPr>
+          <a:xfrm>
+            <a:off x="4297680" y="4343399"/>
+            <a:ext cx="914400" cy="347472"/>
+          </a:xfrm>
+          <a:prstGeom prst="rect">
+            <a:avLst/>
+          </a:prstGeom>
+          <a:solidFill>
+            <a:srgbClr val="F7F9FC"/>
+          </a:solidFill>
+          <a:ln>
+            <a:noFill/>
+          </a:ln>
+        </p:spPr>
+        <p:style>
+          <a:lnRef idx="1">
+            <a:schemeClr val="accent1"/>
+          </a:lnRef>
+          <a:fillRef idx="3">
+            <a:schemeClr val="accent1"/>
+          </a:fillRef>
+          <a:effectRef idx="2">
+            <a:schemeClr val="accent1"/>
+          </a:effectRef>
+          <a:fontRef idx="minor">
+            <a:schemeClr val="lt1"/>
+          </a:fontRef>
+        </p:style>
+        <p:txBody>
+          <a:bodyPr rtlCol="0" anchor="ctr"/>
+          <a:lstStyle/>
+          <a:p>
+            <a:pPr algn="ctr"/>
+          </a:p>
+        </p:txBody>
+      </p:sp>
+      <p:sp>
+        <p:nvSpPr>
+          <p:cNvPr id="50" name="TextBox 49"/>
+          <p:cNvSpPr txBox="1"/>
+          <p:nvPr/>
+        </p:nvSpPr>
+        <p:spPr>
+          <a:xfrm>
+            <a:off x="4343400" y="4381499"/>
+            <a:ext cx="822960" cy="347472"/>
+          </a:xfrm>
+          <a:prstGeom prst="rect">
+            <a:avLst/>
+          </a:prstGeom>
+          <a:noFill/>
+        </p:spPr>
+        <p:txBody>
+          <a:bodyPr wrap="square">
+            <a:spAutoFit/>
+          </a:bodyPr>
+          <a:lstStyle/>
+          <a:p>
+            <a:pPr algn="l"/>
+            <a:r>
+              <a:rPr sz="1050" b="0" i="0">
+                <a:solidFill>
+                  <a:srgbClr val="333333"/>
+                </a:solidFill>
+              </a:rPr>
+              <a:t>11</a:t>
+            </a:r>
+          </a:p>
+        </p:txBody>
+      </p:sp>
+      <p:sp>
+        <p:nvSpPr>
+          <p:cNvPr id="51" name="Rectangle 50"/>
+          <p:cNvSpPr/>
+          <p:nvPr/>
+        </p:nvSpPr>
+        <p:spPr>
+          <a:xfrm>
+            <a:off x="5212080" y="4343399"/>
+            <a:ext cx="6492240" cy="347472"/>
+          </a:xfrm>
+          <a:prstGeom prst="rect">
+            <a:avLst/>
+          </a:prstGeom>
+          <a:solidFill>
+            <a:srgbClr val="F7F9FC"/>
+          </a:solidFill>
+          <a:ln>
+            <a:noFill/>
+          </a:ln>
+        </p:spPr>
+        <p:style>
+          <a:lnRef idx="1">
+            <a:schemeClr val="accent1"/>
+          </a:lnRef>
+          <a:fillRef idx="3">
+            <a:schemeClr val="accent1"/>
+          </a:fillRef>
+          <a:effectRef idx="2">
+            <a:schemeClr val="accent1"/>
+          </a:effectRef>
+          <a:fontRef idx="minor">
+            <a:schemeClr val="lt1"/>
+          </a:fontRef>
+        </p:style>
+        <p:txBody>
+          <a:bodyPr rtlCol="0" anchor="ctr"/>
+          <a:lstStyle/>
+          <a:p>
+            <a:pPr algn="ctr"/>
+          </a:p>
+        </p:txBody>
+      </p:sp>
+      <p:sp>
+        <p:nvSpPr>
+          <p:cNvPr id="52" name="TextBox 51"/>
+          <p:cNvSpPr txBox="1"/>
+          <p:nvPr/>
+        </p:nvSpPr>
+        <p:spPr>
+          <a:xfrm>
+            <a:off x="5257800" y="4381499"/>
+            <a:ext cx="6400800" cy="347472"/>
+          </a:xfrm>
+          <a:prstGeom prst="rect">
+            <a:avLst/>
+          </a:prstGeom>
+          <a:noFill/>
+        </p:spPr>
+        <p:txBody>
+          <a:bodyPr wrap="square">
+            <a:spAutoFit/>
+          </a:bodyPr>
+          <a:lstStyle/>
+          <a:p>
+            <a:pPr algn="l"/>
+            <a:r>
+              <a:rPr sz="1050" b="0" i="0">
+                <a:solidFill>
+                  <a:srgbClr val="333333"/>
+                </a:solidFill>
+              </a:rPr>
+              <a:t>Spike detection, Slack payload and delivery, orchestration</a:t>
+            </a:r>
+          </a:p>
+        </p:txBody>
+      </p:sp>
+      <p:sp>
+        <p:nvSpPr>
+          <p:cNvPr id="53" name="Rectangle 52"/>
+          <p:cNvSpPr/>
+          <p:nvPr/>
+        </p:nvSpPr>
+        <p:spPr>
+          <a:xfrm>
+            <a:off x="457200" y="4690871"/>
+            <a:ext cx="3840480" cy="347472"/>
+          </a:xfrm>
+          <a:prstGeom prst="rect">
+            <a:avLst/>
+          </a:prstGeom>
+          <a:solidFill>
+            <a:srgbClr val="FFFFFF"/>
+          </a:solidFill>
+          <a:ln>
+            <a:noFill/>
+          </a:ln>
+        </p:spPr>
+        <p:style>
+          <a:lnRef idx="1">
+            <a:schemeClr val="accent1"/>
+          </a:lnRef>
+          <a:fillRef idx="3">
+            <a:schemeClr val="accent1"/>
+          </a:fillRef>
+          <a:effectRef idx="2">
+            <a:schemeClr val="accent1"/>
+          </a:effectRef>
+          <a:fontRef idx="minor">
+            <a:schemeClr val="lt1"/>
+          </a:fontRef>
+        </p:style>
+        <p:txBody>
+          <a:bodyPr rtlCol="0" anchor="ctr"/>
+          <a:lstStyle/>
+          <a:p>
+            <a:pPr algn="ctr"/>
+          </a:p>
+        </p:txBody>
+      </p:sp>
+      <p:sp>
+        <p:nvSpPr>
+          <p:cNvPr id="54" name="TextBox 53"/>
+          <p:cNvSpPr txBox="1"/>
+          <p:nvPr/>
+        </p:nvSpPr>
+        <p:spPr>
+          <a:xfrm>
+            <a:off x="502920" y="4728971"/>
+            <a:ext cx="3749040" cy="347472"/>
+          </a:xfrm>
+          <a:prstGeom prst="rect">
+            <a:avLst/>
+          </a:prstGeom>
+          <a:noFill/>
+        </p:spPr>
+        <p:txBody>
+          <a:bodyPr wrap="square">
+            <a:spAutoFit/>
+          </a:bodyPr>
+          <a:lstStyle/>
+          <a:p>
+            <a:pPr algn="l"/>
+            <a:r>
+              <a:rPr sz="1050" b="0" i="0">
+                <a:solidFill>
+                  <a:srgbClr val="333333"/>
+                </a:solidFill>
+              </a:rPr>
+              <a:t>tests/test_config.py</a:t>
+            </a:r>
+          </a:p>
+        </p:txBody>
+      </p:sp>
+      <p:sp>
+        <p:nvSpPr>
+          <p:cNvPr id="55" name="Rectangle 54"/>
+          <p:cNvSpPr/>
+          <p:nvPr/>
+        </p:nvSpPr>
+        <p:spPr>
+          <a:xfrm>
+            <a:off x="4297680" y="4690871"/>
+            <a:ext cx="914400" cy="347472"/>
+          </a:xfrm>
+          <a:prstGeom prst="rect">
+            <a:avLst/>
+          </a:prstGeom>
+          <a:solidFill>
+            <a:srgbClr val="FFFFFF"/>
+          </a:solidFill>
+          <a:ln>
+            <a:noFill/>
+          </a:ln>
+        </p:spPr>
+        <p:style>
+          <a:lnRef idx="1">
+            <a:schemeClr val="accent1"/>
+          </a:lnRef>
+          <a:fillRef idx="3">
+            <a:schemeClr val="accent1"/>
+          </a:fillRef>
+          <a:effectRef idx="2">
+            <a:schemeClr val="accent1"/>
+          </a:effectRef>
+          <a:fontRef idx="minor">
+            <a:schemeClr val="lt1"/>
+          </a:fontRef>
+        </p:style>
+        <p:txBody>
+          <a:bodyPr rtlCol="0" anchor="ctr"/>
+          <a:lstStyle/>
+          <a:p>
+            <a:pPr algn="ctr"/>
+          </a:p>
+        </p:txBody>
+      </p:sp>
+      <p:sp>
+        <p:nvSpPr>
+          <p:cNvPr id="56" name="TextBox 55"/>
+          <p:cNvSpPr txBox="1"/>
+          <p:nvPr/>
+        </p:nvSpPr>
+        <p:spPr>
+          <a:xfrm>
+            <a:off x="4343400" y="4728971"/>
+            <a:ext cx="822960" cy="347472"/>
+          </a:xfrm>
+          <a:prstGeom prst="rect">
+            <a:avLst/>
+          </a:prstGeom>
+          <a:noFill/>
+        </p:spPr>
+        <p:txBody>
+          <a:bodyPr wrap="square">
+            <a:spAutoFit/>
+          </a:bodyPr>
+          <a:lstStyle/>
+          <a:p>
+            <a:pPr algn="l"/>
+            <a:r>
+              <a:rPr sz="1050" b="0" i="0">
+                <a:solidFill>
+                  <a:srgbClr val="333333"/>
+                </a:solidFill>
+              </a:rPr>
+              <a:t>9</a:t>
+            </a:r>
+          </a:p>
+        </p:txBody>
+      </p:sp>
+      <p:sp>
+        <p:nvSpPr>
+          <p:cNvPr id="57" name="Rectangle 56"/>
+          <p:cNvSpPr/>
+          <p:nvPr/>
+        </p:nvSpPr>
+        <p:spPr>
+          <a:xfrm>
+            <a:off x="5212080" y="4690871"/>
+            <a:ext cx="6492240" cy="347472"/>
+          </a:xfrm>
+          <a:prstGeom prst="rect">
+            <a:avLst/>
+          </a:prstGeom>
+          <a:solidFill>
+            <a:srgbClr val="FFFFFF"/>
+          </a:solidFill>
+          <a:ln>
+            <a:noFill/>
+          </a:ln>
+        </p:spPr>
+        <p:style>
+          <a:lnRef idx="1">
+            <a:schemeClr val="accent1"/>
+          </a:lnRef>
+          <a:fillRef idx="3">
+            <a:schemeClr val="accent1"/>
+          </a:fillRef>
+          <a:effectRef idx="2">
+            <a:schemeClr val="accent1"/>
+          </a:effectRef>
+          <a:fontRef idx="minor">
+            <a:schemeClr val="lt1"/>
+          </a:fontRef>
+        </p:style>
+        <p:txBody>
+          <a:bodyPr rtlCol="0" anchor="ctr"/>
+          <a:lstStyle/>
+          <a:p>
+            <a:pPr algn="ctr"/>
+          </a:p>
+        </p:txBody>
+      </p:sp>
+      <p:sp>
+        <p:nvSpPr>
+          <p:cNvPr id="58" name="TextBox 57"/>
+          <p:cNvSpPr txBox="1"/>
+          <p:nvPr/>
+        </p:nvSpPr>
+        <p:spPr>
+          <a:xfrm>
+            <a:off x="5257800" y="4728971"/>
+            <a:ext cx="6400800" cy="347472"/>
+          </a:xfrm>
+          <a:prstGeom prst="rect">
+            <a:avLst/>
+          </a:prstGeom>
+          <a:noFill/>
+        </p:spPr>
+        <p:txBody>
+          <a:bodyPr wrap="square">
+            <a:spAutoFit/>
+          </a:bodyPr>
+          <a:lstStyle/>
+          <a:p>
+            <a:pPr algn="l"/>
+            <a:r>
+              <a:rPr sz="1050" b="0" i="0">
+                <a:solidFill>
+                  <a:srgbClr val="333333"/>
+                </a:solidFill>
+              </a:rPr>
+              <a:t>Settings loading and required-field validation</a:t>
+            </a:r>
+          </a:p>
+        </p:txBody>
+      </p:sp>
+      <p:sp>
+        <p:nvSpPr>
+          <p:cNvPr id="59" name="Rectangle 58"/>
+          <p:cNvSpPr/>
+          <p:nvPr/>
+        </p:nvSpPr>
+        <p:spPr>
+          <a:xfrm>
+            <a:off x="457200" y="5038343"/>
+            <a:ext cx="3840480" cy="347472"/>
+          </a:xfrm>
+          <a:prstGeom prst="rect">
+            <a:avLst/>
+          </a:prstGeom>
+          <a:solidFill>
+            <a:srgbClr val="F7F9FC"/>
+          </a:solidFill>
+          <a:ln>
+            <a:noFill/>
+          </a:ln>
+        </p:spPr>
+        <p:style>
+          <a:lnRef idx="1">
+            <a:schemeClr val="accent1"/>
+          </a:lnRef>
+          <a:fillRef idx="3">
+            <a:schemeClr val="accent1"/>
+          </a:fillRef>
+          <a:effectRef idx="2">
+            <a:schemeClr val="accent1"/>
+          </a:effectRef>
+          <a:fontRef idx="minor">
+            <a:schemeClr val="lt1"/>
+          </a:fontRef>
+        </p:style>
+        <p:txBody>
+          <a:bodyPr rtlCol="0" anchor="ctr"/>
+          <a:lstStyle/>
+          <a:p>
+            <a:pPr algn="ctr"/>
+          </a:p>
+        </p:txBody>
+      </p:sp>
+      <p:sp>
+        <p:nvSpPr>
+          <p:cNvPr id="60" name="TextBox 59"/>
+          <p:cNvSpPr txBox="1"/>
+          <p:nvPr/>
+        </p:nvSpPr>
+        <p:spPr>
+          <a:xfrm>
+            <a:off x="502920" y="5076443"/>
+            <a:ext cx="3749040" cy="347472"/>
+          </a:xfrm>
+          <a:prstGeom prst="rect">
+            <a:avLst/>
+          </a:prstGeom>
+          <a:noFill/>
+        </p:spPr>
+        <p:txBody>
+          <a:bodyPr wrap="square">
+            <a:spAutoFit/>
+          </a:bodyPr>
+          <a:lstStyle/>
+          <a:p>
+            <a:pPr algn="l"/>
+            <a:r>
+              <a:rPr sz="1050" b="0" i="0">
+                <a:solidFill>
+                  <a:srgbClr val="333333"/>
+                </a:solidFill>
+              </a:rPr>
+              <a:t>tests/test_event_generator.py</a:t>
+            </a:r>
+          </a:p>
+        </p:txBody>
+      </p:sp>
+      <p:sp>
+        <p:nvSpPr>
+          <p:cNvPr id="61" name="Rectangle 60"/>
+          <p:cNvSpPr/>
+          <p:nvPr/>
+        </p:nvSpPr>
+        <p:spPr>
+          <a:xfrm>
+            <a:off x="4297680" y="5038343"/>
+            <a:ext cx="914400" cy="347472"/>
+          </a:xfrm>
+          <a:prstGeom prst="rect">
+            <a:avLst/>
+          </a:prstGeom>
+          <a:solidFill>
+            <a:srgbClr val="F7F9FC"/>
+          </a:solidFill>
+          <a:ln>
+            <a:noFill/>
+          </a:ln>
+        </p:spPr>
+        <p:style>
+          <a:lnRef idx="1">
+            <a:schemeClr val="accent1"/>
+          </a:lnRef>
+          <a:fillRef idx="3">
+            <a:schemeClr val="accent1"/>
+          </a:fillRef>
+          <a:effectRef idx="2">
+            <a:schemeClr val="accent1"/>
+          </a:effectRef>
+          <a:fontRef idx="minor">
+            <a:schemeClr val="lt1"/>
+          </a:fontRef>
+        </p:style>
+        <p:txBody>
+          <a:bodyPr rtlCol="0" anchor="ctr"/>
+          <a:lstStyle/>
+          <a:p>
+            <a:pPr algn="ctr"/>
+          </a:p>
+        </p:txBody>
+      </p:sp>
+      <p:sp>
+        <p:nvSpPr>
+          <p:cNvPr id="62" name="TextBox 61"/>
+          <p:cNvSpPr txBox="1"/>
+          <p:nvPr/>
+        </p:nvSpPr>
+        <p:spPr>
+          <a:xfrm>
+            <a:off x="4343400" y="5076443"/>
+            <a:ext cx="822960" cy="347472"/>
+          </a:xfrm>
+          <a:prstGeom prst="rect">
+            <a:avLst/>
+          </a:prstGeom>
+          <a:noFill/>
+        </p:spPr>
+        <p:txBody>
+          <a:bodyPr wrap="square">
+            <a:spAutoFit/>
+          </a:bodyPr>
+          <a:lstStyle/>
+          <a:p>
+            <a:pPr algn="l"/>
+            <a:r>
+              <a:rPr sz="1050" b="0" i="0">
+                <a:solidFill>
+                  <a:srgbClr val="333333"/>
+                </a:solidFill>
+              </a:rPr>
+              <a:t>9</a:t>
+            </a:r>
+          </a:p>
+        </p:txBody>
+      </p:sp>
+      <p:sp>
+        <p:nvSpPr>
+          <p:cNvPr id="63" name="Rectangle 62"/>
+          <p:cNvSpPr/>
+          <p:nvPr/>
+        </p:nvSpPr>
+        <p:spPr>
+          <a:xfrm>
+            <a:off x="5212080" y="5038343"/>
+            <a:ext cx="6492240" cy="347472"/>
+          </a:xfrm>
+          <a:prstGeom prst="rect">
+            <a:avLst/>
+          </a:prstGeom>
+          <a:solidFill>
+            <a:srgbClr val="F7F9FC"/>
+          </a:solidFill>
+          <a:ln>
+            <a:noFill/>
+          </a:ln>
+        </p:spPr>
+        <p:style>
+          <a:lnRef idx="1">
+            <a:schemeClr val="accent1"/>
+          </a:lnRef>
+          <a:fillRef idx="3">
+            <a:schemeClr val="accent1"/>
+          </a:fillRef>
+          <a:effectRef idx="2">
+            <a:schemeClr val="accent1"/>
+          </a:effectRef>
+          <a:fontRef idx="minor">
+            <a:schemeClr val="lt1"/>
+          </a:fontRef>
+        </p:style>
+        <p:txBody>
+          <a:bodyPr rtlCol="0" anchor="ctr"/>
+          <a:lstStyle/>
+          <a:p>
+            <a:pPr algn="ctr"/>
+          </a:p>
+        </p:txBody>
+      </p:sp>
+      <p:sp>
+        <p:nvSpPr>
+          <p:cNvPr id="64" name="TextBox 63"/>
+          <p:cNvSpPr txBox="1"/>
+          <p:nvPr/>
+        </p:nvSpPr>
+        <p:spPr>
+          <a:xfrm>
+            <a:off x="5257800" y="5076443"/>
+            <a:ext cx="6400800" cy="347472"/>
+          </a:xfrm>
+          <a:prstGeom prst="rect">
+            <a:avLst/>
+          </a:prstGeom>
+          <a:noFill/>
+        </p:spPr>
+        <p:txBody>
+          <a:bodyPr wrap="square">
+            <a:spAutoFit/>
+          </a:bodyPr>
+          <a:lstStyle/>
+          <a:p>
+            <a:pPr algn="l"/>
+            <a:r>
+              <a:rPr sz="1050" b="0" i="0">
+                <a:solidFill>
+                  <a:srgbClr val="333333"/>
+                </a:solidFill>
+              </a:rPr>
+              <a:t>Event schema and bad-data injection rates</a:t>
+            </a:r>
+          </a:p>
+        </p:txBody>
+      </p:sp>
+      <p:sp>
+        <p:nvSpPr>
+          <p:cNvPr id="65" name="Rectangle 64"/>
+          <p:cNvSpPr/>
+          <p:nvPr/>
+        </p:nvSpPr>
+        <p:spPr>
+          <a:xfrm>
+            <a:off x="457200" y="5577840"/>
+            <a:ext cx="5120640" cy="914400"/>
+          </a:xfrm>
+          <a:prstGeom prst="rect">
+            <a:avLst/>
+          </a:prstGeom>
+          <a:solidFill>
+            <a:srgbClr val="1E1E2E"/>
+          </a:solidFill>
+          <a:ln>
+            <a:noFill/>
+          </a:ln>
+        </p:spPr>
+        <p:style>
+          <a:lnRef idx="1">
+            <a:schemeClr val="accent1"/>
+          </a:lnRef>
+          <a:fillRef idx="3">
+            <a:schemeClr val="accent1"/>
+          </a:fillRef>
+          <a:effectRef idx="2">
+            <a:schemeClr val="accent1"/>
+          </a:effectRef>
+          <a:fontRef idx="minor">
+            <a:schemeClr val="lt1"/>
+          </a:fontRef>
+        </p:style>
+        <p:txBody>
+          <a:bodyPr rtlCol="0" anchor="ctr"/>
+          <a:lstStyle/>
+          <a:p>
+            <a:pPr algn="ctr"/>
+          </a:p>
+        </p:txBody>
+      </p:sp>
+      <p:sp>
+        <p:nvSpPr>
+          <p:cNvPr id="66" name="Rectangle 65"/>
+          <p:cNvSpPr/>
+          <p:nvPr/>
+        </p:nvSpPr>
+        <p:spPr>
+          <a:xfrm>
+            <a:off x="457200" y="5577840"/>
+            <a:ext cx="50800" cy="914400"/>
+          </a:xfrm>
+          <a:prstGeom prst="rect">
+            <a:avLst/>
+          </a:prstGeom>
+          <a:solidFill>
+            <a:srgbClr val="E94560"/>
+          </a:solidFill>
+          <a:ln>
+            <a:noFill/>
+          </a:ln>
+        </p:spPr>
+        <p:style>
+          <a:lnRef idx="1">
+            <a:schemeClr val="accent1"/>
+          </a:lnRef>
+          <a:fillRef idx="3">
+            <a:schemeClr val="accent1"/>
+          </a:fillRef>
+          <a:effectRef idx="2">
+            <a:schemeClr val="accent1"/>
+          </a:effectRef>
+          <a:fontRef idx="minor">
+            <a:schemeClr val="lt1"/>
+          </a:fontRef>
+        </p:style>
+        <p:txBody>
+          <a:bodyPr rtlCol="0" anchor="ctr"/>
+          <a:lstStyle/>
+          <a:p>
+            <a:pPr algn="ctr"/>
+          </a:p>
+        </p:txBody>
+      </p:sp>
+      <p:sp>
+        <p:nvSpPr>
+          <p:cNvPr id="67" name="TextBox 66"/>
+          <p:cNvSpPr txBox="1"/>
+          <p:nvPr/>
+        </p:nvSpPr>
+        <p:spPr>
+          <a:xfrm>
+            <a:off x="566928" y="5669280"/>
+            <a:ext cx="4956048" cy="731520"/>
           </a:xfrm>
           <a:prstGeom prst="rect">
             <a:avLst/>
@@ -25413,19 +26450,19 @@
           <a:p>
             <a:pPr algn="l"/>
             <a:r>
-              <a:rPr sz="1300">
+              <a:rPr sz="1200">
                 <a:solidFill>
                   <a:srgbClr val="CDD6F4"/>
                 </a:solidFill>
                 <a:latin typeface="Courier New"/>
               </a:rPr>
-              <a:t>$ pytest tests/ -v</a:t>
-            </a:r>
-          </a:p>
-          <a:p>
-            <a:pPr algn="l"/>
-            <a:r>
-              <a:rPr sz="1300">
+              <a:t>$ pytest tests/</a:t>
+            </a:r>
+          </a:p>
+          <a:p>
+            <a:pPr algn="l"/>
+            <a:r>
+              <a:rPr sz="1200">
                 <a:solidFill>
                   <a:srgbClr val="CDD6F4"/>
                 </a:solidFill>
@@ -25437,27 +26474,27 @@
           <a:p>
             <a:pPr algn="l"/>
             <a:r>
-              <a:rPr sz="1300">
+              <a:rPr sz="1200">
                 <a:solidFill>
                   <a:srgbClr val="CDD6F4"/>
                 </a:solidFill>
                 <a:latin typeface="Courier New"/>
               </a:rPr>
-              <a:t>48 passed in 3.21s</a:t>
-            </a:r>
-          </a:p>
-        </p:txBody>
-      </p:sp>
-      <p:sp>
-        <p:nvSpPr>
-          <p:cNvPr id="38" name="TextBox 37"/>
-          <p:cNvSpPr txBox="1"/>
-          <p:nvPr/>
-        </p:nvSpPr>
-        <p:spPr>
-          <a:xfrm>
-            <a:off x="5669280" y="3566160"/>
-            <a:ext cx="6035040" cy="347472"/>
+              <a:t>95 passed (10 Spark-only tests deselected)</a:t>
+            </a:r>
+          </a:p>
+        </p:txBody>
+      </p:sp>
+      <p:sp>
+        <p:nvSpPr>
+          <p:cNvPr id="68" name="TextBox 67"/>
+          <p:cNvSpPr txBox="1"/>
+          <p:nvPr/>
+        </p:nvSpPr>
+        <p:spPr>
+          <a:xfrm>
+            <a:off x="5852160" y="5532120"/>
+            <a:ext cx="5852160" cy="347472"/>
           </a:xfrm>
           <a:prstGeom prst="rect">
             <a:avLst/>
@@ -25484,34 +26521,34 @@
       </p:sp>
       <p:sp>
         <p:nvSpPr>
-          <p:cNvPr id="39" name="TextBox 38"/>
-          <p:cNvSpPr txBox="1"/>
-          <p:nvPr/>
-        </p:nvSpPr>
-        <p:spPr>
-          <a:xfrm>
-            <a:off x="5669280" y="3950208"/>
-            <a:ext cx="6035040" cy="1280160"/>
-          </a:xfrm>
-          <a:prstGeom prst="rect">
-            <a:avLst/>
-          </a:prstGeom>
-          <a:noFill/>
-        </p:spPr>
-        <p:txBody>
-          <a:bodyPr wrap="square">
-            <a:spAutoFit/>
-          </a:bodyPr>
-          <a:lstStyle/>
-          <a:p>
-            <a:pPr algn="l"/>
-            <a:r>
-              <a:rPr sz="1300" b="0" i="0">
+          <p:cNvPr id="69" name="TextBox 68"/>
+          <p:cNvSpPr txBox="1"/>
+          <p:nvPr/>
+        </p:nvSpPr>
+        <p:spPr>
+          <a:xfrm>
+            <a:off x="5852160" y="5870448"/>
+            <a:ext cx="5852160" cy="777240"/>
+          </a:xfrm>
+          <a:prstGeom prst="rect">
+            <a:avLst/>
+          </a:prstGeom>
+          <a:noFill/>
+        </p:spPr>
+        <p:txBody>
+          <a:bodyPr wrap="square">
+            <a:spAutoFit/>
+          </a:bodyPr>
+          <a:lstStyle/>
+          <a:p>
+            <a:pPr algn="l"/>
+            <a:r>
+              <a:rPr sz="1200" b="0" i="0">
                 <a:solidFill>
                   <a:srgbClr val="333333"/>
                 </a:solidFill>
               </a:rPr>
-              <a:t>Pure-Python business logic is extracted from Spark-dependent code, enabling fast offline tests without a running cluster. Spark interactions are mocked at the boundary using unittest.mock.</a:t>
+              <a:t>Pure-Python business logic is separated from Spark code, so most tests run offline without a cluster. Spark calls are mocked at the boundary.</a:t>
             </a:r>
           </a:p>
         </p:txBody>
@@ -26206,7 +27243,7 @@
                   <a:srgbClr val="333333"/>
                 </a:solidFill>
               </a:rPr>
-              <a:t>A ★</a:t>
+              <a:t>A ✅</a:t>
             </a:r>
           </a:p>
         </p:txBody>
@@ -26360,7 +27397,7 @@
                   <a:srgbClr val="333333"/>
                 </a:solidFill>
               </a:rPr>
-              <a:t>AI classifies violation severity → routes alert</a:t>
+              <a:t>Built: spike detection + log + Slack. Next: AI severity</a:t>
             </a:r>
           </a:p>
         </p:txBody>
@@ -27789,7 +28826,7 @@
                   <a:srgbClr val="333333"/>
                 </a:solidFill>
               </a:rPr>
-              <a:t>Recommended next step: A (Alerting) — highest immediate business value, lowest lift. Wires the existing dq_rule_metrics table to a notification layer. No new ML needed.</a:t>
+              <a:t>Stage A is delivered: spike detection and the audit log are verified on Databricks; Slack delivery is ready once the webhook secret is configured. Next: choose among B–E, and add AI severity and plain-English explanations to A.</a:t>
             </a:r>
           </a:p>
         </p:txBody>
@@ -27841,7 +28878,7 @@
                   <a:srgbClr val="0F3460"/>
                 </a:solidFill>
               </a:rPr>
-              <a:t>Opportunity A — Automated Alerting</a:t>
+              <a:t>Stage A — Automated Alerting (Delivered)</a:t>
             </a:r>
           </a:p>
         </p:txBody>
@@ -28041,7 +29078,7 @@
                 </a:solidFill>
                 <a:latin typeface="Courier New"/>
               </a:rPr>
-              <a:t>  Alert Evaluation Engine</a:t>
+              <a:t>  Alert check job (dq_alert_check.py)</a:t>
             </a:r>
           </a:p>
           <a:p>
@@ -28065,7 +29102,7 @@
                 </a:solidFill>
                 <a:latin typeface="Courier New"/>
               </a:rPr>
-              <a:t>  │  if violation_pct &gt; threshold for rule X             │</a:t>
+              <a:t>  │  baseline = avg violation_pct of the last N runs     │</a:t>
             </a:r>
           </a:p>
           <a:p>
@@ -28077,7 +29114,7 @@
                 </a:solidFill>
                 <a:latin typeface="Courier New"/>
               </a:rPr>
-              <a:t>  │  → classify severity (info / warning / critical)     │</a:t>
+              <a:t>  │  spike if last run &gt; max(2.5 × baseline, 5%)         │</a:t>
             </a:r>
           </a:p>
           <a:p>
@@ -28089,7 +29126,7 @@
                 </a:solidFill>
                 <a:latin typeface="Courier New"/>
               </a:rPr>
-              <a:t>  │  → deduplicate (don't re-alert same issue twice)     │</a:t>
+              <a:t>  │  needs at least 3 prior runs for the rule            │</a:t>
             </a:r>
           </a:p>
           <a:p>
@@ -28101,7 +29138,7 @@
                 </a:solidFill>
                 <a:latin typeface="Courier New"/>
               </a:rPr>
-              <a:t>  │  → route to appropriate channel                      │</a:t>
+              <a:t>  │  never re-alert the same rule + run                  │</a:t>
             </a:r>
           </a:p>
           <a:p>
@@ -28125,7 +29162,7 @@
                 </a:solidFill>
                 <a:latin typeface="Courier New"/>
               </a:rPr>
-              <a:t>           ├──► Slack / Teams notification</a:t>
+              <a:t>           ├──► Slack webhook notification</a:t>
             </a:r>
           </a:p>
           <a:p>
@@ -28137,7 +29174,7 @@
                 </a:solidFill>
                 <a:latin typeface="Courier New"/>
               </a:rPr>
-              <a:t>           ├──► PagerDuty / OpsGenie (critical only)</a:t>
+              <a:t>           ├──► dq_alert_log table (full audit trail)</a:t>
             </a:r>
           </a:p>
           <a:p>
@@ -28149,7 +29186,7 @@
                 </a:solidFill>
                 <a:latin typeface="Courier New"/>
               </a:rPr>
-              <a:t>           └──► dq_alerts table (full audit log)</a:t>
+              <a:t>           └──► native Databricks SQL Alert (alternative path)</a:t>
             </a:r>
           </a:p>
         </p:txBody>
@@ -28183,7 +29220,7 @@
                   <a:srgbClr val="0F3460"/>
                 </a:solidFill>
               </a:rPr>
-              <a:t>AI infusion in the alert message:</a:t>
+              <a:t>Next: AI infusion in the alert message</a:t>
             </a:r>
           </a:p>
         </p:txBody>
@@ -28649,7 +29686,7 @@
                   <a:srgbClr val="333333"/>
                 </a:solidFill>
               </a:rPr>
-              <a:t>Existing infrastructure (dq_rule_metrics, LLM backend) is already in place. Alerting is an orchestration layer on top — estimated 1 sprint to ship.</a:t>
+              <a:t>Spike detection and logging are verified end to end on Databricks; Slack delivery is ready once the webhook secret is configured. The LLM backend is already in place for the severity and explanation step.</a:t>
             </a:r>
           </a:p>
         </p:txBody>
@@ -28967,6 +30004,21 @@
               <a:t>  ✅  Human governance layer</a:t>
             </a:r>
           </a:p>
+          <a:p>
+            <a:pPr>
+              <a:spcBef>
+                <a:spcPts val="1600"/>
+              </a:spcBef>
+            </a:pPr>
+            <a:r>
+              <a:rPr sz="1500">
+                <a:solidFill>
+                  <a:srgbClr val="0D522A"/>
+                </a:solidFill>
+              </a:rPr>
+              <a:t>  ✅  Spike alerting with audit log</a:t>
+            </a:r>
+          </a:p>
         </p:txBody>
       </p:sp>
       <p:sp>
@@ -29492,7 +30544,7 @@
                   <a:srgbClr val="333333"/>
                 </a:solidFill>
               </a:rPr>
-              <a:t>•  Which next-stage opportunity (Alerting / Drift / Scorecard) aligns best with delivery priorities?</a:t>
+              <a:t>•  Which next-stage opportunity (Drift / Scorecard / Governance) aligns best with delivery priorities?</a:t>
             </a:r>
           </a:p>
           <a:p>
@@ -29911,7 +30963,7 @@
                   <a:srgbClr val="CCCCCC"/>
                 </a:solidFill>
               </a:rPr>
-              <a:t>5 phases complete  ·  48 unit tests passing  ·  Production-grade architecture  ·  Ready for next phase</a:t>
+              <a:t>5 phases + alerting complete  ·  105 unit tests  ·  Production-grade architecture  ·  Ready for next phase</a:t>
             </a:r>
           </a:p>
         </p:txBody>
